--- a/blackhat-2026-adversarial-ai/M4-ml-supply-chain/slides/M4 Supply Chain.pptx
+++ b/blackhat-2026-adversarial-ai/M4-ml-supply-chain/slides/M4 Supply Chain.pptx
@@ -4,6 +4,9 @@
   <p:sldMasterIdLst>
     <p:sldMasterId id="2147483648" r:id="rId1"/>
   </p:sldMasterIdLst>
+  <p:notesMasterIdLst>
+    <p:notesMasterId r:id="rId25"/>
+  </p:notesMasterIdLst>
   <p:sldIdLst>
     <p:sldId id="256" r:id="rId2"/>
     <p:sldId id="257" r:id="rId3"/>
@@ -29,9 +32,6 @@
     <p:sldId id="277" r:id="rId23"/>
     <p:sldId id="278" r:id="rId24"/>
   </p:sldIdLst>
-  <p:notesMasterIdLst>
-    <p:notesMasterId r:id="rId25"/>
-  </p:notesMasterIdLst>
   <p:sldSz cx="18288000" cy="10287000"/>
   <p:notesSz cx="10287000" cy="18288000"/>
   <p:defaultTextStyle>
@@ -126,6 +126,11 @@
       </a:defRPr>
     </a:lvl9pPr>
   </p:defaultTextStyle>
+  <p:extLst>
+    <p:ext uri="{EFAFB233-063F-42B5-8137-9DF3F51BA10A}">
+      <p15:sldGuideLst xmlns:p15="http://schemas.microsoft.com/office/powerpoint/2012/main"/>
+    </p:ext>
+  </p:extLst>
 </p:presentation>
 </file>
 
@@ -151,234 +156,10 @@
           <a:chExt cx="0" cy="0"/>
         </a:xfrm>
       </p:grpSpPr>
-      <p:sp>
-        <p:nvSpPr>
-          <p:cNvPr id="2" name="Header Placeholder 1"/>
-          <p:cNvSpPr>
-            <a:spLocks noGrp="1"/>
-          </p:cNvSpPr>
-          <p:nvPr>
-            <p:ph type="hdr" sz="quarter"/>
-          </p:nvPr>
-        </p:nvSpPr>
-        <p:spPr>
-          <a:xfrm>
-            <a:off x="0" y="0"/>
-            <a:ext cx="2971800" cy="458788"/>
-          </a:xfrm>
-          <a:prstGeom prst="rect">
-            <a:avLst/>
-          </a:prstGeom>
-        </p:spPr>
-        <p:txBody>
-          <a:bodyPr vert="horz" lIns="91440" tIns="45720" rIns="91440" bIns="45720" rtlCol="0"/>
-          <a:lstStyle>
-            <a:lvl1pPr algn="l">
-              <a:defRPr sz="1200"/>
-            </a:lvl1pPr>
-          </a:lstStyle>
-          <a:p>
-            <a:endParaRPr lang="en-US"/>
-          </a:p>
-        </p:txBody>
-      </p:sp>
-      <p:sp>
-        <p:nvSpPr>
-          <p:cNvPr id="3" name="Date Placeholder 2"/>
-          <p:cNvSpPr>
-            <a:spLocks noGrp="1"/>
-          </p:cNvSpPr>
-          <p:nvPr>
-            <p:ph type="dt" idx="1"/>
-          </p:nvPr>
-        </p:nvSpPr>
-        <p:spPr>
-          <a:xfrm>
-            <a:off x="3884613" y="0"/>
-            <a:ext cx="2971800" cy="458788"/>
-          </a:xfrm>
-          <a:prstGeom prst="rect">
-            <a:avLst/>
-          </a:prstGeom>
-        </p:spPr>
-        <p:txBody>
-          <a:bodyPr vert="horz" lIns="91440" tIns="45720" rIns="91440" bIns="45720" rtlCol="0"/>
-          <a:lstStyle>
-            <a:lvl1pPr algn="r">
-              <a:defRPr sz="1200"/>
-            </a:lvl1pPr>
-          </a:lstStyle>
-          <a:p>
-            <a:fld id="{5282F153-3F37-0F45-9E97-73ACFA13230C}" type="datetimeFigureOut">
-              <a:rPr lang="en-US"/>
-              <a:t>7/23/19</a:t>
-            </a:fld>
-            <a:endParaRPr lang="en-US"/>
-          </a:p>
-        </p:txBody>
-      </p:sp>
-      <p:sp>
-        <p:nvSpPr>
-          <p:cNvPr id="4" name="Slide Image Placeholder 3"/>
-          <p:cNvSpPr>
-            <a:spLocks noGrp="1" noRot="1" noChangeAspect="1"/>
-          </p:cNvSpPr>
-          <p:nvPr>
-            <p:ph type="sldImg" idx="2"/>
-          </p:nvPr>
-        </p:nvSpPr>
-        <p:spPr>
-          <a:xfrm>
-            <a:off x="685800" y="1143000"/>
-            <a:ext cx="5486400" cy="3086100"/>
-          </a:xfrm>
-          <a:prstGeom prst="rect">
-            <a:avLst/>
-          </a:prstGeom>
-          <a:noFill/>
-          <a:ln w="12700">
-            <a:solidFill>
-              <a:prstClr val="black"/>
-            </a:solidFill>
-          </a:ln>
-        </p:spPr>
-        <p:txBody>
-          <a:bodyPr vert="horz" lIns="91440" tIns="45720" rIns="91440" bIns="45720" rtlCol="0" anchor="ctr"/>
-          <a:lstStyle/>
-          <a:p>
-            <a:endParaRPr lang="en-US"/>
-          </a:p>
-        </p:txBody>
-      </p:sp>
-      <p:sp>
-        <p:nvSpPr>
-          <p:cNvPr id="5" name="Notes Placeholder 4"/>
-          <p:cNvSpPr>
-            <a:spLocks noGrp="1"/>
-          </p:cNvSpPr>
-          <p:nvPr>
-            <p:ph type="body" sz="quarter" idx="3"/>
-          </p:nvPr>
-        </p:nvSpPr>
-        <p:spPr>
-          <a:xfrm>
-            <a:off x="685800" y="4400550"/>
-            <a:ext cx="5486400" cy="3600450"/>
-          </a:xfrm>
-          <a:prstGeom prst="rect">
-            <a:avLst/>
-          </a:prstGeom>
-        </p:spPr>
-        <p:txBody>
-          <a:bodyPr vert="horz" lIns="91440" tIns="45720" rIns="91440" bIns="45720" rtlCol="0"/>
-          <a:lstStyle/>
-          <a:p>
-            <a:pPr lvl="0"/>
-            <a:r>
-              <a:rPr lang="en-US"/>
-              <a:t>Click to edit Master text styles</a:t>
-            </a:r>
-          </a:p>
-          <a:p>
-            <a:pPr lvl="1"/>
-            <a:r>
-              <a:rPr lang="en-US"/>
-              <a:t>Second level</a:t>
-            </a:r>
-          </a:p>
-          <a:p>
-            <a:pPr lvl="2"/>
-            <a:r>
-              <a:rPr lang="en-US"/>
-              <a:t>Third level</a:t>
-            </a:r>
-          </a:p>
-          <a:p>
-            <a:pPr lvl="3"/>
-            <a:r>
-              <a:rPr lang="en-US"/>
-              <a:t>Fourth level</a:t>
-            </a:r>
-          </a:p>
-          <a:p>
-            <a:pPr lvl="4"/>
-            <a:r>
-              <a:rPr lang="en-US"/>
-              <a:t>Fifth level</a:t>
-            </a:r>
-          </a:p>
-        </p:txBody>
-      </p:sp>
-      <p:sp>
-        <p:nvSpPr>
-          <p:cNvPr id="6" name="Footer Placeholder 5"/>
-          <p:cNvSpPr>
-            <a:spLocks noGrp="1"/>
-          </p:cNvSpPr>
-          <p:nvPr>
-            <p:ph type="ftr" sz="quarter" idx="4"/>
-          </p:nvPr>
-        </p:nvSpPr>
-        <p:spPr>
-          <a:xfrm>
-            <a:off x="0" y="8685213"/>
-            <a:ext cx="2971800" cy="458787"/>
-          </a:xfrm>
-          <a:prstGeom prst="rect">
-            <a:avLst/>
-          </a:prstGeom>
-        </p:spPr>
-        <p:txBody>
-          <a:bodyPr vert="horz" lIns="91440" tIns="45720" rIns="91440" bIns="45720" rtlCol="0" anchor="b"/>
-          <a:lstStyle>
-            <a:lvl1pPr algn="l">
-              <a:defRPr sz="1200"/>
-            </a:lvl1pPr>
-          </a:lstStyle>
-          <a:p>
-            <a:endParaRPr lang="en-US"/>
-          </a:p>
-        </p:txBody>
-      </p:sp>
-      <p:sp>
-        <p:nvSpPr>
-          <p:cNvPr id="7" name="Slide Number Placeholder 6"/>
-          <p:cNvSpPr>
-            <a:spLocks noGrp="1"/>
-          </p:cNvSpPr>
-          <p:nvPr>
-            <p:ph type="sldNum" sz="quarter" idx="5"/>
-          </p:nvPr>
-        </p:nvSpPr>
-        <p:spPr>
-          <a:xfrm>
-            <a:off x="3884613" y="8685213"/>
-            <a:ext cx="2971800" cy="458787"/>
-          </a:xfrm>
-          <a:prstGeom prst="rect">
-            <a:avLst/>
-          </a:prstGeom>
-        </p:spPr>
-        <p:txBody>
-          <a:bodyPr vert="horz" lIns="91440" tIns="45720" rIns="91440" bIns="45720" rtlCol="0" anchor="b"/>
-          <a:lstStyle>
-            <a:lvl1pPr algn="r">
-              <a:defRPr sz="1200"/>
-            </a:lvl1pPr>
-          </a:lstStyle>
-          <a:p>
-            <a:fld id="{CE5E9CC1-C706-0F49-92D6-E571CC5EEA8F}" type="slidenum">
-              <a:rPr lang="en-US"/>
-              <a:t>‹#›</a:t>
-            </a:fld>
-            <a:endParaRPr lang="en-US"/>
-          </a:p>
-        </p:txBody>
-      </p:sp>
     </p:spTree>
     <p:extLst>
       <p:ext uri="{BB962C8B-B14F-4D97-AF65-F5344CB8AC3E}">
-        <p14:creationId xmlns:p14="http://schemas.microsoft.com/office/powerpoint/2010/main" val="1024086991"/>
+        <p14:creationId xmlns:p14="http://schemas.microsoft.com/office/powerpoint/2010/main" val="1461838058"/>
       </p:ext>
     </p:extLst>
   </p:cSld>
@@ -522,10 +303,6 @@
           <a:bodyPr/>
           <a:lstStyle/>
           <a:p>
-            <a:r>
-              <a:rPr lang="en-US" dirty="0"/>
-              <a:t>The odd one out, and a deliberate change of pace after two model-centric modules. No chatting today. You put on a reverse-engineer hat and audit the files the app ships. Fully deterministic, no model, no key: the most reliable everyone-passes module in the course.</a:t>
-            </a:r>
             <a:endParaRPr lang="en-US" dirty="0"/>
           </a:p>
         </p:txBody>
@@ -610,10 +387,6 @@
           <a:bodyPr/>
           <a:lstStyle/>
           <a:p>
-            <a:r>
-              <a:rPr lang="en-US" dirty="0"/>
-              <a:t>Say this explicitly. It pre-empts the obvious question and models good lab hygiene. The graded path is a static audit plus a known-answer submit.</a:t>
-            </a:r>
             <a:endParaRPr lang="en-US" dirty="0"/>
           </a:p>
         </p:txBody>
@@ -698,10 +471,6 @@
           <a:bodyPr/>
           <a:lstStyle/>
           <a:p>
-            <a:r>
-              <a:rPr lang="en-US" dirty="0"/>
-              <a:t>The important design property is static disassembly, not execution. genops walks opcodes and yields them; nothing is reconstructed, so scanning a malicious pickle is safe.</a:t>
-            </a:r>
             <a:endParaRPr lang="en-US" dirty="0"/>
           </a:p>
         </p:txBody>
@@ -786,10 +555,6 @@
           <a:bodyPr/>
           <a:lstStyle/>
           <a:p>
-            <a:r>
-              <a:rPr lang="en-US" dirty="0"/>
-              <a:t>Two things to point at. The pkl is flagged with the specific dangerous opcodes, and the safetensors is reported clean with a note that it is not even a parseable pickle. Deliberate design: only real dangerous opcodes mark a file malicious, so a genuine safetensors never false-positives.</a:t>
-            </a:r>
             <a:endParaRPr lang="en-US" dirty="0"/>
           </a:p>
         </p:txBody>
@@ -874,10 +639,6 @@
           <a:bodyPr/>
           <a:lstStyle/>
           <a:p>
-            <a:r>
-              <a:rPr lang="en-US" dirty="0"/>
-              <a:t>A rare case in security where a clean structural fix exists and is already widely adopted, so use safetensors is genuinely actionable advice rather than a hope.</a:t>
-            </a:r>
             <a:endParaRPr lang="en-US" dirty="0"/>
           </a:p>
         </p:txBody>
@@ -962,10 +723,6 @@
           <a:bodyPr/>
           <a:lstStyle/>
           <a:p>
-            <a:r>
-              <a:rPr lang="en-US" dirty="0"/>
-              <a:t>FACILITATION, CHECK BEFORE CLASS. Participants need the artifacts inside their container: GET /api/m4/bundle ships the artifacts plus a stdlib scanner and a README. Verify that PR is merged and deployed. If it is not, the container COPYs only halcyon/ so labs/m4 is not there and nobody can run the scanner — in that case run the scan as a screen-share and let them submit from your output. Also note stretch now requires the VERSION.</a:t>
-            </a:r>
             <a:endParaRPr lang="en-US" dirty="0"/>
           </a:p>
         </p:txBody>
@@ -1050,10 +807,6 @@
           <a:bodyPr/>
           <a:lstStyle/>
           <a:p>
-            <a:r>
-              <a:rPr lang="en-US" dirty="0"/>
-              <a:t>The lesson is subtler than update your deps. Pinning is correct engineering practice — reproducible builds require it. But a pin is a decision you made once and stopped thinking about, and the CVE arrives later. Pinning is necessary and not sufficient. Lockfile scanning belongs in CI, not a quarterly review.</a:t>
-            </a:r>
             <a:endParaRPr lang="en-US" dirty="0"/>
           </a:p>
         </p:txBody>
@@ -1138,10 +891,6 @@
           <a:bodyPr/>
           <a:lstStyle/>
           <a:p>
-            <a:r>
-              <a:rPr lang="en-US" dirty="0"/>
-              <a:t>The one live RCE of the course and it is instructor-only. The command is in docs/m4-instructor-demo.md. Throwaway container, never the host, never conference wifi. The moment that lands is the shell command printing from what looks like a model load. Then flip the flag and show the refusal on the extension check.</a:t>
-            </a:r>
             <a:endParaRPr lang="en-US" dirty="0"/>
           </a:p>
         </p:txBody>
@@ -1226,10 +975,6 @@
           <a:bodyPr/>
           <a:lstStyle/>
           <a:p>
-            <a:r>
-              <a:rPr lang="en-US" dirty="0"/>
-              <a:t>M4’s secure beat is a demo rather than a validate flip, because the graded path is a known-answer check with no flag to toggle. The refusal happens on metadata, not content, which is what makes it safe.</a:t>
-            </a:r>
             <a:endParaRPr lang="en-US" dirty="0"/>
           </a:p>
         </p:txBody>
@@ -1314,10 +1059,6 @@
           <a:bodyPr/>
           <a:lstStyle/>
           <a:p>
-            <a:r>
-              <a:rPr lang="en-US" dirty="0"/>
-              <a:t>The second bullet is the sharp one: hash pinning moves the trust problem rather than solving it. Somebody has to decide the first hash is trustworthy, and that decision is usually it is what we downloaded on Tuesday. Also raise trust_remote_code=True, the modern equivalent of unpickling.</a:t>
-            </a:r>
             <a:endParaRPr lang="en-US" dirty="0"/>
           </a:p>
         </p:txBody>
@@ -1402,10 +1143,6 @@
           <a:bodyPr/>
           <a:lstStyle/>
           <a:p>
-            <a:r>
-              <a:rPr lang="en-US" dirty="0"/>
-              <a:t>Scanning is only moderate and be specific about why: nullifAI beat platform-side PickleScan by breaking the stream. Scanners are a useful layer and a losing arms race. Choosing a format with no code-execution semantics is the structural fix.</a:t>
-            </a:r>
             <a:endParaRPr lang="en-US" dirty="0"/>
           </a:p>
         </p:txBody>
@@ -1490,10 +1227,6 @@
           <a:bodyPr/>
           <a:lstStyle/>
           <a:p>
-            <a:r>
-              <a:rPr lang="en-US" dirty="0"/>
-              <a:t>Reframe the map. We are not moving up the stack, we are looking underneath it. Base models, embedding models, hundreds of transitive Python packages, all pulled from public hubs and all executing on your infrastructure. This risk exists before a single token is generated.</a:t>
-            </a:r>
             <a:endParaRPr lang="en-US" dirty="0"/>
           </a:p>
         </p:txBody>
@@ -1578,10 +1311,6 @@
           <a:bodyPr/>
           <a:lstStyle/>
           <a:p>
-            <a:r>
-              <a:rPr lang="en-US" dirty="0"/>
-              <a:t>The reframing that changes behaviour. Nobody would curl pipe sudo bash a random script, and everyone does the moral equivalent with model weights daily. Once model equals dependency lands, existing supply-chain instincts transfer wholesale.</a:t>
-            </a:r>
             <a:endParaRPr lang="en-US" dirty="0"/>
           </a:p>
         </p:txBody>
@@ -1666,10 +1395,6 @@
           <a:bodyPr/>
           <a:lstStyle/>
           <a:p>
-            <a:r>
-              <a:rPr lang="en-US" dirty="0"/>
-              <a:t>Six actions. The weights_only=True tip is the highest-value one-liner: a single kwarg that removes the entire pickle-RCE class from PyTorch loading, and most teams do not know it exists. The trust_remote_code grep usually finds something.</a:t>
-            </a:r>
             <a:endParaRPr lang="en-US" dirty="0"/>
           </a:p>
         </p:txBody>
@@ -1754,10 +1479,6 @@
           <a:bodyPr/>
           <a:lstStyle/>
           <a:p>
-            <a:r>
-              <a:rPr lang="en-US" dirty="0"/>
-              <a:t>End on the Python docs line if you want a laugh. The official documentation has warned about this in a red box for twenty years and the entire ML ecosystem standardised on it anyway. That gap between documented risk and shipped practice is the real subject of this module.</a:t>
-            </a:r>
             <a:endParaRPr lang="en-US" dirty="0"/>
           </a:p>
         </p:txBody>
@@ -1842,10 +1563,6 @@
           <a:bodyPr/>
           <a:lstStyle/>
           <a:p>
-            <a:r>
-              <a:rPr lang="en-US" dirty="0"/>
-              <a:t>Artifact audited. Close Day 1 and preview M5: the model stops talking and starts doing.</a:t>
-            </a:r>
             <a:endParaRPr lang="en-US" dirty="0"/>
           </a:p>
         </p:txBody>
@@ -1930,10 +1647,6 @@
           <a:bodyPr/>
           <a:lstStyle/>
           <a:p>
-            <a:r>
-              <a:rPr lang="en-US" dirty="0"/>
-              <a:t>This is the sentence the module exists to prove. Most ML practitioners think of a model file as data: weights, numbers, inert. For the most common serialization format in the ecosystem that is simply false, and the gap between that belief and reality is where this whole attack class lives.</a:t>
-            </a:r>
             <a:endParaRPr lang="en-US" dirty="0"/>
           </a:p>
         </p:txBody>
@@ -2018,10 +1731,6 @@
           <a:bodyPr/>
           <a:lstStyle/>
           <a:p>
-            <a:r>
-              <a:rPr lang="en-US" dirty="0"/>
-              <a:t>The nullifAI detail is the one to dwell on: attackers compressed with 7z instead of ZIP and deliberately broke the pickle stream, so the platform scanner failed to parse it while Python still executed the payload. That is a scanner-evasion arms race, which tells you we scan uploads is not a finished answer.</a:t>
-            </a:r>
             <a:endParaRPr lang="en-US" dirty="0"/>
           </a:p>
         </p:txBody>
@@ -2106,10 +1815,6 @@
           <a:bodyPr/>
           <a:lstStyle/>
           <a:p>
-            <a:r>
-              <a:rPr lang="en-US" dirty="0"/>
-              <a:t>Set up the exercise as triage rather than exploitation. They are not attacking Eiger today, they are auditing what Eiger shipped, which is the actual job most of them will be asked to do when their company adopts AI.</a:t>
-            </a:r>
             <a:endParaRPr lang="en-US" dirty="0"/>
           </a:p>
         </p:txBody>
@@ -2194,10 +1899,6 @@
           <a:bodyPr/>
           <a:lstStyle/>
           <a:p>
-            <a:r>
-              <a:rPr lang="en-US" dirty="0"/>
-              <a:t>reduce is a legitimate, documented protocol: it lets an object tell the unpickler to rebuild me, call this function with these arguments. The unpickler dutifully does. So a pickle is not a description of an object, it is instructions for reconstructing one, and call os.system is a perfectly valid instruction. protocol=4 is why this shows up as STACK_GLOBAL plus REDUCE rather than a plain GLOBAL.</a:t>
-            </a:r>
             <a:endParaRPr lang="en-US" dirty="0"/>
           </a:p>
         </p:txBody>
@@ -2282,10 +1983,6 @@
           <a:bodyPr/>
           <a:lstStyle/>
           <a:p>
-            <a:r>
-              <a:rPr lang="en-US" dirty="0"/>
-              <a:t>Land the asymmetry. Every other module needed the model to cooperate. This one needs nothing but a file read. Our payload is an echo so the demo is safe, but the mechanism is identical to a reverse shell — nullifAI’s real version connected to a hard-coded IP.</a:t>
-            </a:r>
             <a:endParaRPr lang="en-US" dirty="0"/>
           </a:p>
         </p:txBody>
@@ -2370,10 +2067,6 @@
           <a:bodyPr/>
           <a:lstStyle/>
           <a:p>
-            <a:r>
-              <a:rPr lang="en-US" dirty="0"/>
-              <a:t>The single most practically useful thing a participant leaves M4 with. The PyTorch row surprises people: the default checkpoint format in the most popular deep-learning framework was pickle-based, which is why torch.load grew a weights_only flag. If they remember one slide, it should be this one.</a:t>
-            </a:r>
             <a:endParaRPr lang="en-US" dirty="0"/>
           </a:p>
         </p:txBody>
@@ -2458,10 +2151,6 @@
           <a:bodyPr/>
           <a:lstStyle/>
           <a:p>
-            <a:r>
-              <a:rPr lang="en-US" dirty="0"/>
-              <a:t>Two guards in the right order. Format-only lets a poisoned safetensors-named file through if you trust extensions. Hash-only still unpickles.</a:t>
-            </a:r>
             <a:endParaRPr lang="en-US" dirty="0"/>
           </a:p>
         </p:txBody>
@@ -2535,6 +2224,11 @@
 <file path=ppt/slideMasters/slideMaster1.xml><?xml version="1.0" encoding="utf-8"?>
 <p:sldMaster xmlns:a="http://schemas.openxmlformats.org/drawingml/2006/main" xmlns:r="http://schemas.openxmlformats.org/officeDocument/2006/relationships" xmlns:p="http://schemas.openxmlformats.org/presentationml/2006/main">
   <p:cSld>
+    <p:bg>
+      <p:bgRef idx="1001">
+        <a:schemeClr val="bg1"/>
+      </p:bgRef>
+    </p:bg>
     <p:spTree>
       <p:nvGrpSpPr>
         <p:cNvPr id="1" name=""/>
@@ -2817,6 +2511,7 @@
         <a:solidFill>
           <a:srgbClr val="000000"/>
         </a:solidFill>
+        <a:effectLst/>
       </p:bgPr>
     </p:bg>
     <p:spTree>
@@ -2874,17 +2569,24 @@
           </a:gradFill>
           <a:ln/>
         </p:spPr>
+        <p:txBody>
+          <a:bodyPr/>
+          <a:lstStyle/>
+          <a:p>
+            <a:endParaRPr lang="en-US"/>
+          </a:p>
+        </p:txBody>
       </p:sp>
       <p:pic>
         <p:nvPicPr>
-          <p:cNvPr id="3" name="Image 0" descr="preencoded.png">    </p:cNvPr>
+          <p:cNvPr id="3" name="Image 0" descr="preencoded.png"/>
           <p:cNvPicPr>
             <a:picLocks noChangeAspect="1"/>
           </p:cNvPicPr>
           <p:nvPr/>
         </p:nvPicPr>
         <p:blipFill>
-          <a:blip r:embed="rId1"/>
+          <a:blip r:embed="rId3"/>
           <a:stretch>
             <a:fillRect/>
           </a:stretch>
@@ -2922,11 +2624,11 @@
           </a:bodyPr>
           <a:lstStyle/>
           <a:p>
-            <a:pPr algn="l" indent="0" marL="0">
-              <a:buNone/>
-            </a:pPr>
-            <a:r>
-              <a:rPr lang="en-US" sz="1650" spc="495" kern="0" dirty="0">
+            <a:pPr marL="0" indent="0" algn="l">
+              <a:buNone/>
+            </a:pPr>
+            <a:r>
+              <a:rPr lang="en-US" sz="1650" kern="0" spc="495" dirty="0">
                 <a:solidFill>
                   <a:srgbClr val="36CDFF"/>
                 </a:solidFill>
@@ -2963,14 +2665,14 @@
           </a:bodyPr>
           <a:lstStyle/>
           <a:p>
-            <a:pPr algn="l" indent="0" marL="0">
+            <a:pPr marL="0" indent="0" algn="l">
               <a:lnSpc>
                 <a:spcPct val="71965"/>
               </a:lnSpc>
               <a:buNone/>
             </a:pPr>
             <a:r>
-              <a:rPr lang="en-US" sz="11250" b="1" spc="113" kern="0" dirty="0">
+              <a:rPr lang="en-US" sz="11250" b="1" kern="0" spc="113" dirty="0">
                 <a:solidFill>
                   <a:srgbClr val="FFFFFF"/>
                 </a:solidFill>
@@ -2980,14 +2682,8 @@
               </a:rPr>
               <a:t>ML SUPPLY </a:t>
             </a:r>
-            <a:pPr algn="l" indent="0" marL="0">
-              <a:lnSpc>
-                <a:spcPct val="71965"/>
-              </a:lnSpc>
-              <a:buNone/>
-            </a:pPr>
-            <a:r>
-              <a:rPr lang="en-US" sz="11250" b="1" spc="113" kern="0" dirty="0">
+            <a:r>
+              <a:rPr lang="en-US" sz="11250" b="1" kern="0" spc="113" dirty="0">
                 <a:solidFill>
                   <a:srgbClr val="FD7EF5"/>
                 </a:solidFill>
@@ -3024,7 +2720,7 @@
           </a:bodyPr>
           <a:lstStyle/>
           <a:p>
-            <a:pPr algn="l" indent="0" marL="0">
+            <a:pPr marL="0" indent="0" algn="l">
               <a:lnSpc>
                 <a:spcPct val="121739"/>
               </a:lnSpc>
@@ -3047,14 +2743,14 @@
       </p:sp>
       <p:pic>
         <p:nvPicPr>
-          <p:cNvPr id="7" name="Image 1" descr="preencoded.png">    </p:cNvPr>
+          <p:cNvPr id="7" name="Image 1" descr="preencoded.png"/>
           <p:cNvPicPr>
             <a:picLocks noChangeAspect="1"/>
           </p:cNvPicPr>
           <p:nvPr/>
         </p:nvPicPr>
         <p:blipFill>
-          <a:blip r:embed="rId2"/>
+          <a:blip r:embed="rId4"/>
           <a:stretch>
             <a:fillRect/>
           </a:stretch>
@@ -3092,14 +2788,14 @@
           </a:bodyPr>
           <a:lstStyle/>
           <a:p>
-            <a:pPr algn="r" indent="0" marL="0">
+            <a:pPr marL="0" indent="0" algn="r">
               <a:lnSpc>
                 <a:spcPct val="152105"/>
               </a:lnSpc>
               <a:buNone/>
             </a:pPr>
             <a:r>
-              <a:rPr lang="en-US" sz="1275" spc="179" kern="0" dirty="0">
+              <a:rPr lang="en-US" sz="1275" kern="0" spc="179" dirty="0">
                 <a:solidFill>
                   <a:srgbClr val="FFFFFF"/>
                 </a:solidFill>
@@ -3136,14 +2832,14 @@
           </a:bodyPr>
           <a:lstStyle/>
           <a:p>
-            <a:pPr algn="r" indent="0" marL="0">
+            <a:pPr marL="0" indent="0" algn="r">
               <a:lnSpc>
                 <a:spcPct val="152105"/>
               </a:lnSpc>
               <a:buNone/>
             </a:pPr>
             <a:r>
-              <a:rPr lang="en-US" sz="1275" spc="179" kern="0" dirty="0">
+              <a:rPr lang="en-US" sz="1275" kern="0" spc="179" dirty="0">
                 <a:solidFill>
                   <a:srgbClr val="969696"/>
                 </a:solidFill>
@@ -3173,6 +2869,7 @@
         <a:solidFill>
           <a:srgbClr val="000000"/>
         </a:solidFill>
+        <a:effectLst/>
       </p:bgPr>
     </p:bg>
     <p:spTree>
@@ -3212,11 +2909,11 @@
           </a:bodyPr>
           <a:lstStyle/>
           <a:p>
-            <a:pPr algn="l" indent="0" marL="0">
-              <a:buNone/>
-            </a:pPr>
-            <a:r>
-              <a:rPr lang="en-US" sz="1500" spc="450" kern="0" dirty="0">
+            <a:pPr marL="0" indent="0" algn="l">
+              <a:buNone/>
+            </a:pPr>
+            <a:r>
+              <a:rPr lang="en-US" sz="1500" kern="0" spc="450" dirty="0">
                 <a:solidFill>
                   <a:srgbClr val="36CDFF"/>
                 </a:solidFill>
@@ -3238,7 +2935,7 @@
         </p:nvSpPr>
         <p:spPr>
           <a:xfrm>
-            <a:off x="990600" y="2827362"/>
+            <a:off x="721659" y="3098715"/>
             <a:ext cx="17937480" cy="981075"/>
           </a:xfrm>
           <a:prstGeom prst="rect">
@@ -3253,14 +2950,14 @@
           </a:bodyPr>
           <a:lstStyle/>
           <a:p>
-            <a:pPr algn="l" indent="0" marL="0">
+            <a:pPr marL="0" indent="0" algn="l">
               <a:lnSpc>
                 <a:spcPct val="78261"/>
               </a:lnSpc>
               <a:buNone/>
             </a:pPr>
             <a:r>
-              <a:rPr lang="en-US" sz="8250" b="1" dirty="0">
+              <a:rPr lang="en-US" sz="7500" b="1" dirty="0">
                 <a:solidFill>
                   <a:srgbClr val="FFFFFF"/>
                 </a:solidFill>
@@ -3268,9 +2965,9 @@
                 <a:ea typeface="Arial" pitchFamily="34" charset="-122"/>
                 <a:cs typeface="Arial" pitchFamily="34" charset="-120"/>
               </a:rPr>
-              <a:t>NOBODY RUNS THE RCE</a:t>
-            </a:r>
-            <a:endParaRPr lang="en-US" sz="8250" dirty="0"/>
+              <a:t>YOU PROVE IT WITHOUT RUNNING IT</a:t>
+            </a:r>
+            <a:endParaRPr lang="en-US" sz="7500" dirty="0"/>
           </a:p>
         </p:txBody>
       </p:sp>
@@ -3297,7 +2994,7 @@
           </a:bodyPr>
           <a:lstStyle/>
           <a:p>
-            <a:pPr algn="l" indent="0" marL="0">
+            <a:pPr marL="0" indent="0" algn="l">
               <a:lnSpc>
                 <a:spcPct val="123795"/>
               </a:lnSpc>
@@ -3312,339 +3009,66 @@
                 <a:ea typeface="Courier New" pitchFamily="34" charset="-122"/>
                 <a:cs typeface="Courier New" pitchFamily="34" charset="-120"/>
               </a:rPr>
-              <a:t>SEC_ARTIFACT_VERIFICATION </a:t>
-            </a:r>
-            <a:pPr algn="l" indent="0" marL="0">
+              <a:t>SEC_ARTIFACT_VERIFICATION gates only load_artifact — the one code path that actually unpickles.</a:t>
+            </a:r>
+            <a:endParaRPr lang="en-US" sz="2550" dirty="0"/>
+          </a:p>
+        </p:txBody>
+      </p:sp>
+      <p:sp>
+        <p:nvSpPr>
+          <p:cNvPr id="5" name="Text 3"/>
+          <p:cNvSpPr/>
+          <p:nvPr/>
+        </p:nvSpPr>
+        <p:spPr>
+          <a:xfrm>
+            <a:off x="990600" y="5411317"/>
+            <a:ext cx="17811750" cy="443359"/>
+          </a:xfrm>
+          <a:prstGeom prst="rect">
+            <a:avLst/>
+          </a:prstGeom>
+          <a:noFill/>
+          <a:ln/>
+        </p:spPr>
+        <p:txBody>
+          <a:bodyPr wrap="square" lIns="25400" tIns="25400" rIns="25400" bIns="25400" rtlCol="0" anchor="t">
+            <a:normAutofit/>
+          </a:bodyPr>
+          <a:lstStyle/>
+          <a:p>
+            <a:pPr marL="0" indent="0" algn="l">
               <a:lnSpc>
-                <a:spcPct val="123795"/>
+                <a:spcPct val="125522"/>
               </a:lnSpc>
               <a:buNone/>
             </a:pPr>
             <a:r>
-              <a:rPr lang="en-US" sz="2550" dirty="0">
-                <a:solidFill>
-                  <a:srgbClr val="FFFFFF"/>
+              <a:rPr lang="en-US" sz="2175" dirty="0">
+                <a:solidFill>
+                  <a:srgbClr val="C8C8C8"/>
                 </a:solidFill>
                 <a:latin typeface="Arial" pitchFamily="34" charset="0"/>
                 <a:ea typeface="Arial" pitchFamily="34" charset="-122"/>
                 <a:cs typeface="Arial" pitchFamily="34" charset="-120"/>
               </a:rPr>
-              <a:t>gates only </a:t>
-            </a:r>
-            <a:pPr algn="l" indent="0" marL="0">
-              <a:lnSpc>
-                <a:spcPct val="123795"/>
-              </a:lnSpc>
-              <a:buNone/>
-            </a:pPr>
-            <a:r>
-              <a:rPr lang="en-US" sz="2550" dirty="0">
-                <a:solidFill>
-                  <a:srgbClr val="FFFFFF"/>
-                </a:solidFill>
-                <a:latin typeface="Courier New" pitchFamily="34" charset="0"/>
-                <a:ea typeface="Courier New" pitchFamily="34" charset="-122"/>
-                <a:cs typeface="Courier New" pitchFamily="34" charset="-120"/>
-              </a:rPr>
-              <a:t>load_artifact</a:t>
-            </a:r>
-            <a:pPr algn="l" indent="0" marL="0">
-              <a:lnSpc>
-                <a:spcPct val="123795"/>
-              </a:lnSpc>
-              <a:buNone/>
-            </a:pPr>
-            <a:r>
-              <a:rPr lang="en-US" sz="2550" dirty="0">
-                <a:solidFill>
-                  <a:srgbClr val="FFFFFF"/>
-                </a:solidFill>
-                <a:latin typeface="Arial" pitchFamily="34" charset="0"/>
-                <a:ea typeface="Arial" pitchFamily="34" charset="-122"/>
-                <a:cs typeface="Arial" pitchFamily="34" charset="-120"/>
-              </a:rPr>
-              <a:t>, which is used only in the </a:t>
-            </a:r>
-            <a:pPr algn="l" indent="0" marL="0">
-              <a:lnSpc>
-                <a:spcPct val="123795"/>
-              </a:lnSpc>
-              <a:buNone/>
-            </a:pPr>
-            <a:r>
-              <a:rPr lang="en-US" sz="2550" b="1" dirty="0">
-                <a:solidFill>
-                  <a:srgbClr val="FFFFFF"/>
-                </a:solidFill>
-                <a:latin typeface="Arial" pitchFamily="34" charset="0"/>
-                <a:ea typeface="Arial" pitchFamily="34" charset="-122"/>
-                <a:cs typeface="Arial" pitchFamily="34" charset="-120"/>
-              </a:rPr>
-              <a:t>instructor demo.</a:t>
-            </a:r>
-            <a:endParaRPr lang="en-US" sz="2550" dirty="0"/>
-          </a:p>
-        </p:txBody>
-      </p:sp>
-      <p:sp>
-        <p:nvSpPr>
-          <p:cNvPr id="5" name="Text 3"/>
-          <p:cNvSpPr/>
-          <p:nvPr/>
-        </p:nvSpPr>
-        <p:spPr>
-          <a:xfrm>
-            <a:off x="990600" y="4901654"/>
-            <a:ext cx="17811750" cy="443359"/>
-          </a:xfrm>
-          <a:prstGeom prst="rect">
-            <a:avLst/>
-          </a:prstGeom>
-          <a:noFill/>
-          <a:ln/>
-        </p:spPr>
-        <p:txBody>
-          <a:bodyPr wrap="square" lIns="25400" tIns="25400" rIns="25400" bIns="25400" rtlCol="0" anchor="t">
-            <a:normAutofit/>
-          </a:bodyPr>
-          <a:lstStyle/>
-          <a:p>
-            <a:pPr algn="l" indent="0" marL="0">
-              <a:lnSpc>
-                <a:spcPct val="125522"/>
-              </a:lnSpc>
-              <a:buNone/>
-            </a:pPr>
-            <a:r>
-              <a:rPr lang="en-US" sz="2175" dirty="0">
-                <a:solidFill>
-                  <a:srgbClr val="C8C8C8"/>
-                </a:solidFill>
-                <a:latin typeface="Arial" pitchFamily="34" charset="0"/>
-                <a:ea typeface="Arial" pitchFamily="34" charset="-122"/>
-                <a:cs typeface="Arial" pitchFamily="34" charset="-120"/>
-              </a:rPr>
-              <a:t>Participants prove the finding </a:t>
-            </a:r>
-            <a:pPr algn="l" indent="0" marL="0">
-              <a:lnSpc>
-                <a:spcPct val="125522"/>
-              </a:lnSpc>
-              <a:buNone/>
-            </a:pPr>
-            <a:r>
-              <a:rPr lang="en-US" sz="2175" b="1" dirty="0">
-                <a:solidFill>
-                  <a:srgbClr val="36CDFF"/>
-                </a:solidFill>
-                <a:latin typeface="Arial" pitchFamily="34" charset="0"/>
-                <a:ea typeface="Arial" pitchFamily="34" charset="-122"/>
-                <a:cs typeface="Arial" pitchFamily="34" charset="-120"/>
-              </a:rPr>
-              <a:t>statically. </a:t>
-            </a:r>
-            <a:pPr algn="l" indent="0" marL="0">
-              <a:lnSpc>
-                <a:spcPct val="125522"/>
-              </a:lnSpc>
-              <a:buNone/>
-            </a:pPr>
-            <a:r>
-              <a:rPr lang="en-US" sz="2175" dirty="0">
-                <a:solidFill>
-                  <a:srgbClr val="C8C8C8"/>
-                </a:solidFill>
-                <a:latin typeface="Arial" pitchFamily="34" charset="0"/>
-                <a:ea typeface="Arial" pitchFamily="34" charset="-122"/>
-                <a:cs typeface="Arial" pitchFamily="34" charset="-120"/>
-              </a:rPr>
-              <a:t>They never load the file.</a:t>
+              <a:t>You prove the finding statically, from the bytecode. You never load the file.</a:t>
             </a:r>
             <a:endParaRPr lang="en-US" sz="2175" dirty="0"/>
-          </a:p>
-        </p:txBody>
-      </p:sp>
-      <p:sp>
-        <p:nvSpPr>
-          <p:cNvPr id="6" name="Shape 4"/>
-          <p:cNvSpPr/>
-          <p:nvPr/>
-        </p:nvSpPr>
-        <p:spPr>
-          <a:xfrm>
-            <a:off x="990600" y="7264301"/>
-            <a:ext cx="16192500" cy="9525"/>
-          </a:xfrm>
-          <a:prstGeom prst="rect">
-            <a:avLst/>
-          </a:prstGeom>
-          <a:solidFill>
-            <a:srgbClr val="FD7EF5">
-              <a:alpha val="45000"/>
-            </a:srgbClr>
-          </a:solidFill>
-          <a:ln/>
-        </p:spPr>
-      </p:sp>
-      <p:sp>
-        <p:nvSpPr>
-          <p:cNvPr id="7" name="Shape 5"/>
-          <p:cNvSpPr/>
-          <p:nvPr/>
-        </p:nvSpPr>
-        <p:spPr>
-          <a:xfrm>
-            <a:off x="990600" y="5649813"/>
-            <a:ext cx="16192500" cy="9525"/>
-          </a:xfrm>
-          <a:prstGeom prst="rect">
-            <a:avLst/>
-          </a:prstGeom>
-          <a:solidFill>
-            <a:srgbClr val="FD7EF5">
-              <a:alpha val="45000"/>
-            </a:srgbClr>
-          </a:solidFill>
-          <a:ln/>
-        </p:spPr>
-      </p:sp>
-      <p:sp>
-        <p:nvSpPr>
-          <p:cNvPr id="8" name="Shape 6"/>
-          <p:cNvSpPr/>
-          <p:nvPr/>
-        </p:nvSpPr>
-        <p:spPr>
-          <a:xfrm>
-            <a:off x="990600" y="5649813"/>
-            <a:ext cx="38100" cy="1624013"/>
-          </a:xfrm>
-          <a:prstGeom prst="rect">
-            <a:avLst/>
-          </a:prstGeom>
-          <a:solidFill>
-            <a:srgbClr val="FD7EF5"/>
-          </a:solidFill>
-          <a:ln/>
-        </p:spPr>
-      </p:sp>
-      <p:sp>
-        <p:nvSpPr>
-          <p:cNvPr id="9" name="Shape 7"/>
-          <p:cNvSpPr/>
-          <p:nvPr/>
-        </p:nvSpPr>
-        <p:spPr>
-          <a:xfrm>
-            <a:off x="17173575" y="5649813"/>
-            <a:ext cx="9525" cy="1624013"/>
-          </a:xfrm>
-          <a:prstGeom prst="rect">
-            <a:avLst/>
-          </a:prstGeom>
-          <a:solidFill>
-            <a:srgbClr val="FD7EF5">
-              <a:alpha val="45000"/>
-            </a:srgbClr>
-          </a:solidFill>
-          <a:ln/>
-        </p:spPr>
-      </p:sp>
-      <p:sp>
-        <p:nvSpPr>
-          <p:cNvPr id="10" name="Text 8"/>
-          <p:cNvSpPr/>
-          <p:nvPr/>
-        </p:nvSpPr>
-        <p:spPr>
-          <a:xfrm>
-            <a:off x="1371600" y="5926038"/>
-            <a:ext cx="17004983" cy="242888"/>
-          </a:xfrm>
-          <a:prstGeom prst="rect">
-            <a:avLst/>
-          </a:prstGeom>
-          <a:noFill/>
-          <a:ln/>
-        </p:spPr>
-        <p:txBody>
-          <a:bodyPr wrap="square" lIns="25400" tIns="25400" rIns="25400" bIns="25400" rtlCol="0" anchor="t">
-            <a:normAutofit/>
-          </a:bodyPr>
-          <a:lstStyle/>
-          <a:p>
-            <a:pPr algn="l" indent="0" marL="0">
-              <a:buNone/>
-            </a:pPr>
-            <a:r>
-              <a:rPr lang="en-US" sz="1200" spc="192" kern="0" dirty="0">
-                <a:solidFill>
-                  <a:srgbClr val="FD7EF5"/>
-                </a:solidFill>
-                <a:latin typeface="Courier New" pitchFamily="34" charset="0"/>
-                <a:ea typeface="Courier New" pitchFamily="34" charset="-122"/>
-                <a:cs typeface="Courier New" pitchFamily="34" charset="-120"/>
-              </a:rPr>
-              <a:t>LAB HYGIENE</a:t>
-            </a:r>
-            <a:endParaRPr lang="en-US" sz="1200" dirty="0"/>
-          </a:p>
-        </p:txBody>
-      </p:sp>
-      <p:sp>
-        <p:nvSpPr>
-          <p:cNvPr id="11" name="Text 9"/>
-          <p:cNvSpPr/>
-          <p:nvPr/>
-        </p:nvSpPr>
-        <p:spPr>
-          <a:xfrm>
-            <a:off x="1371600" y="6226076"/>
-            <a:ext cx="15922847" cy="809625"/>
-          </a:xfrm>
-          <a:prstGeom prst="rect">
-            <a:avLst/>
-          </a:prstGeom>
-          <a:noFill/>
-          <a:ln/>
-        </p:spPr>
-        <p:txBody>
-          <a:bodyPr wrap="square" lIns="25400" tIns="25400" rIns="25400" bIns="25400" rtlCol="0" anchor="t">
-            <a:normAutofit/>
-          </a:bodyPr>
-          <a:lstStyle/>
-          <a:p>
-            <a:pPr algn="l" indent="0" marL="0">
-              <a:lnSpc>
-                <a:spcPct val="130645"/>
-              </a:lnSpc>
-              <a:buNone/>
-            </a:pPr>
-            <a:r>
-              <a:rPr lang="en-US" sz="2025" dirty="0">
-                <a:solidFill>
-                  <a:srgbClr val="C8C8C8"/>
-                </a:solidFill>
-                <a:latin typeface="Arial" pitchFamily="34" charset="0"/>
-                <a:ea typeface="Arial" pitchFamily="34" charset="-122"/>
-                <a:cs typeface="Arial" pitchFamily="34" charset="-120"/>
-              </a:rPr>
-              <a:t>You do not want 22 people executing RCE on shared infrastructure. If you run the live demo, use a throwaway container — never your host, never conference wifi.</a:t>
-            </a:r>
-            <a:endParaRPr lang="en-US" sz="2025" dirty="0"/>
           </a:p>
         </p:txBody>
       </p:sp>
       <p:pic>
         <p:nvPicPr>
-          <p:cNvPr id="12" name="Image 0" descr="preencoded.png">    </p:cNvPr>
+          <p:cNvPr id="12" name="Image 0" descr="preencoded.png"/>
           <p:cNvPicPr>
             <a:picLocks noChangeAspect="1"/>
           </p:cNvPicPr>
           <p:nvPr/>
         </p:nvPicPr>
         <p:blipFill>
-          <a:blip r:embed="rId1"/>
+          <a:blip r:embed="rId3"/>
           <a:stretch>
             <a:fillRect/>
           </a:stretch>
@@ -3682,11 +3106,11 @@
           </a:bodyPr>
           <a:lstStyle/>
           <a:p>
-            <a:pPr algn="l" indent="0" marL="0">
-              <a:buNone/>
-            </a:pPr>
-            <a:r>
-              <a:rPr lang="en-US" sz="1200" spc="264" kern="0" dirty="0">
+            <a:pPr marL="0" indent="0" algn="l">
+              <a:buNone/>
+            </a:pPr>
+            <a:r>
+              <a:rPr lang="en-US" sz="1200" kern="0" spc="264" dirty="0">
                 <a:solidFill>
                   <a:srgbClr val="969696"/>
                 </a:solidFill>
@@ -3716,6 +3140,7 @@
         <a:solidFill>
           <a:srgbClr val="000000"/>
         </a:solidFill>
+        <a:effectLst/>
       </p:bgPr>
     </p:bg>
     <p:spTree>
@@ -3755,11 +3180,11 @@
           </a:bodyPr>
           <a:lstStyle/>
           <a:p>
-            <a:pPr algn="l" indent="0" marL="0">
-              <a:buNone/>
-            </a:pPr>
-            <a:r>
-              <a:rPr lang="en-US" sz="1500" spc="450" kern="0" dirty="0">
+            <a:pPr marL="0" indent="0" algn="l">
+              <a:buNone/>
+            </a:pPr>
+            <a:r>
+              <a:rPr lang="en-US" sz="1500" kern="0" spc="450" dirty="0">
                 <a:solidFill>
                   <a:srgbClr val="36CDFF"/>
                 </a:solidFill>
@@ -3796,7 +3221,7 @@
           </a:bodyPr>
           <a:lstStyle/>
           <a:p>
-            <a:pPr algn="l" indent="0" marL="0">
+            <a:pPr marL="0" indent="0" algn="l">
               <a:lnSpc>
                 <a:spcPct val="78171"/>
               </a:lnSpc>
@@ -3840,7 +3265,7 @@
           </a:bodyPr>
           <a:lstStyle/>
           <a:p>
-            <a:pPr algn="l" indent="0" marL="0">
+            <a:pPr marL="0" indent="0" algn="l">
               <a:lnSpc>
                 <a:spcPct val="125522"/>
               </a:lnSpc>
@@ -3857,12 +3282,6 @@
               </a:rPr>
               <a:t>halcyon.scan_artifact </a:t>
             </a:r>
-            <a:pPr algn="l" indent="0" marL="0">
-              <a:lnSpc>
-                <a:spcPct val="125522"/>
-              </a:lnSpc>
-              <a:buNone/>
-            </a:pPr>
             <a:r>
               <a:rPr lang="en-US" sz="2175" dirty="0">
                 <a:solidFill>
@@ -3874,12 +3293,6 @@
               </a:rPr>
               <a:t>walks the pickle with </a:t>
             </a:r>
-            <a:pPr algn="l" indent="0" marL="0">
-              <a:lnSpc>
-                <a:spcPct val="125522"/>
-              </a:lnSpc>
-              <a:buNone/>
-            </a:pPr>
             <a:r>
               <a:rPr lang="en-US" sz="2175" dirty="0">
                 <a:solidFill>
@@ -3891,12 +3304,6 @@
               </a:rPr>
               <a:t>pickletools.genops </a:t>
             </a:r>
-            <a:pPr algn="l" indent="0" marL="0">
-              <a:lnSpc>
-                <a:spcPct val="125522"/>
-              </a:lnSpc>
-              <a:buNone/>
-            </a:pPr>
             <a:r>
               <a:rPr lang="en-US" sz="2175" dirty="0">
                 <a:solidFill>
@@ -3908,12 +3315,6 @@
               </a:rPr>
               <a:t>— </a:t>
             </a:r>
-            <a:pPr algn="l" indent="0" marL="0">
-              <a:lnSpc>
-                <a:spcPct val="125522"/>
-              </a:lnSpc>
-              <a:buNone/>
-            </a:pPr>
             <a:r>
               <a:rPr lang="en-US" sz="2175" b="1" dirty="0">
                 <a:solidFill>
@@ -3950,6 +3351,13 @@
           </a:solidFill>
           <a:ln/>
         </p:spPr>
+        <p:txBody>
+          <a:bodyPr/>
+          <a:lstStyle/>
+          <a:p>
+            <a:endParaRPr lang="en-US"/>
+          </a:p>
+        </p:txBody>
       </p:sp>
       <p:sp>
         <p:nvSpPr>
@@ -3974,11 +3382,11 @@
           </a:bodyPr>
           <a:lstStyle/>
           <a:p>
-            <a:pPr algn="l" indent="0" marL="0">
-              <a:buNone/>
-            </a:pPr>
-            <a:r>
-              <a:rPr lang="en-US" sz="1350" spc="135" kern="0" dirty="0">
+            <a:pPr marL="0" indent="0" algn="l">
+              <a:buNone/>
+            </a:pPr>
+            <a:r>
+              <a:rPr lang="en-US" sz="1350" kern="0" spc="135" dirty="0">
                 <a:solidFill>
                   <a:srgbClr val="FD7EF5"/>
                 </a:solidFill>
@@ -4015,11 +3423,11 @@
           </a:bodyPr>
           <a:lstStyle/>
           <a:p>
-            <a:pPr algn="l" indent="0" marL="0">
-              <a:buNone/>
-            </a:pPr>
-            <a:r>
-              <a:rPr lang="en-US" sz="1350" spc="135" kern="0" dirty="0">
+            <a:pPr marL="0" indent="0" algn="l">
+              <a:buNone/>
+            </a:pPr>
+            <a:r>
+              <a:rPr lang="en-US" sz="1350" kern="0" spc="135" dirty="0">
                 <a:solidFill>
                   <a:srgbClr val="969696"/>
                 </a:solidFill>
@@ -4054,6 +3462,13 @@
           </a:solidFill>
           <a:ln/>
         </p:spPr>
+        <p:txBody>
+          <a:bodyPr/>
+          <a:lstStyle/>
+          <a:p>
+            <a:endParaRPr lang="en-US"/>
+          </a:p>
+        </p:txBody>
       </p:sp>
       <p:sp>
         <p:nvSpPr>
@@ -4078,7 +3493,7 @@
           </a:bodyPr>
           <a:lstStyle/>
           <a:p>
-            <a:pPr algn="l" indent="0" marL="0">
+            <a:pPr marL="0" indent="0" algn="l">
               <a:lnSpc>
                 <a:spcPct val="116379"/>
               </a:lnSpc>
@@ -4095,12 +3510,6 @@
               </a:rPr>
               <a:t>GLOBAL </a:t>
             </a:r>
-            <a:pPr algn="l" indent="0" marL="0">
-              <a:lnSpc>
-                <a:spcPct val="116379"/>
-              </a:lnSpc>
-              <a:buNone/>
-            </a:pPr>
             <a:r>
               <a:rPr lang="en-US" sz="1875" b="1" dirty="0">
                 <a:solidFill>
@@ -4112,12 +3521,6 @@
               </a:rPr>
               <a:t>/ </a:t>
             </a:r>
-            <a:pPr algn="l" indent="0" marL="0">
-              <a:lnSpc>
-                <a:spcPct val="116379"/>
-              </a:lnSpc>
-              <a:buNone/>
-            </a:pPr>
             <a:r>
               <a:rPr lang="en-US" sz="1875" b="1" dirty="0">
                 <a:solidFill>
@@ -4129,12 +3532,6 @@
               </a:rPr>
               <a:t>STACK_GLOBAL </a:t>
             </a:r>
-            <a:pPr algn="l" indent="0" marL="0">
-              <a:lnSpc>
-                <a:spcPct val="116379"/>
-              </a:lnSpc>
-              <a:buNone/>
-            </a:pPr>
             <a:r>
               <a:rPr lang="en-US" sz="1875" b="1" dirty="0">
                 <a:solidFill>
@@ -4146,12 +3543,6 @@
               </a:rPr>
               <a:t>→ </a:t>
             </a:r>
-            <a:pPr algn="l" indent="0" marL="0">
-              <a:lnSpc>
-                <a:spcPct val="116379"/>
-              </a:lnSpc>
-              <a:buNone/>
-            </a:pPr>
             <a:r>
               <a:rPr lang="en-US" sz="1875" b="1" dirty="0">
                 <a:solidFill>
@@ -4163,12 +3554,6 @@
               </a:rPr>
               <a:t>os</a:t>
             </a:r>
-            <a:pPr algn="l" indent="0" marL="0">
-              <a:lnSpc>
-                <a:spcPct val="116379"/>
-              </a:lnSpc>
-              <a:buNone/>
-            </a:pPr>
             <a:r>
               <a:rPr lang="en-US" sz="1875" b="1" dirty="0">
                 <a:solidFill>
@@ -4180,12 +3565,6 @@
               </a:rPr>
               <a:t>, </a:t>
             </a:r>
-            <a:pPr algn="l" indent="0" marL="0">
-              <a:lnSpc>
-                <a:spcPct val="116379"/>
-              </a:lnSpc>
-              <a:buNone/>
-            </a:pPr>
             <a:r>
               <a:rPr lang="en-US" sz="1875" b="1" dirty="0">
                 <a:solidFill>
@@ -4197,12 +3576,6 @@
               </a:rPr>
               <a:t>subprocess</a:t>
             </a:r>
-            <a:pPr algn="l" indent="0" marL="0">
-              <a:lnSpc>
-                <a:spcPct val="116379"/>
-              </a:lnSpc>
-              <a:buNone/>
-            </a:pPr>
             <a:r>
               <a:rPr lang="en-US" sz="1875" b="1" dirty="0">
                 <a:solidFill>
@@ -4214,12 +3587,6 @@
               </a:rPr>
               <a:t>, </a:t>
             </a:r>
-            <a:pPr algn="l" indent="0" marL="0">
-              <a:lnSpc>
-                <a:spcPct val="116379"/>
-              </a:lnSpc>
-              <a:buNone/>
-            </a:pPr>
             <a:r>
               <a:rPr lang="en-US" sz="1875" b="1" dirty="0">
                 <a:solidFill>
@@ -4231,12 +3598,6 @@
               </a:rPr>
               <a:t>sys</a:t>
             </a:r>
-            <a:pPr algn="l" indent="0" marL="0">
-              <a:lnSpc>
-                <a:spcPct val="116379"/>
-              </a:lnSpc>
-              <a:buNone/>
-            </a:pPr>
             <a:r>
               <a:rPr lang="en-US" sz="1875" b="1" dirty="0">
                 <a:solidFill>
@@ -4273,6 +3634,13 @@
           </a:solidFill>
           <a:ln/>
         </p:spPr>
+        <p:txBody>
+          <a:bodyPr/>
+          <a:lstStyle/>
+          <a:p>
+            <a:endParaRPr lang="en-US"/>
+          </a:p>
+        </p:txBody>
       </p:sp>
       <p:sp>
         <p:nvSpPr>
@@ -4297,7 +3665,7 @@
           </a:bodyPr>
           <a:lstStyle/>
           <a:p>
-            <a:pPr algn="l" indent="0" marL="0">
+            <a:pPr marL="0" indent="0" algn="l">
               <a:lnSpc>
                 <a:spcPct val="116379"/>
               </a:lnSpc>
@@ -4339,6 +3707,13 @@
           </a:solidFill>
           <a:ln/>
         </p:spPr>
+        <p:txBody>
+          <a:bodyPr/>
+          <a:lstStyle/>
+          <a:p>
+            <a:endParaRPr lang="en-US"/>
+          </a:p>
+        </p:txBody>
       </p:sp>
       <p:sp>
         <p:nvSpPr>
@@ -4363,7 +3738,7 @@
           </a:bodyPr>
           <a:lstStyle/>
           <a:p>
-            <a:pPr algn="l" indent="0" marL="0">
+            <a:pPr marL="0" indent="0" algn="l">
               <a:lnSpc>
                 <a:spcPct val="116379"/>
               </a:lnSpc>
@@ -4405,6 +3780,13 @@
           </a:solidFill>
           <a:ln/>
         </p:spPr>
+        <p:txBody>
+          <a:bodyPr/>
+          <a:lstStyle/>
+          <a:p>
+            <a:endParaRPr lang="en-US"/>
+          </a:p>
+        </p:txBody>
       </p:sp>
       <p:sp>
         <p:nvSpPr>
@@ -4429,7 +3811,7 @@
           </a:bodyPr>
           <a:lstStyle/>
           <a:p>
-            <a:pPr algn="l" indent="0" marL="0">
+            <a:pPr marL="0" indent="0" algn="l">
               <a:lnSpc>
                 <a:spcPct val="116379"/>
               </a:lnSpc>
@@ -4446,12 +3828,6 @@
               </a:rPr>
               <a:t>the opcode that actually </a:t>
             </a:r>
-            <a:pPr algn="l" indent="0" marL="0">
-              <a:lnSpc>
-                <a:spcPct val="116379"/>
-              </a:lnSpc>
-              <a:buNone/>
-            </a:pPr>
             <a:r>
               <a:rPr lang="en-US" sz="1875" b="1" dirty="0">
                 <a:solidFill>
@@ -4490,7 +3866,7 @@
           </a:bodyPr>
           <a:lstStyle/>
           <a:p>
-            <a:pPr algn="l" indent="0" marL="0">
+            <a:pPr marL="0" indent="0" algn="l">
               <a:buNone/>
             </a:pPr>
             <a:r>
@@ -4510,14 +3886,14 @@
       </p:sp>
       <p:pic>
         <p:nvPicPr>
-          <p:cNvPr id="17" name="Image 0" descr="preencoded.png">    </p:cNvPr>
+          <p:cNvPr id="17" name="Image 0" descr="preencoded.png"/>
           <p:cNvPicPr>
             <a:picLocks noChangeAspect="1"/>
           </p:cNvPicPr>
           <p:nvPr/>
         </p:nvPicPr>
         <p:blipFill>
-          <a:blip r:embed="rId1"/>
+          <a:blip r:embed="rId3"/>
           <a:stretch>
             <a:fillRect/>
           </a:stretch>
@@ -4555,11 +3931,11 @@
           </a:bodyPr>
           <a:lstStyle/>
           <a:p>
-            <a:pPr algn="l" indent="0" marL="0">
-              <a:buNone/>
-            </a:pPr>
-            <a:r>
-              <a:rPr lang="en-US" sz="1200" spc="264" kern="0" dirty="0">
+            <a:pPr marL="0" indent="0" algn="l">
+              <a:buNone/>
+            </a:pPr>
+            <a:r>
+              <a:rPr lang="en-US" sz="1200" kern="0" spc="264" dirty="0">
                 <a:solidFill>
                   <a:srgbClr val="969696"/>
                 </a:solidFill>
@@ -4589,6 +3965,7 @@
         <a:solidFill>
           <a:srgbClr val="000000"/>
         </a:solidFill>
+        <a:effectLst/>
       </p:bgPr>
     </p:bg>
     <p:spTree>
@@ -4628,11 +4005,11 @@
           </a:bodyPr>
           <a:lstStyle/>
           <a:p>
-            <a:pPr algn="l" indent="0" marL="0">
-              <a:buNone/>
-            </a:pPr>
-            <a:r>
-              <a:rPr lang="en-US" sz="1500" spc="450" kern="0" dirty="0">
+            <a:pPr marL="0" indent="0" algn="l">
+              <a:buNone/>
+            </a:pPr>
+            <a:r>
+              <a:rPr lang="en-US" sz="1500" kern="0" spc="450" dirty="0">
                 <a:solidFill>
                   <a:srgbClr val="36CDFF"/>
                 </a:solidFill>
@@ -4640,7 +4017,7 @@
                 <a:ea typeface="Courier New" pitchFamily="34" charset="-122"/>
                 <a:cs typeface="Courier New" pitchFamily="34" charset="-120"/>
               </a:rPr>
-              <a:t>PROJECT THE REAL OUTPUT</a:t>
+              <a:t>THE REAL OUTPUT</a:t>
             </a:r>
             <a:endParaRPr lang="en-US" sz="1500" dirty="0"/>
           </a:p>
@@ -4669,7 +4046,7 @@
           </a:bodyPr>
           <a:lstStyle/>
           <a:p>
-            <a:pPr algn="l" indent="0" marL="0">
+            <a:pPr marL="0" indent="0" algn="l">
               <a:lnSpc>
                 <a:spcPct val="78190"/>
               </a:lnSpc>
@@ -4718,6 +4095,13 @@
             <a:prstDash val="solid"/>
           </a:ln>
         </p:spPr>
+        <p:txBody>
+          <a:bodyPr/>
+          <a:lstStyle/>
+          <a:p>
+            <a:endParaRPr lang="en-US"/>
+          </a:p>
+        </p:txBody>
       </p:sp>
       <p:sp>
         <p:nvSpPr>
@@ -4740,6 +4124,13 @@
           </a:solidFill>
           <a:ln/>
         </p:spPr>
+        <p:txBody>
+          <a:bodyPr/>
+          <a:lstStyle/>
+          <a:p>
+            <a:endParaRPr lang="en-US"/>
+          </a:p>
+        </p:txBody>
       </p:sp>
       <p:sp>
         <p:nvSpPr>
@@ -4760,6 +4151,13 @@
           </a:solidFill>
           <a:ln/>
         </p:spPr>
+        <p:txBody>
+          <a:bodyPr/>
+          <a:lstStyle/>
+          <a:p>
+            <a:endParaRPr lang="en-US"/>
+          </a:p>
+        </p:txBody>
       </p:sp>
       <p:sp>
         <p:nvSpPr>
@@ -4780,6 +4178,13 @@
           </a:solidFill>
           <a:ln/>
         </p:spPr>
+        <p:txBody>
+          <a:bodyPr/>
+          <a:lstStyle/>
+          <a:p>
+            <a:endParaRPr lang="en-US"/>
+          </a:p>
+        </p:txBody>
       </p:sp>
       <p:sp>
         <p:nvSpPr>
@@ -4800,6 +4205,13 @@
           </a:solidFill>
           <a:ln/>
         </p:spPr>
+        <p:txBody>
+          <a:bodyPr/>
+          <a:lstStyle/>
+          <a:p>
+            <a:endParaRPr lang="en-US"/>
+          </a:p>
+        </p:txBody>
       </p:sp>
       <p:sp>
         <p:nvSpPr>
@@ -4824,7 +4236,7 @@
           </a:bodyPr>
           <a:lstStyle/>
           <a:p>
-            <a:pPr algn="l" indent="0" marL="0">
+            <a:pPr marL="0" indent="0" algn="l">
               <a:buNone/>
             </a:pPr>
             <a:r>
@@ -4865,12 +4277,6 @@
           </a:bodyPr>
           <a:lstStyle/>
           <a:p>
-            <a:pPr algn="l" indent="0" marL="0">
-              <a:lnSpc>
-                <a:spcPct val="145814"/>
-              </a:lnSpc>
-              <a:buNone/>
-            </a:pPr>
             <a:r>
               <a:rPr lang="en-US" sz="1425" dirty="0">
                 <a:solidFill>
@@ -4880,26 +4286,10 @@
                 <a:ea typeface="Courier New" pitchFamily="34" charset="-122"/>
                 <a:cs typeface="Courier New" pitchFamily="34" charset="-120"/>
               </a:rPr>
-              <a:t>$ python -m halcyon.scan_artifact labs/m4/artifacts/*</a:t>
-            </a:r>
-            <a:endParaRPr lang="en-US" sz="1425" dirty="0"/>
-          </a:p>
-          <a:p>
-            <a:pPr algn="l" indent="0" marL="0">
-              <a:lnSpc>
-                <a:spcPct val="145814"/>
-              </a:lnSpc>
-              <a:buNone/>
-            </a:pPr>
-            <a:endParaRPr lang="en-US" sz="1425" dirty="0"/>
-          </a:p>
-          <a:p>
-            <a:pPr algn="l" indent="0" marL="0">
-              <a:lnSpc>
-                <a:spcPct val="145814"/>
-              </a:lnSpc>
-              <a:buNone/>
-            </a:pPr>
+              <a:t>community_model.pkl      sha256=22e1a204…5971b66   MALICIOUS</a:t>
+            </a:r>
+          </a:p>
+          <a:p>
             <a:r>
               <a:rPr lang="en-US" sz="1425" dirty="0">
                 <a:solidFill>
@@ -4909,34 +4299,23 @@
                 <a:ea typeface="Courier New" pitchFamily="34" charset="-122"/>
                 <a:cs typeface="Courier New" pitchFamily="34" charset="-120"/>
               </a:rPr>
-              <a:t>community_model.pkl          sha256=22e1a204...5971b66   </a:t>
-            </a:r>
-            <a:endParaRPr lang="en-US" sz="1425" dirty="0"/>
-          </a:p>
-          <a:p>
-            <a:pPr algn="l" indent="0" marL="0">
-              <a:lnSpc>
-                <a:spcPct val="145814"/>
-              </a:lnSpc>
-              <a:buNone/>
-            </a:pPr>
+              <a:t>    ! STACK_GLOBAL -&gt; os system</a:t>
+            </a:r>
+          </a:p>
+          <a:p>
             <a:r>
               <a:rPr lang="en-US" sz="1425" dirty="0">
                 <a:solidFill>
-                  <a:srgbClr val="FD7EF5"/>
+                  <a:srgbClr val="C8C8C8"/>
                 </a:solidFill>
                 <a:latin typeface="Courier New" pitchFamily="34" charset="0"/>
                 <a:ea typeface="Courier New" pitchFamily="34" charset="-122"/>
                 <a:cs typeface="Courier New" pitchFamily="34" charset="-120"/>
               </a:rPr>
-              <a:t>MALICIOUS </a:t>
-            </a:r>
-            <a:pPr algn="l" indent="0" marL="0">
-              <a:lnSpc>
-                <a:spcPct val="145814"/>
-              </a:lnSpc>
-              <a:buNone/>
-            </a:pPr>
+              <a:t>    ! REDUCE (callable invocation)</a:t>
+            </a:r>
+          </a:p>
+          <a:p>
             <a:r>
               <a:rPr lang="en-US" sz="1425" dirty="0">
                 <a:solidFill>
@@ -4946,111 +4325,21 @@
                 <a:ea typeface="Courier New" pitchFamily="34" charset="-122"/>
                 <a:cs typeface="Courier New" pitchFamily="34" charset="-120"/>
               </a:rPr>
-              <a:t>    </a:t>
-            </a:r>
-            <a:pPr algn="l" indent="0" marL="0">
-              <a:lnSpc>
-                <a:spcPct val="145814"/>
-              </a:lnSpc>
-              <a:buNone/>
-            </a:pPr>
+              <a:t>embedding_model.safetensors  sha256=…              clean</a:t>
+            </a:r>
+          </a:p>
+          <a:p>
             <a:r>
               <a:rPr lang="en-US" sz="1425" dirty="0">
                 <a:solidFill>
-                  <a:srgbClr val="FD7EF5"/>
+                  <a:srgbClr val="C8C8C8"/>
                 </a:solidFill>
                 <a:latin typeface="Courier New" pitchFamily="34" charset="0"/>
                 <a:ea typeface="Courier New" pitchFamily="34" charset="-122"/>
                 <a:cs typeface="Courier New" pitchFamily="34" charset="-120"/>
               </a:rPr>
-              <a:t>! STACK_GLOBAL -&gt; os system </a:t>
-            </a:r>
-            <a:pPr algn="l" indent="0" marL="0">
-              <a:lnSpc>
-                <a:spcPct val="145814"/>
-              </a:lnSpc>
-              <a:buNone/>
-            </a:pPr>
-            <a:r>
-              <a:rPr lang="en-US" sz="1425" dirty="0">
-                <a:solidFill>
-                  <a:srgbClr val="C8C8C8"/>
-                </a:solidFill>
-                <a:latin typeface="Courier New" pitchFamily="34" charset="0"/>
-                <a:ea typeface="Courier New" pitchFamily="34" charset="-122"/>
-                <a:cs typeface="Courier New" pitchFamily="34" charset="-120"/>
-              </a:rPr>
-              <a:t>    </a:t>
-            </a:r>
-            <a:pPr algn="l" indent="0" marL="0">
-              <a:lnSpc>
-                <a:spcPct val="145814"/>
-              </a:lnSpc>
-              <a:buNone/>
-            </a:pPr>
-            <a:r>
-              <a:rPr lang="en-US" sz="1425" dirty="0">
-                <a:solidFill>
-                  <a:srgbClr val="FD7EF5"/>
-                </a:solidFill>
-                <a:latin typeface="Courier New" pitchFamily="34" charset="0"/>
-                <a:ea typeface="Courier New" pitchFamily="34" charset="-122"/>
-                <a:cs typeface="Courier New" pitchFamily="34" charset="-120"/>
-              </a:rPr>
-              <a:t>! REDUCE (callable invocation) </a:t>
-            </a:r>
-            <a:pPr algn="l" indent="0" marL="0">
-              <a:lnSpc>
-                <a:spcPct val="145814"/>
-              </a:lnSpc>
-              <a:buNone/>
-            </a:pPr>
-            <a:r>
-              <a:rPr lang="en-US" sz="1425" dirty="0">
-                <a:solidFill>
-                  <a:srgbClr val="C8C8C8"/>
-                </a:solidFill>
-                <a:latin typeface="Courier New" pitchFamily="34" charset="0"/>
-                <a:ea typeface="Courier New" pitchFamily="34" charset="-122"/>
-                <a:cs typeface="Courier New" pitchFamily="34" charset="-120"/>
-              </a:rPr>
-              <a:t>embedding_model.safetensors  sha256=...                  </a:t>
-            </a:r>
-            <a:pPr algn="l" indent="0" marL="0">
-              <a:lnSpc>
-                <a:spcPct val="145814"/>
-              </a:lnSpc>
-              <a:buNone/>
-            </a:pPr>
-            <a:r>
-              <a:rPr lang="en-US" sz="1425" dirty="0">
-                <a:solidFill>
-                  <a:srgbClr val="36CDFF"/>
-                </a:solidFill>
-                <a:latin typeface="Courier New" pitchFamily="34" charset="0"/>
-                <a:ea typeface="Courier New" pitchFamily="34" charset="-122"/>
-                <a:cs typeface="Courier New" pitchFamily="34" charset="-120"/>
-              </a:rPr>
-              <a:t>clean </a:t>
-            </a:r>
-            <a:pPr algn="l" indent="0" marL="0">
-              <a:lnSpc>
-                <a:spcPct val="145814"/>
-              </a:lnSpc>
-              <a:buNone/>
-            </a:pPr>
-            <a:r>
-              <a:rPr lang="en-US" sz="1425" dirty="0">
-                <a:solidFill>
-                  <a:srgbClr val="C8C8C8"/>
-                </a:solidFill>
-                <a:latin typeface="Courier New" pitchFamily="34" charset="0"/>
-                <a:ea typeface="Courier New" pitchFamily="34" charset="-122"/>
-                <a:cs typeface="Courier New" pitchFamily="34" charset="-120"/>
-              </a:rPr>
-              <a:t>    (not a valid pickle stream: ...)</a:t>
-            </a:r>
-            <a:endParaRPr lang="en-US" sz="1425" dirty="0"/>
+              <a:t>    (not a valid pickle stream: …)</a:t>
+            </a:r>
           </a:p>
         </p:txBody>
       </p:sp>
@@ -5077,7 +4366,7 @@
           </a:bodyPr>
           <a:lstStyle/>
           <a:p>
-            <a:pPr algn="l" indent="0" marL="0">
+            <a:pPr marL="0" indent="0" algn="l">
               <a:lnSpc>
                 <a:spcPct val="125522"/>
               </a:lnSpc>
@@ -5094,12 +4383,6 @@
               </a:rPr>
               <a:t>The safetensors file is clean </a:t>
             </a:r>
-            <a:pPr algn="l" indent="0" marL="0">
-              <a:lnSpc>
-                <a:spcPct val="125522"/>
-              </a:lnSpc>
-              <a:buNone/>
-            </a:pPr>
             <a:r>
               <a:rPr lang="en-US" sz="2175" b="1" dirty="0">
                 <a:solidFill>
@@ -5111,12 +4394,6 @@
               </a:rPr>
               <a:t>and not even a parseable pickle </a:t>
             </a:r>
-            <a:pPr algn="l" indent="0" marL="0">
-              <a:lnSpc>
-                <a:spcPct val="125522"/>
-              </a:lnSpc>
-              <a:buNone/>
-            </a:pPr>
             <a:r>
               <a:rPr lang="en-US" sz="2175" dirty="0">
                 <a:solidFill>
@@ -5134,14 +4411,14 @@
       </p:sp>
       <p:pic>
         <p:nvPicPr>
-          <p:cNvPr id="12" name="Image 0" descr="preencoded.png">    </p:cNvPr>
+          <p:cNvPr id="12" name="Image 0" descr="preencoded.png"/>
           <p:cNvPicPr>
             <a:picLocks noChangeAspect="1"/>
           </p:cNvPicPr>
           <p:nvPr/>
         </p:nvPicPr>
         <p:blipFill>
-          <a:blip r:embed="rId1"/>
+          <a:blip r:embed="rId3"/>
           <a:stretch>
             <a:fillRect/>
           </a:stretch>
@@ -5179,11 +4456,11 @@
           </a:bodyPr>
           <a:lstStyle/>
           <a:p>
-            <a:pPr algn="l" indent="0" marL="0">
-              <a:buNone/>
-            </a:pPr>
-            <a:r>
-              <a:rPr lang="en-US" sz="1200" spc="264" kern="0" dirty="0">
+            <a:pPr marL="0" indent="0" algn="l">
+              <a:buNone/>
+            </a:pPr>
+            <a:r>
+              <a:rPr lang="en-US" sz="1200" kern="0" spc="264" dirty="0">
                 <a:solidFill>
                   <a:srgbClr val="969696"/>
                 </a:solidFill>
@@ -5213,6 +4490,7 @@
         <a:solidFill>
           <a:srgbClr val="000000"/>
         </a:solidFill>
+        <a:effectLst/>
       </p:bgPr>
     </p:bg>
     <p:spTree>
@@ -5252,11 +4530,11 @@
           </a:bodyPr>
           <a:lstStyle/>
           <a:p>
-            <a:pPr algn="l" indent="0" marL="0">
-              <a:buNone/>
-            </a:pPr>
-            <a:r>
-              <a:rPr lang="en-US" sz="1500" spc="450" kern="0" dirty="0">
+            <a:pPr marL="0" indent="0" algn="l">
+              <a:buNone/>
+            </a:pPr>
+            <a:r>
+              <a:rPr lang="en-US" sz="1500" kern="0" spc="450" dirty="0">
                 <a:solidFill>
                   <a:srgbClr val="36CDFF"/>
                 </a:solidFill>
@@ -5293,7 +4571,7 @@
           </a:bodyPr>
           <a:lstStyle/>
           <a:p>
-            <a:pPr algn="l" indent="0" marL="0">
+            <a:pPr marL="0" indent="0" algn="l">
               <a:lnSpc>
                 <a:spcPct val="78326"/>
               </a:lnSpc>
@@ -5337,7 +4615,7 @@
           </a:bodyPr>
           <a:lstStyle/>
           <a:p>
-            <a:pPr algn="l" indent="0" marL="0">
+            <a:pPr marL="0" indent="0" algn="l">
               <a:lnSpc>
                 <a:spcPct val="123795"/>
               </a:lnSpc>
@@ -5354,12 +4632,6 @@
               </a:rPr>
               <a:t>A safetensors file is </a:t>
             </a:r>
-            <a:pPr algn="l" indent="0" marL="0">
-              <a:lnSpc>
-                <a:spcPct val="123795"/>
-              </a:lnSpc>
-              <a:buNone/>
-            </a:pPr>
             <a:r>
               <a:rPr lang="en-US" sz="2550" b="1" dirty="0">
                 <a:solidFill>
@@ -5398,7 +4670,7 @@
           </a:bodyPr>
           <a:lstStyle/>
           <a:p>
-            <a:pPr algn="l" indent="0" marL="0">
+            <a:pPr marL="0" indent="0" algn="l">
               <a:lnSpc>
                 <a:spcPct val="125522"/>
               </a:lnSpc>
@@ -5440,6 +4712,13 @@
           </a:solidFill>
           <a:ln/>
         </p:spPr>
+        <p:txBody>
+          <a:bodyPr/>
+          <a:lstStyle/>
+          <a:p>
+            <a:endParaRPr lang="en-US"/>
+          </a:p>
+        </p:txBody>
       </p:sp>
       <p:sp>
         <p:nvSpPr>
@@ -5462,6 +4741,13 @@
           </a:solidFill>
           <a:ln/>
         </p:spPr>
+        <p:txBody>
+          <a:bodyPr/>
+          <a:lstStyle/>
+          <a:p>
+            <a:endParaRPr lang="en-US"/>
+          </a:p>
+        </p:txBody>
       </p:sp>
       <p:sp>
         <p:nvSpPr>
@@ -5482,6 +4768,13 @@
           </a:solidFill>
           <a:ln/>
         </p:spPr>
+        <p:txBody>
+          <a:bodyPr/>
+          <a:lstStyle/>
+          <a:p>
+            <a:endParaRPr lang="en-US"/>
+          </a:p>
+        </p:txBody>
       </p:sp>
       <p:sp>
         <p:nvSpPr>
@@ -5504,6 +4797,13 @@
           </a:solidFill>
           <a:ln/>
         </p:spPr>
+        <p:txBody>
+          <a:bodyPr/>
+          <a:lstStyle/>
+          <a:p>
+            <a:endParaRPr lang="en-US"/>
+          </a:p>
+        </p:txBody>
       </p:sp>
       <p:sp>
         <p:nvSpPr>
@@ -5528,11 +4828,11 @@
           </a:bodyPr>
           <a:lstStyle/>
           <a:p>
-            <a:pPr algn="l" indent="0" marL="0">
-              <a:buNone/>
-            </a:pPr>
-            <a:r>
-              <a:rPr lang="en-US" sz="1200" spc="192" kern="0" dirty="0">
+            <a:pPr marL="0" indent="0" algn="l">
+              <a:buNone/>
+            </a:pPr>
+            <a:r>
+              <a:rPr lang="en-US" sz="1200" kern="0" spc="192" dirty="0">
                 <a:solidFill>
                   <a:srgbClr val="36CDFF"/>
                 </a:solidFill>
@@ -5569,7 +4869,7 @@
           </a:bodyPr>
           <a:lstStyle/>
           <a:p>
-            <a:pPr algn="l" indent="0" marL="0">
+            <a:pPr marL="0" indent="0" algn="l">
               <a:lnSpc>
                 <a:spcPct val="130645"/>
               </a:lnSpc>
@@ -5592,14 +4892,14 @@
       </p:sp>
       <p:pic>
         <p:nvPicPr>
-          <p:cNvPr id="12" name="Image 0" descr="preencoded.png">    </p:cNvPr>
+          <p:cNvPr id="12" name="Image 0" descr="preencoded.png"/>
           <p:cNvPicPr>
             <a:picLocks noChangeAspect="1"/>
           </p:cNvPicPr>
           <p:nvPr/>
         </p:nvPicPr>
         <p:blipFill>
-          <a:blip r:embed="rId1"/>
+          <a:blip r:embed="rId3"/>
           <a:stretch>
             <a:fillRect/>
           </a:stretch>
@@ -5637,11 +4937,11 @@
           </a:bodyPr>
           <a:lstStyle/>
           <a:p>
-            <a:pPr algn="l" indent="0" marL="0">
-              <a:buNone/>
-            </a:pPr>
-            <a:r>
-              <a:rPr lang="en-US" sz="1200" spc="264" kern="0" dirty="0">
+            <a:pPr marL="0" indent="0" algn="l">
+              <a:buNone/>
+            </a:pPr>
+            <a:r>
+              <a:rPr lang="en-US" sz="1200" kern="0" spc="264" dirty="0">
                 <a:solidFill>
                   <a:srgbClr val="969696"/>
                 </a:solidFill>
@@ -5671,6 +4971,7 @@
         <a:solidFill>
           <a:srgbClr val="000000"/>
         </a:solidFill>
+        <a:effectLst/>
       </p:bgPr>
     </p:bg>
     <p:spTree>
@@ -5710,11 +5011,11 @@
           </a:bodyPr>
           <a:lstStyle/>
           <a:p>
-            <a:pPr algn="l" indent="0" marL="0">
-              <a:buNone/>
-            </a:pPr>
-            <a:r>
-              <a:rPr lang="en-US" sz="1500" spc="450" kern="0" dirty="0">
+            <a:pPr marL="0" indent="0" algn="l">
+              <a:buNone/>
+            </a:pPr>
+            <a:r>
+              <a:rPr lang="en-US" sz="1500" kern="0" spc="450" dirty="0">
                 <a:solidFill>
                   <a:srgbClr val="36CDFF"/>
                 </a:solidFill>
@@ -5749,6 +5050,13 @@
           </a:solidFill>
           <a:ln/>
         </p:spPr>
+        <p:txBody>
+          <a:bodyPr/>
+          <a:lstStyle/>
+          <a:p>
+            <a:endParaRPr lang="en-US"/>
+          </a:p>
+        </p:txBody>
       </p:sp>
       <p:sp>
         <p:nvSpPr>
@@ -5773,11 +5081,11 @@
           </a:bodyPr>
           <a:lstStyle/>
           <a:p>
-            <a:pPr algn="l" indent="0" marL="0">
-              <a:buNone/>
-            </a:pPr>
-            <a:r>
-              <a:rPr lang="en-US" sz="1125" spc="180" kern="0" dirty="0">
+            <a:pPr marL="0" indent="0" algn="l">
+              <a:buNone/>
+            </a:pPr>
+            <a:r>
+              <a:rPr lang="en-US" sz="1125" kern="0" spc="180" dirty="0">
                 <a:solidFill>
                   <a:srgbClr val="000000"/>
                 </a:solidFill>
@@ -5814,7 +5122,7 @@
           </a:bodyPr>
           <a:lstStyle/>
           <a:p>
-            <a:pPr algn="l" indent="0" marL="0">
+            <a:pPr marL="0" indent="0" algn="l">
               <a:lnSpc>
                 <a:spcPct val="78675"/>
               </a:lnSpc>
@@ -5863,6 +5171,13 @@
             <a:prstDash val="solid"/>
           </a:ln>
         </p:spPr>
+        <p:txBody>
+          <a:bodyPr/>
+          <a:lstStyle/>
+          <a:p>
+            <a:endParaRPr lang="en-US"/>
+          </a:p>
+        </p:txBody>
       </p:sp>
       <p:sp>
         <p:nvSpPr>
@@ -5885,6 +5200,13 @@
           </a:solidFill>
           <a:ln/>
         </p:spPr>
+        <p:txBody>
+          <a:bodyPr/>
+          <a:lstStyle/>
+          <a:p>
+            <a:endParaRPr lang="en-US"/>
+          </a:p>
+        </p:txBody>
       </p:sp>
       <p:sp>
         <p:nvSpPr>
@@ -5905,6 +5227,13 @@
           </a:solidFill>
           <a:ln/>
         </p:spPr>
+        <p:txBody>
+          <a:bodyPr/>
+          <a:lstStyle/>
+          <a:p>
+            <a:endParaRPr lang="en-US"/>
+          </a:p>
+        </p:txBody>
       </p:sp>
       <p:sp>
         <p:nvSpPr>
@@ -5925,6 +5254,13 @@
           </a:solidFill>
           <a:ln/>
         </p:spPr>
+        <p:txBody>
+          <a:bodyPr/>
+          <a:lstStyle/>
+          <a:p>
+            <a:endParaRPr lang="en-US"/>
+          </a:p>
+        </p:txBody>
       </p:sp>
       <p:sp>
         <p:nvSpPr>
@@ -5945,6 +5281,13 @@
           </a:solidFill>
           <a:ln/>
         </p:spPr>
+        <p:txBody>
+          <a:bodyPr/>
+          <a:lstStyle/>
+          <a:p>
+            <a:endParaRPr lang="en-US"/>
+          </a:p>
+        </p:txBody>
       </p:sp>
       <p:sp>
         <p:nvSpPr>
@@ -5969,7 +5312,7 @@
           </a:bodyPr>
           <a:lstStyle/>
           <a:p>
-            <a:pPr algn="l" indent="0" marL="0">
+            <a:pPr marL="0" indent="0" algn="l">
               <a:buNone/>
             </a:pPr>
             <a:r>
@@ -6010,12 +5353,6 @@
           </a:bodyPr>
           <a:lstStyle/>
           <a:p>
-            <a:pPr algn="l" indent="0" marL="0">
-              <a:lnSpc>
-                <a:spcPct val="146667"/>
-              </a:lnSpc>
-              <a:buNone/>
-            </a:pPr>
             <a:r>
               <a:rPr lang="en-US" sz="1500" dirty="0">
                 <a:solidFill>
@@ -6025,260 +5362,139 @@
                 <a:ea typeface="Courier New" pitchFamily="34" charset="-122"/>
                 <a:cs typeface="Courier New" pitchFamily="34" charset="-120"/>
               </a:rPr>
-              <a:t>POST /submit/m4  {finding_type: </a:t>
-            </a:r>
-            <a:pPr algn="l" indent="0" marL="0">
-              <a:lnSpc>
-                <a:spcPct val="146667"/>
-              </a:lnSpc>
-              <a:buNone/>
-            </a:pPr>
+              <a:t>POST /submit/m4  {finding_type: "malicious_artifact",     value: "&lt;sha256&gt;"}</a:t>
+            </a:r>
+          </a:p>
+          <a:p>
             <a:r>
               <a:rPr lang="en-US" sz="1500" dirty="0">
                 <a:solidFill>
-                  <a:srgbClr val="FD7EF5"/>
+                  <a:srgbClr val="C8C8C8"/>
                 </a:solidFill>
                 <a:latin typeface="Courier New" pitchFamily="34" charset="0"/>
                 <a:ea typeface="Courier New" pitchFamily="34" charset="-122"/>
                 <a:cs typeface="Courier New" pitchFamily="34" charset="-120"/>
               </a:rPr>
-              <a:t>"malicious_artifact" </a:t>
-            </a:r>
-            <a:pPr algn="l" indent="0" marL="0">
+              <a:t>POST /submit/m4  {finding_type: "vulnerable_dependency",  value: "PyYAML==5.3.1"}</a:t>
+            </a:r>
+          </a:p>
+        </p:txBody>
+      </p:sp>
+      <p:sp>
+        <p:nvSpPr>
+          <p:cNvPr id="13" name="Text 11"/>
+          <p:cNvSpPr/>
+          <p:nvPr/>
+        </p:nvSpPr>
+        <p:spPr>
+          <a:xfrm>
+            <a:off x="990600" y="6068839"/>
+            <a:ext cx="16678275" cy="858143"/>
+          </a:xfrm>
+          <a:prstGeom prst="rect">
+            <a:avLst/>
+          </a:prstGeom>
+          <a:noFill/>
+          <a:ln/>
+        </p:spPr>
+        <p:txBody>
+          <a:bodyPr wrap="square" lIns="25400" tIns="25400" rIns="25400" bIns="25400" rtlCol="0" anchor="t">
+            <a:normAutofit/>
+          </a:bodyPr>
+          <a:lstStyle/>
+          <a:p>
+            <a:pPr marL="0" indent="0" algn="l">
               <a:lnSpc>
-                <a:spcPct val="146667"/>
+                <a:spcPct val="125522"/>
               </a:lnSpc>
               <a:buNone/>
             </a:pPr>
             <a:r>
-              <a:rPr lang="en-US" sz="1500" dirty="0">
-                <a:solidFill>
-                  <a:srgbClr val="C8C8C8"/>
+              <a:rPr lang="en-US" sz="2175" dirty="0">
+                <a:solidFill>
+                  <a:srgbClr val="FFFFFF"/>
+                </a:solidFill>
+                <a:latin typeface="Arial" pitchFamily="34" charset="0"/>
+                <a:ea typeface="Arial" pitchFamily="34" charset="-122"/>
+                <a:cs typeface="Arial" pitchFamily="34" charset="-120"/>
+              </a:rPr>
+              <a:t>Core: the poisoned artifact’s </a:t>
+            </a:r>
+            <a:r>
+              <a:rPr lang="en-US" sz="2175" b="1" dirty="0">
+                <a:solidFill>
+                  <a:srgbClr val="FFFFFF"/>
+                </a:solidFill>
+                <a:latin typeface="Arial" pitchFamily="34" charset="0"/>
+                <a:ea typeface="Arial" pitchFamily="34" charset="-122"/>
+                <a:cs typeface="Arial" pitchFamily="34" charset="-120"/>
+              </a:rPr>
+              <a:t>sha256 </a:t>
+            </a:r>
+            <a:r>
+              <a:rPr lang="en-US" sz="2175" dirty="0">
+                <a:solidFill>
+                  <a:srgbClr val="FFFFFF"/>
+                </a:solidFill>
+                <a:latin typeface="Arial" pitchFamily="34" charset="0"/>
+                <a:ea typeface="Arial" pitchFamily="34" charset="-122"/>
+                <a:cs typeface="Arial" pitchFamily="34" charset="-120"/>
+              </a:rPr>
+              <a:t>→ </a:t>
+            </a:r>
+            <a:r>
+              <a:rPr lang="en-US" sz="2175" dirty="0">
+                <a:solidFill>
+                  <a:srgbClr val="FFFFFF"/>
                 </a:solidFill>
                 <a:latin typeface="Courier New" pitchFamily="34" charset="0"/>
                 <a:ea typeface="Courier New" pitchFamily="34" charset="-122"/>
                 <a:cs typeface="Courier New" pitchFamily="34" charset="-120"/>
               </a:rPr>
-              <a:t>,     value: "&lt;sha256&gt;"}</a:t>
-            </a:r>
-            <a:endParaRPr lang="en-US" sz="1500" dirty="0"/>
-          </a:p>
-          <a:p>
-            <a:pPr algn="l" indent="0" marL="0">
-              <a:lnSpc>
-                <a:spcPct val="146667"/>
-              </a:lnSpc>
-              <a:buNone/>
-            </a:pPr>
-            <a:r>
-              <a:rPr lang="en-US" sz="1500" dirty="0">
-                <a:solidFill>
-                  <a:srgbClr val="C8C8C8"/>
+              <a:t>malicious_artifact_identified </a:t>
+            </a:r>
+            <a:r>
+              <a:rPr lang="en-US" sz="2175" dirty="0">
+                <a:solidFill>
+                  <a:srgbClr val="FFFFFF"/>
+                </a:solidFill>
+                <a:latin typeface="Arial" pitchFamily="34" charset="0"/>
+                <a:ea typeface="Arial" pitchFamily="34" charset="-122"/>
+                <a:cs typeface="Arial" pitchFamily="34" charset="-120"/>
+              </a:rPr>
+              <a:t>· Stretch: the </a:t>
+            </a:r>
+            <a:r>
+              <a:rPr lang="en-US" sz="2175" b="1" dirty="0">
+                <a:solidFill>
+                  <a:srgbClr val="FFFFFF"/>
+                </a:solidFill>
+                <a:latin typeface="Arial" pitchFamily="34" charset="0"/>
+                <a:ea typeface="Arial" pitchFamily="34" charset="-122"/>
+                <a:cs typeface="Arial" pitchFamily="34" charset="-120"/>
+              </a:rPr>
+              <a:t>vulnerable pin </a:t>
+            </a:r>
+            <a:r>
+              <a:rPr lang="en-US" sz="2175" dirty="0">
+                <a:solidFill>
+                  <a:srgbClr val="FFFFFF"/>
+                </a:solidFill>
+                <a:latin typeface="Arial" pitchFamily="34" charset="0"/>
+                <a:ea typeface="Arial" pitchFamily="34" charset="-122"/>
+                <a:cs typeface="Arial" pitchFamily="34" charset="-120"/>
+              </a:rPr>
+              <a:t>→ </a:t>
+            </a:r>
+            <a:r>
+              <a:rPr lang="en-US" sz="2175" dirty="0">
+                <a:solidFill>
+                  <a:srgbClr val="FFFFFF"/>
                 </a:solidFill>
                 <a:latin typeface="Courier New" pitchFamily="34" charset="0"/>
                 <a:ea typeface="Courier New" pitchFamily="34" charset="-122"/>
                 <a:cs typeface="Courier New" pitchFamily="34" charset="-120"/>
               </a:rPr>
-              <a:t>POST /submit/m4  {finding_type:  </a:t>
-            </a:r>
-            <a:endParaRPr lang="en-US" sz="1500" dirty="0"/>
-          </a:p>
-          <a:p>
-            <a:pPr algn="l" indent="0" marL="0">
-              <a:lnSpc>
-                <a:spcPct val="146667"/>
-              </a:lnSpc>
-              <a:buNone/>
-            </a:pPr>
-            <a:r>
-              <a:rPr lang="en-US" sz="1500" dirty="0">
-                <a:solidFill>
-                  <a:srgbClr val="FD7EF5"/>
-                </a:solidFill>
-                <a:latin typeface="Courier New" pitchFamily="34" charset="0"/>
-                <a:ea typeface="Courier New" pitchFamily="34" charset="-122"/>
-                <a:cs typeface="Courier New" pitchFamily="34" charset="-120"/>
-              </a:rPr>
-              <a:t>"vulnerable_dependency"</a:t>
-            </a:r>
-            <a:pPr algn="l" indent="0" marL="0">
-              <a:lnSpc>
-                <a:spcPct val="146667"/>
-              </a:lnSpc>
-              <a:buNone/>
-            </a:pPr>
-            <a:r>
-              <a:rPr lang="en-US" sz="1500" dirty="0">
-                <a:solidFill>
-                  <a:srgbClr val="C8C8C8"/>
-                </a:solidFill>
-                <a:latin typeface="Courier New" pitchFamily="34" charset="0"/>
-                <a:ea typeface="Courier New" pitchFamily="34" charset="-122"/>
-                <a:cs typeface="Courier New" pitchFamily="34" charset="-120"/>
-              </a:rPr>
-              <a:t>,  value: "PyYAML==5.3.1"}</a:t>
-            </a:r>
-            <a:endParaRPr lang="en-US" sz="1500" dirty="0"/>
-          </a:p>
-        </p:txBody>
-      </p:sp>
-      <p:sp>
-        <p:nvSpPr>
-          <p:cNvPr id="13" name="Text 11"/>
-          <p:cNvSpPr/>
-          <p:nvPr/>
-        </p:nvSpPr>
-        <p:spPr>
-          <a:xfrm>
-            <a:off x="990600" y="6068839"/>
-            <a:ext cx="16678275" cy="858143"/>
-          </a:xfrm>
-          <a:prstGeom prst="rect">
-            <a:avLst/>
-          </a:prstGeom>
-          <a:noFill/>
-          <a:ln/>
-        </p:spPr>
-        <p:txBody>
-          <a:bodyPr wrap="square" lIns="25400" tIns="25400" rIns="25400" bIns="25400" rtlCol="0" anchor="t">
-            <a:normAutofit/>
-          </a:bodyPr>
-          <a:lstStyle/>
-          <a:p>
-            <a:pPr algn="l" indent="0" marL="0">
-              <a:lnSpc>
-                <a:spcPct val="125522"/>
-              </a:lnSpc>
-              <a:buNone/>
-            </a:pPr>
-            <a:r>
-              <a:rPr lang="en-US" sz="2175" dirty="0">
-                <a:solidFill>
-                  <a:srgbClr val="FFFFFF"/>
-                </a:solidFill>
-                <a:latin typeface="Arial" pitchFamily="34" charset="0"/>
-                <a:ea typeface="Arial" pitchFamily="34" charset="-122"/>
-                <a:cs typeface="Arial" pitchFamily="34" charset="-120"/>
-              </a:rPr>
-              <a:t>Core: the poisoned artifact’s </a:t>
-            </a:r>
-            <a:pPr algn="l" indent="0" marL="0">
-              <a:lnSpc>
-                <a:spcPct val="125522"/>
-              </a:lnSpc>
-              <a:buNone/>
-            </a:pPr>
-            <a:r>
-              <a:rPr lang="en-US" sz="2175" b="1" dirty="0">
-                <a:solidFill>
-                  <a:srgbClr val="FFFFFF"/>
-                </a:solidFill>
-                <a:latin typeface="Arial" pitchFamily="34" charset="0"/>
-                <a:ea typeface="Arial" pitchFamily="34" charset="-122"/>
-                <a:cs typeface="Arial" pitchFamily="34" charset="-120"/>
-              </a:rPr>
-              <a:t>sha256 </a:t>
-            </a:r>
-            <a:pPr algn="l" indent="0" marL="0">
-              <a:lnSpc>
-                <a:spcPct val="125522"/>
-              </a:lnSpc>
-              <a:buNone/>
-            </a:pPr>
-            <a:r>
-              <a:rPr lang="en-US" sz="2175" dirty="0">
-                <a:solidFill>
-                  <a:srgbClr val="FFFFFF"/>
-                </a:solidFill>
-                <a:latin typeface="Arial" pitchFamily="34" charset="0"/>
-                <a:ea typeface="Arial" pitchFamily="34" charset="-122"/>
-                <a:cs typeface="Arial" pitchFamily="34" charset="-120"/>
-              </a:rPr>
-              <a:t>→ </a:t>
-            </a:r>
-            <a:pPr algn="l" indent="0" marL="0">
-              <a:lnSpc>
-                <a:spcPct val="125522"/>
-              </a:lnSpc>
-              <a:buNone/>
-            </a:pPr>
-            <a:r>
-              <a:rPr lang="en-US" sz="2175" dirty="0">
-                <a:solidFill>
-                  <a:srgbClr val="FFFFFF"/>
-                </a:solidFill>
-                <a:latin typeface="Courier New" pitchFamily="34" charset="0"/>
-                <a:ea typeface="Courier New" pitchFamily="34" charset="-122"/>
-                <a:cs typeface="Courier New" pitchFamily="34" charset="-120"/>
-              </a:rPr>
-              <a:t>malicious_artifact_identified </a:t>
-            </a:r>
-            <a:pPr algn="l" indent="0" marL="0">
-              <a:lnSpc>
-                <a:spcPct val="125522"/>
-              </a:lnSpc>
-              <a:buNone/>
-            </a:pPr>
-            <a:r>
-              <a:rPr lang="en-US" sz="2175" dirty="0">
-                <a:solidFill>
-                  <a:srgbClr val="FFFFFF"/>
-                </a:solidFill>
-                <a:latin typeface="Arial" pitchFamily="34" charset="0"/>
-                <a:ea typeface="Arial" pitchFamily="34" charset="-122"/>
-                <a:cs typeface="Arial" pitchFamily="34" charset="-120"/>
-              </a:rPr>
-              <a:t>· Stretch: the </a:t>
-            </a:r>
-            <a:pPr algn="l" indent="0" marL="0">
-              <a:lnSpc>
-                <a:spcPct val="125522"/>
-              </a:lnSpc>
-              <a:buNone/>
-            </a:pPr>
-            <a:r>
-              <a:rPr lang="en-US" sz="2175" b="1" dirty="0">
-                <a:solidFill>
-                  <a:srgbClr val="FFFFFF"/>
-                </a:solidFill>
-                <a:latin typeface="Arial" pitchFamily="34" charset="0"/>
-                <a:ea typeface="Arial" pitchFamily="34" charset="-122"/>
-                <a:cs typeface="Arial" pitchFamily="34" charset="-120"/>
-              </a:rPr>
-              <a:t>vulnerable pin </a:t>
-            </a:r>
-            <a:pPr algn="l" indent="0" marL="0">
-              <a:lnSpc>
-                <a:spcPct val="125522"/>
-              </a:lnSpc>
-              <a:buNone/>
-            </a:pPr>
-            <a:r>
-              <a:rPr lang="en-US" sz="2175" dirty="0">
-                <a:solidFill>
-                  <a:srgbClr val="FFFFFF"/>
-                </a:solidFill>
-                <a:latin typeface="Arial" pitchFamily="34" charset="0"/>
-                <a:ea typeface="Arial" pitchFamily="34" charset="-122"/>
-                <a:cs typeface="Arial" pitchFamily="34" charset="-120"/>
-              </a:rPr>
-              <a:t>→ </a:t>
-            </a:r>
-            <a:pPr algn="l" indent="0" marL="0">
-              <a:lnSpc>
-                <a:spcPct val="125522"/>
-              </a:lnSpc>
-              <a:buNone/>
-            </a:pPr>
-            <a:r>
-              <a:rPr lang="en-US" sz="2175" dirty="0">
-                <a:solidFill>
-                  <a:srgbClr val="FFFFFF"/>
-                </a:solidFill>
-                <a:latin typeface="Courier New" pitchFamily="34" charset="0"/>
-                <a:ea typeface="Courier New" pitchFamily="34" charset="-122"/>
-                <a:cs typeface="Courier New" pitchFamily="34" charset="-120"/>
-              </a:rPr>
               <a:t>vulnerable_dependency_identified</a:t>
             </a:r>
             <a:endParaRPr lang="en-US" sz="2175" dirty="0"/>
@@ -6287,14 +5503,14 @@
       </p:sp>
       <p:pic>
         <p:nvPicPr>
-          <p:cNvPr id="14" name="Image 0" descr="preencoded.png">    </p:cNvPr>
+          <p:cNvPr id="14" name="Image 0" descr="preencoded.png"/>
           <p:cNvPicPr>
             <a:picLocks noChangeAspect="1"/>
           </p:cNvPicPr>
           <p:nvPr/>
         </p:nvPicPr>
         <p:blipFill>
-          <a:blip r:embed="rId1"/>
+          <a:blip r:embed="rId3"/>
           <a:stretch>
             <a:fillRect/>
           </a:stretch>
@@ -6332,11 +5548,11 @@
           </a:bodyPr>
           <a:lstStyle/>
           <a:p>
-            <a:pPr algn="l" indent="0" marL="0">
-              <a:buNone/>
-            </a:pPr>
-            <a:r>
-              <a:rPr lang="en-US" sz="1200" spc="264" kern="0" dirty="0">
+            <a:pPr marL="0" indent="0" algn="l">
+              <a:buNone/>
+            </a:pPr>
+            <a:r>
+              <a:rPr lang="en-US" sz="1200" kern="0" spc="264" dirty="0">
                 <a:solidFill>
                   <a:srgbClr val="969696"/>
                 </a:solidFill>
@@ -6366,6 +5582,7 @@
         <a:solidFill>
           <a:srgbClr val="000000"/>
         </a:solidFill>
+        <a:effectLst/>
       </p:bgPr>
     </p:bg>
     <p:spTree>
@@ -6405,11 +5622,11 @@
           </a:bodyPr>
           <a:lstStyle/>
           <a:p>
-            <a:pPr algn="l" indent="0" marL="0">
-              <a:buNone/>
-            </a:pPr>
-            <a:r>
-              <a:rPr lang="en-US" sz="1500" spc="450" kern="0" dirty="0">
+            <a:pPr marL="0" indent="0" algn="l">
+              <a:buNone/>
+            </a:pPr>
+            <a:r>
+              <a:rPr lang="en-US" sz="1500" kern="0" spc="450" dirty="0">
                 <a:solidFill>
                   <a:srgbClr val="36CDFF"/>
                 </a:solidFill>
@@ -6446,7 +5663,7 @@
           </a:bodyPr>
           <a:lstStyle/>
           <a:p>
-            <a:pPr algn="l" indent="0" marL="0">
+            <a:pPr marL="0" indent="0" algn="l">
               <a:lnSpc>
                 <a:spcPct val="78416"/>
               </a:lnSpc>
@@ -6495,6 +5712,13 @@
             <a:prstDash val="solid"/>
           </a:ln>
         </p:spPr>
+        <p:txBody>
+          <a:bodyPr/>
+          <a:lstStyle/>
+          <a:p>
+            <a:endParaRPr lang="en-US"/>
+          </a:p>
+        </p:txBody>
       </p:sp>
       <p:sp>
         <p:nvSpPr>
@@ -6517,6 +5741,13 @@
           </a:solidFill>
           <a:ln/>
         </p:spPr>
+        <p:txBody>
+          <a:bodyPr/>
+          <a:lstStyle/>
+          <a:p>
+            <a:endParaRPr lang="en-US"/>
+          </a:p>
+        </p:txBody>
       </p:sp>
       <p:sp>
         <p:nvSpPr>
@@ -6537,6 +5768,13 @@
           </a:solidFill>
           <a:ln/>
         </p:spPr>
+        <p:txBody>
+          <a:bodyPr/>
+          <a:lstStyle/>
+          <a:p>
+            <a:endParaRPr lang="en-US"/>
+          </a:p>
+        </p:txBody>
       </p:sp>
       <p:sp>
         <p:nvSpPr>
@@ -6557,6 +5795,13 @@
           </a:solidFill>
           <a:ln/>
         </p:spPr>
+        <p:txBody>
+          <a:bodyPr/>
+          <a:lstStyle/>
+          <a:p>
+            <a:endParaRPr lang="en-US"/>
+          </a:p>
+        </p:txBody>
       </p:sp>
       <p:sp>
         <p:nvSpPr>
@@ -6577,6 +5822,13 @@
           </a:solidFill>
           <a:ln/>
         </p:spPr>
+        <p:txBody>
+          <a:bodyPr/>
+          <a:lstStyle/>
+          <a:p>
+            <a:endParaRPr lang="en-US"/>
+          </a:p>
+        </p:txBody>
       </p:sp>
       <p:sp>
         <p:nvSpPr>
@@ -6601,7 +5853,7 @@
           </a:bodyPr>
           <a:lstStyle/>
           <a:p>
-            <a:pPr algn="l" indent="0" marL="0">
+            <a:pPr marL="0" indent="0" algn="l">
               <a:buNone/>
             </a:pPr>
             <a:r>
@@ -6642,12 +5894,6 @@
           </a:bodyPr>
           <a:lstStyle/>
           <a:p>
-            <a:pPr algn="l" indent="0" marL="0">
-              <a:lnSpc>
-                <a:spcPct val="145200"/>
-              </a:lnSpc>
-              <a:buNone/>
-            </a:pPr>
             <a:r>
               <a:rPr lang="en-US" sz="1650" dirty="0">
                 <a:solidFill>
@@ -6657,31 +5903,23 @@
                 <a:ea typeface="Courier New" pitchFamily="34" charset="-122"/>
                 <a:cs typeface="Courier New" pitchFamily="34" charset="-120"/>
               </a:rPr>
-              <a:t>numpy==1.26.4 </a:t>
-            </a:r>
-            <a:pPr algn="l" indent="0" marL="0">
-              <a:lnSpc>
-                <a:spcPct val="145200"/>
-              </a:lnSpc>
-              <a:buNone/>
-            </a:pPr>
+              <a:t># labs/m4/requirements-vulnerable.txt</a:t>
+            </a:r>
+          </a:p>
+          <a:p>
             <a:r>
               <a:rPr lang="en-US" sz="1650" dirty="0">
                 <a:solidFill>
-                  <a:srgbClr val="FD7EF5"/>
+                  <a:srgbClr val="C8C8C8"/>
                 </a:solidFill>
                 <a:latin typeface="Courier New" pitchFamily="34" charset="0"/>
                 <a:ea typeface="Courier New" pitchFamily="34" charset="-122"/>
                 <a:cs typeface="Courier New" pitchFamily="34" charset="-120"/>
               </a:rPr>
-              <a:t>PyYAML==5.3.1</a:t>
-            </a:r>
-            <a:pPr algn="l" indent="0" marL="0">
-              <a:lnSpc>
-                <a:spcPct val="145200"/>
-              </a:lnSpc>
-              <a:buNone/>
-            </a:pPr>
+              <a:t>numpy==1.26.4</a:t>
+            </a:r>
+          </a:p>
+          <a:p>
             <a:r>
               <a:rPr lang="en-US" sz="1650" dirty="0">
                 <a:solidFill>
@@ -6691,43 +5929,21 @@
                 <a:ea typeface="Courier New" pitchFamily="34" charset="-122"/>
                 <a:cs typeface="Courier New" pitchFamily="34" charset="-120"/>
               </a:rPr>
-              <a:t>      </a:t>
-            </a:r>
-            <a:pPr algn="l" indent="0" marL="0">
-              <a:lnSpc>
-                <a:spcPct val="145200"/>
-              </a:lnSpc>
-              <a:buNone/>
-            </a:pPr>
+              <a:t>PyYAML==5.3.1      ← CVE-2020-14343: yaml.load() → arbitrary code execution</a:t>
+            </a:r>
+          </a:p>
+          <a:p>
             <a:r>
               <a:rPr lang="en-US" sz="1650" dirty="0">
                 <a:solidFill>
-                  <a:srgbClr val="FD7EF5"/>
+                  <a:srgbClr val="C8C8C8"/>
                 </a:solidFill>
                 <a:latin typeface="Courier New" pitchFamily="34" charset="0"/>
                 <a:ea typeface="Courier New" pitchFamily="34" charset="-122"/>
                 <a:cs typeface="Courier New" pitchFamily="34" charset="-120"/>
               </a:rPr>
-              <a:t>&lt;-- CVE-2020-14343: yaml.load() -&gt; arbitrary code execution </a:t>
-            </a:r>
-            <a:pPr algn="l" indent="0" marL="0">
-              <a:lnSpc>
-                <a:spcPct val="145200"/>
-              </a:lnSpc>
-              <a:buNone/>
-            </a:pPr>
-            <a:r>
-              <a:rPr lang="en-US" sz="1650" dirty="0">
-                <a:solidFill>
-                  <a:srgbClr val="C8C8C8"/>
-                </a:solidFill>
-                <a:latin typeface="Courier New" pitchFamily="34" charset="0"/>
-                <a:ea typeface="Courier New" pitchFamily="34" charset="-122"/>
-                <a:cs typeface="Courier New" pitchFamily="34" charset="-120"/>
-              </a:rPr>
               <a:t>requests==2.31.0</a:t>
             </a:r>
-            <a:endParaRPr lang="en-US" sz="1650" dirty="0"/>
           </a:p>
         </p:txBody>
       </p:sp>
@@ -6754,7 +5970,7 @@
           </a:bodyPr>
           <a:lstStyle/>
           <a:p>
-            <a:pPr algn="l" indent="0" marL="0">
+            <a:pPr marL="0" indent="0" algn="l">
               <a:lnSpc>
                 <a:spcPct val="125522"/>
               </a:lnSpc>
@@ -6777,14 +5993,14 @@
       </p:sp>
       <p:pic>
         <p:nvPicPr>
-          <p:cNvPr id="12" name="Image 0" descr="preencoded.png">    </p:cNvPr>
+          <p:cNvPr id="12" name="Image 0" descr="preencoded.png"/>
           <p:cNvPicPr>
             <a:picLocks noChangeAspect="1"/>
           </p:cNvPicPr>
           <p:nvPr/>
         </p:nvPicPr>
         <p:blipFill>
-          <a:blip r:embed="rId1"/>
+          <a:blip r:embed="rId3"/>
           <a:stretch>
             <a:fillRect/>
           </a:stretch>
@@ -6822,11 +6038,11 @@
           </a:bodyPr>
           <a:lstStyle/>
           <a:p>
-            <a:pPr algn="l" indent="0" marL="0">
-              <a:buNone/>
-            </a:pPr>
-            <a:r>
-              <a:rPr lang="en-US" sz="1200" spc="264" kern="0" dirty="0">
+            <a:pPr marL="0" indent="0" algn="l">
+              <a:buNone/>
+            </a:pPr>
+            <a:r>
+              <a:rPr lang="en-US" sz="1200" kern="0" spc="264" dirty="0">
                 <a:solidFill>
                   <a:srgbClr val="969696"/>
                 </a:solidFill>
@@ -6856,6 +6072,7 @@
         <a:solidFill>
           <a:srgbClr val="000000"/>
         </a:solidFill>
+        <a:effectLst/>
       </p:bgPr>
     </p:bg>
     <p:spTree>
@@ -6891,6 +6108,13 @@
           </a:solidFill>
           <a:ln/>
         </p:spPr>
+        <p:txBody>
+          <a:bodyPr/>
+          <a:lstStyle/>
+          <a:p>
+            <a:endParaRPr lang="en-US"/>
+          </a:p>
+        </p:txBody>
       </p:sp>
       <p:sp>
         <p:nvSpPr>
@@ -6915,11 +6139,11 @@
           </a:bodyPr>
           <a:lstStyle/>
           <a:p>
-            <a:pPr algn="l" indent="0" marL="0">
-              <a:buNone/>
-            </a:pPr>
-            <a:r>
-              <a:rPr lang="en-US" sz="1950" spc="663" kern="0" dirty="0">
+            <a:pPr marL="0" indent="0" algn="l">
+              <a:buNone/>
+            </a:pPr>
+            <a:r>
+              <a:rPr lang="en-US" sz="1950" kern="0" spc="663" dirty="0">
                 <a:solidFill>
                   <a:srgbClr val="FD7EF5"/>
                 </a:solidFill>
@@ -6927,7 +6151,7 @@
                 <a:ea typeface="Courier New" pitchFamily="34" charset="-122"/>
                 <a:cs typeface="Courier New" pitchFamily="34" charset="-120"/>
               </a:rPr>
-              <a:t>▶ DEMO / INSTRUCTOR ONLY</a:t>
+              <a:t>▶ DEMO / WATCH ONLY</a:t>
             </a:r>
             <a:endParaRPr lang="en-US" sz="1950" dirty="0"/>
           </a:p>
@@ -6956,7 +6180,7 @@
           </a:bodyPr>
           <a:lstStyle/>
           <a:p>
-            <a:pPr algn="l" indent="0" marL="0">
+            <a:pPr marL="0" indent="0" algn="l">
               <a:lnSpc>
                 <a:spcPct val="71526"/>
               </a:lnSpc>
@@ -7000,7 +6224,7 @@
           </a:bodyPr>
           <a:lstStyle/>
           <a:p>
-            <a:pPr algn="l" indent="0" marL="0">
+            <a:pPr marL="0" indent="0" algn="l">
               <a:lnSpc>
                 <a:spcPct val="122051"/>
               </a:lnSpc>
@@ -7017,12 +6241,6 @@
               </a:rPr>
               <a:t>Vulnerable loader → </a:t>
             </a:r>
-            <a:pPr algn="l" indent="0" marL="0">
-              <a:lnSpc>
-                <a:spcPct val="122051"/>
-              </a:lnSpc>
-              <a:buNone/>
-            </a:pPr>
             <a:r>
               <a:rPr lang="en-US" sz="2550" dirty="0">
                 <a:solidFill>
@@ -7034,12 +6252,6 @@
               </a:rPr>
               <a:t>eiger-m4-rce </a:t>
             </a:r>
-            <a:pPr algn="l" indent="0" marL="0">
-              <a:lnSpc>
-                <a:spcPct val="122051"/>
-              </a:lnSpc>
-              <a:buNone/>
-            </a:pPr>
             <a:r>
               <a:rPr lang="en-US" sz="2550" dirty="0">
                 <a:solidFill>
@@ -7051,12 +6263,6 @@
               </a:rPr>
               <a:t>prints from </a:t>
             </a:r>
-            <a:pPr algn="l" indent="0" marL="0">
-              <a:lnSpc>
-                <a:spcPct val="122051"/>
-              </a:lnSpc>
-              <a:buNone/>
-            </a:pPr>
             <a:r>
               <a:rPr lang="en-US" sz="2550" i="1" dirty="0">
                 <a:solidFill>
@@ -7068,12 +6274,6 @@
               </a:rPr>
               <a:t>loading a file. </a:t>
             </a:r>
-            <a:pPr algn="l" indent="0" marL="0">
-              <a:lnSpc>
-                <a:spcPct val="122051"/>
-              </a:lnSpc>
-              <a:buNone/>
-            </a:pPr>
             <a:r>
               <a:rPr lang="en-US" sz="2550" dirty="0">
                 <a:solidFill>
@@ -7091,14 +6291,14 @@
       </p:sp>
       <p:pic>
         <p:nvPicPr>
-          <p:cNvPr id="6" name="Image 0" descr="preencoded.png">    </p:cNvPr>
+          <p:cNvPr id="6" name="Image 0" descr="preencoded.png"/>
           <p:cNvPicPr>
             <a:picLocks noChangeAspect="1"/>
           </p:cNvPicPr>
           <p:nvPr/>
         </p:nvPicPr>
         <p:blipFill>
-          <a:blip r:embed="rId1"/>
+          <a:blip r:embed="rId3"/>
           <a:stretch>
             <a:fillRect/>
           </a:stretch>
@@ -7136,11 +6336,11 @@
           </a:bodyPr>
           <a:lstStyle/>
           <a:p>
-            <a:pPr algn="l" indent="0" marL="0">
-              <a:buNone/>
-            </a:pPr>
-            <a:r>
-              <a:rPr lang="en-US" sz="1200" spc="264" kern="0" dirty="0">
+            <a:pPr marL="0" indent="0" algn="l">
+              <a:buNone/>
+            </a:pPr>
+            <a:r>
+              <a:rPr lang="en-US" sz="1200" kern="0" spc="264" dirty="0">
                 <a:solidFill>
                   <a:srgbClr val="969696"/>
                 </a:solidFill>
@@ -7170,6 +6370,7 @@
         <a:solidFill>
           <a:srgbClr val="000000"/>
         </a:solidFill>
+        <a:effectLst/>
       </p:bgPr>
     </p:bg>
     <p:spTree>
@@ -7209,11 +6410,11 @@
           </a:bodyPr>
           <a:lstStyle/>
           <a:p>
-            <a:pPr algn="l" indent="0" marL="0">
-              <a:buNone/>
-            </a:pPr>
-            <a:r>
-              <a:rPr lang="en-US" sz="1500" spc="450" kern="0" dirty="0">
+            <a:pPr marL="0" indent="0" algn="l">
+              <a:buNone/>
+            </a:pPr>
+            <a:r>
+              <a:rPr lang="en-US" sz="1500" kern="0" spc="450" dirty="0">
                 <a:solidFill>
                   <a:srgbClr val="36CDFF"/>
                 </a:solidFill>
@@ -7250,7 +6451,7 @@
           </a:bodyPr>
           <a:lstStyle/>
           <a:p>
-            <a:pPr algn="l" indent="0" marL="0">
+            <a:pPr marL="0" indent="0" algn="l">
               <a:lnSpc>
                 <a:spcPct val="78190"/>
               </a:lnSpc>
@@ -7292,6 +6493,13 @@
           </a:solidFill>
           <a:ln/>
         </p:spPr>
+        <p:txBody>
+          <a:bodyPr/>
+          <a:lstStyle/>
+          <a:p>
+            <a:endParaRPr lang="en-US"/>
+          </a:p>
+        </p:txBody>
       </p:sp>
       <p:sp>
         <p:nvSpPr>
@@ -7316,11 +6524,11 @@
           </a:bodyPr>
           <a:lstStyle/>
           <a:p>
-            <a:pPr algn="l" indent="0" marL="0">
-              <a:buNone/>
-            </a:pPr>
-            <a:r>
-              <a:rPr lang="en-US" sz="1350" spc="135" kern="0" dirty="0">
+            <a:pPr marL="0" indent="0" algn="l">
+              <a:buNone/>
+            </a:pPr>
+            <a:r>
+              <a:rPr lang="en-US" sz="1350" kern="0" spc="135" dirty="0">
                 <a:solidFill>
                   <a:srgbClr val="FD7EF5"/>
                 </a:solidFill>
@@ -7357,11 +6565,11 @@
           </a:bodyPr>
           <a:lstStyle/>
           <a:p>
-            <a:pPr algn="l" indent="0" marL="0">
-              <a:buNone/>
-            </a:pPr>
-            <a:r>
-              <a:rPr lang="en-US" sz="1350" spc="135" kern="0" dirty="0">
+            <a:pPr marL="0" indent="0" algn="l">
+              <a:buNone/>
+            </a:pPr>
+            <a:r>
+              <a:rPr lang="en-US" sz="1350" kern="0" spc="135" dirty="0">
                 <a:solidFill>
                   <a:srgbClr val="36CDFF"/>
                 </a:solidFill>
@@ -7396,6 +6604,13 @@
           </a:solidFill>
           <a:ln/>
         </p:spPr>
+        <p:txBody>
+          <a:bodyPr/>
+          <a:lstStyle/>
+          <a:p>
+            <a:endParaRPr lang="en-US"/>
+          </a:p>
+        </p:txBody>
       </p:sp>
       <p:sp>
         <p:nvSpPr>
@@ -7420,7 +6635,7 @@
           </a:bodyPr>
           <a:lstStyle/>
           <a:p>
-            <a:pPr algn="l" indent="0" marL="0">
+            <a:pPr marL="0" indent="0" algn="l">
               <a:lnSpc>
                 <a:spcPct val="117000"/>
               </a:lnSpc>
@@ -7437,12 +6652,6 @@
               </a:rPr>
               <a:t>any file → </a:t>
             </a:r>
-            <a:pPr algn="l" indent="0" marL="0">
-              <a:lnSpc>
-                <a:spcPct val="117000"/>
-              </a:lnSpc>
-              <a:buNone/>
-            </a:pPr>
             <a:r>
               <a:rPr lang="en-US" sz="1950" b="1" dirty="0">
                 <a:solidFill>
@@ -7479,6 +6688,13 @@
           </a:solidFill>
           <a:ln/>
         </p:spPr>
+        <p:txBody>
+          <a:bodyPr/>
+          <a:lstStyle/>
+          <a:p>
+            <a:endParaRPr lang="en-US"/>
+          </a:p>
+        </p:txBody>
       </p:sp>
       <p:sp>
         <p:nvSpPr>
@@ -7503,7 +6719,7 @@
           </a:bodyPr>
           <a:lstStyle/>
           <a:p>
-            <a:pPr algn="l" indent="0" marL="0">
+            <a:pPr marL="0" indent="0" algn="l">
               <a:lnSpc>
                 <a:spcPct val="117000"/>
               </a:lnSpc>
@@ -7520,12 +6736,6 @@
               </a:rPr>
               <a:t>format allowlist</a:t>
             </a:r>
-            <a:pPr algn="l" indent="0" marL="0">
-              <a:lnSpc>
-                <a:spcPct val="117000"/>
-              </a:lnSpc>
-              <a:buNone/>
-            </a:pPr>
             <a:r>
               <a:rPr lang="en-US" sz="1950" dirty="0">
                 <a:solidFill>
@@ -7562,6 +6772,13 @@
           </a:solidFill>
           <a:ln/>
         </p:spPr>
+        <p:txBody>
+          <a:bodyPr/>
+          <a:lstStyle/>
+          <a:p>
+            <a:endParaRPr lang="en-US"/>
+          </a:p>
+        </p:txBody>
       </p:sp>
       <p:sp>
         <p:nvSpPr>
@@ -7586,7 +6803,7 @@
           </a:bodyPr>
           <a:lstStyle/>
           <a:p>
-            <a:pPr algn="l" indent="0" marL="0">
+            <a:pPr marL="0" indent="0" algn="l">
               <a:lnSpc>
                 <a:spcPct val="117000"/>
               </a:lnSpc>
@@ -7603,12 +6820,6 @@
               </a:rPr>
               <a:t>__reduce__ </a:t>
             </a:r>
-            <a:pPr algn="l" indent="0" marL="0">
-              <a:lnSpc>
-                <a:spcPct val="117000"/>
-              </a:lnSpc>
-              <a:buNone/>
-            </a:pPr>
             <a:r>
               <a:rPr lang="en-US" sz="1950" b="1" dirty="0">
                 <a:solidFill>
@@ -7620,12 +6831,6 @@
               </a:rPr>
               <a:t>fires → </a:t>
             </a:r>
-            <a:pPr algn="l" indent="0" marL="0">
-              <a:lnSpc>
-                <a:spcPct val="117000"/>
-              </a:lnSpc>
-              <a:buNone/>
-            </a:pPr>
             <a:r>
               <a:rPr lang="en-US" sz="1950" b="1" dirty="0">
                 <a:solidFill>
@@ -7662,6 +6867,13 @@
           </a:solidFill>
           <a:ln/>
         </p:spPr>
+        <p:txBody>
+          <a:bodyPr/>
+          <a:lstStyle/>
+          <a:p>
+            <a:endParaRPr lang="en-US"/>
+          </a:p>
+        </p:txBody>
       </p:sp>
       <p:sp>
         <p:nvSpPr>
@@ -7686,7 +6898,7 @@
           </a:bodyPr>
           <a:lstStyle/>
           <a:p>
-            <a:pPr algn="l" indent="0" marL="0">
+            <a:pPr marL="0" indent="0" algn="l">
               <a:lnSpc>
                 <a:spcPct val="117000"/>
               </a:lnSpc>
@@ -7703,12 +6915,6 @@
               </a:rPr>
               <a:t>then </a:t>
             </a:r>
-            <a:pPr algn="l" indent="0" marL="0">
-              <a:lnSpc>
-                <a:spcPct val="117000"/>
-              </a:lnSpc>
-              <a:buNone/>
-            </a:pPr>
             <a:r>
               <a:rPr lang="en-US" sz="1950" dirty="0">
                 <a:solidFill>
@@ -7745,6 +6951,13 @@
           </a:solidFill>
           <a:ln/>
         </p:spPr>
+        <p:txBody>
+          <a:bodyPr/>
+          <a:lstStyle/>
+          <a:p>
+            <a:endParaRPr lang="en-US"/>
+          </a:p>
+        </p:txBody>
       </p:sp>
       <p:sp>
         <p:nvSpPr>
@@ -7769,7 +6982,7 @@
           </a:bodyPr>
           <a:lstStyle/>
           <a:p>
-            <a:pPr algn="l" indent="0" marL="0">
+            <a:pPr marL="0" indent="0" algn="l">
               <a:lnSpc>
                 <a:spcPct val="117000"/>
               </a:lnSpc>
@@ -7811,6 +7024,13 @@
           </a:solidFill>
           <a:ln/>
         </p:spPr>
+        <p:txBody>
+          <a:bodyPr/>
+          <a:lstStyle/>
+          <a:p>
+            <a:endParaRPr lang="en-US"/>
+          </a:p>
+        </p:txBody>
       </p:sp>
       <p:sp>
         <p:nvSpPr>
@@ -7835,7 +7055,7 @@
           </a:bodyPr>
           <a:lstStyle/>
           <a:p>
-            <a:pPr algn="l" indent="0" marL="0">
+            <a:pPr marL="0" indent="0" algn="l">
               <a:lnSpc>
                 <a:spcPct val="117000"/>
               </a:lnSpc>
@@ -7852,12 +7072,6 @@
               </a:rPr>
               <a:t>refused </a:t>
             </a:r>
-            <a:pPr algn="l" indent="0" marL="0">
-              <a:lnSpc>
-                <a:spcPct val="117000"/>
-              </a:lnSpc>
-              <a:buNone/>
-            </a:pPr>
             <a:r>
               <a:rPr lang="en-US" sz="1950" b="1" dirty="0">
                 <a:solidFill>
@@ -7875,14 +7089,14 @@
       </p:sp>
       <p:pic>
         <p:nvPicPr>
-          <p:cNvPr id="19" name="Image 0" descr="preencoded.png">    </p:cNvPr>
+          <p:cNvPr id="19" name="Image 0" descr="preencoded.png"/>
           <p:cNvPicPr>
             <a:picLocks noChangeAspect="1"/>
           </p:cNvPicPr>
           <p:nvPr/>
         </p:nvPicPr>
         <p:blipFill>
-          <a:blip r:embed="rId1"/>
+          <a:blip r:embed="rId3"/>
           <a:stretch>
             <a:fillRect/>
           </a:stretch>
@@ -7920,11 +7134,11 @@
           </a:bodyPr>
           <a:lstStyle/>
           <a:p>
-            <a:pPr algn="l" indent="0" marL="0">
-              <a:buNone/>
-            </a:pPr>
-            <a:r>
-              <a:rPr lang="en-US" sz="1200" spc="264" kern="0" dirty="0">
+            <a:pPr marL="0" indent="0" algn="l">
+              <a:buNone/>
+            </a:pPr>
+            <a:r>
+              <a:rPr lang="en-US" sz="1200" kern="0" spc="264" dirty="0">
                 <a:solidFill>
                   <a:srgbClr val="969696"/>
                 </a:solidFill>
@@ -7954,6 +7168,7 @@
         <a:solidFill>
           <a:srgbClr val="000000"/>
         </a:solidFill>
+        <a:effectLst/>
       </p:bgPr>
     </p:bg>
     <p:spTree>
@@ -7993,11 +7208,11 @@
           </a:bodyPr>
           <a:lstStyle/>
           <a:p>
-            <a:pPr algn="l" indent="0" marL="0">
-              <a:buNone/>
-            </a:pPr>
-            <a:r>
-              <a:rPr lang="en-US" sz="1500" spc="450" kern="0" dirty="0">
+            <a:pPr marL="0" indent="0" algn="l">
+              <a:buNone/>
+            </a:pPr>
+            <a:r>
+              <a:rPr lang="en-US" sz="1500" kern="0" spc="450" dirty="0">
                 <a:solidFill>
                   <a:srgbClr val="36CDFF"/>
                 </a:solidFill>
@@ -8034,7 +7249,7 @@
           </a:bodyPr>
           <a:lstStyle/>
           <a:p>
-            <a:pPr algn="l" indent="0" marL="0">
+            <a:pPr marL="0" indent="0" algn="l">
               <a:lnSpc>
                 <a:spcPct val="78190"/>
               </a:lnSpc>
@@ -8078,7 +7293,7 @@
           </a:bodyPr>
           <a:lstStyle/>
           <a:p>
-            <a:pPr algn="l" indent="0" marL="0">
+            <a:pPr marL="0" indent="0" algn="l">
               <a:lnSpc>
                 <a:spcPct val="132000"/>
               </a:lnSpc>
@@ -8122,7 +7337,7 @@
           </a:bodyPr>
           <a:lstStyle/>
           <a:p>
-            <a:pPr algn="l" indent="0" marL="0">
+            <a:pPr marL="0" indent="0" algn="l">
               <a:lnSpc>
                 <a:spcPct val="121935"/>
               </a:lnSpc>
@@ -8139,65 +7354,371 @@
               </a:rPr>
               <a:t>rename it </a:t>
             </a:r>
-            <a:pPr algn="l" indent="0" marL="0">
+            <a:r>
+              <a:rPr lang="en-US" sz="2025" dirty="0">
+                <a:solidFill>
+                  <a:srgbClr val="FFFFFF"/>
+                </a:solidFill>
+                <a:latin typeface="Arial" pitchFamily="34" charset="0"/>
+                <a:ea typeface="Arial" pitchFamily="34" charset="-122"/>
+                <a:cs typeface="Arial" pitchFamily="34" charset="-120"/>
+              </a:rPr>
+              <a:t>— does anything trust the </a:t>
+            </a:r>
+            <a:r>
+              <a:rPr lang="en-US" sz="2025" i="1" dirty="0">
+                <a:solidFill>
+                  <a:srgbClr val="FFFFFF"/>
+                </a:solidFill>
+                <a:latin typeface="Arial" pitchFamily="34" charset="0"/>
+                <a:ea typeface="Arial" pitchFamily="34" charset="-122"/>
+                <a:cs typeface="Arial" pitchFamily="34" charset="-120"/>
+              </a:rPr>
+              <a:t>extension </a:t>
+            </a:r>
+            <a:r>
+              <a:rPr lang="en-US" sz="2025" dirty="0">
+                <a:solidFill>
+                  <a:srgbClr val="FFFFFF"/>
+                </a:solidFill>
+                <a:latin typeface="Arial" pitchFamily="34" charset="0"/>
+                <a:ea typeface="Arial" pitchFamily="34" charset="-122"/>
+                <a:cs typeface="Arial" pitchFamily="34" charset="-120"/>
+              </a:rPr>
+              <a:t>rather than the </a:t>
+            </a:r>
+            <a:r>
+              <a:rPr lang="en-US" sz="2025" i="1" dirty="0">
+                <a:solidFill>
+                  <a:srgbClr val="FFFFFF"/>
+                </a:solidFill>
+                <a:latin typeface="Arial" pitchFamily="34" charset="0"/>
+                <a:ea typeface="Arial" pitchFamily="34" charset="-122"/>
+                <a:cs typeface="Arial" pitchFamily="34" charset="-120"/>
+              </a:rPr>
+              <a:t>content</a:t>
+            </a:r>
+            <a:r>
+              <a:rPr lang="en-US" sz="2025" dirty="0">
+                <a:solidFill>
+                  <a:srgbClr val="FFFFFF"/>
+                </a:solidFill>
+                <a:latin typeface="Arial" pitchFamily="34" charset="0"/>
+                <a:ea typeface="Arial" pitchFamily="34" charset="-122"/>
+                <a:cs typeface="Arial" pitchFamily="34" charset="-120"/>
+              </a:rPr>
+              <a:t>?</a:t>
+            </a:r>
+            <a:endParaRPr lang="en-US" sz="2025" dirty="0"/>
+          </a:p>
+        </p:txBody>
+      </p:sp>
+      <p:sp>
+        <p:nvSpPr>
+          <p:cNvPr id="6" name="Text 4"/>
+          <p:cNvSpPr/>
+          <p:nvPr/>
+        </p:nvSpPr>
+        <p:spPr>
+          <a:xfrm>
+            <a:off x="990600" y="5159201"/>
+            <a:ext cx="202406" cy="352425"/>
+          </a:xfrm>
+          <a:prstGeom prst="rect">
+            <a:avLst/>
+          </a:prstGeom>
+          <a:noFill/>
+          <a:ln/>
+        </p:spPr>
+        <p:txBody>
+          <a:bodyPr wrap="square" lIns="25400" tIns="25400" rIns="25400" bIns="25400" rtlCol="0" anchor="t">
+            <a:normAutofit/>
+          </a:bodyPr>
+          <a:lstStyle/>
+          <a:p>
+            <a:pPr marL="0" indent="0" algn="l">
+              <a:lnSpc>
+                <a:spcPct val="132000"/>
+              </a:lnSpc>
+              <a:buNone/>
+            </a:pPr>
+            <a:r>
+              <a:rPr lang="en-US" sz="1650" dirty="0">
+                <a:solidFill>
+                  <a:srgbClr val="FD7EF5"/>
+                </a:solidFill>
+                <a:latin typeface="Courier New" pitchFamily="34" charset="0"/>
+                <a:ea typeface="Courier New" pitchFamily="34" charset="-122"/>
+                <a:cs typeface="Courier New" pitchFamily="34" charset="-120"/>
+              </a:rPr>
+              <a:t>▸</a:t>
+            </a:r>
+            <a:endParaRPr lang="en-US" sz="1650" dirty="0"/>
+          </a:p>
+        </p:txBody>
+      </p:sp>
+      <p:sp>
+        <p:nvSpPr>
+          <p:cNvPr id="7" name="Text 5"/>
+          <p:cNvSpPr/>
+          <p:nvPr/>
+        </p:nvSpPr>
+        <p:spPr>
+          <a:xfrm>
+            <a:off x="1307306" y="5159201"/>
+            <a:ext cx="15840179" cy="407640"/>
+          </a:xfrm>
+          <a:prstGeom prst="rect">
+            <a:avLst/>
+          </a:prstGeom>
+          <a:noFill/>
+          <a:ln/>
+        </p:spPr>
+        <p:txBody>
+          <a:bodyPr wrap="square" lIns="25400" tIns="25400" rIns="25400" bIns="25400" rtlCol="0" anchor="t">
+            <a:normAutofit/>
+          </a:bodyPr>
+          <a:lstStyle/>
+          <a:p>
+            <a:pPr marL="0" indent="0" algn="l">
               <a:lnSpc>
                 <a:spcPct val="121935"/>
               </a:lnSpc>
               <a:buNone/>
             </a:pPr>
             <a:r>
-              <a:rPr lang="en-US" sz="2025" dirty="0">
-                <a:solidFill>
-                  <a:srgbClr val="FFFFFF"/>
+              <a:rPr lang="en-US" sz="2025" b="1" dirty="0">
+                <a:solidFill>
+                  <a:srgbClr val="FD7EF5"/>
                 </a:solidFill>
                 <a:latin typeface="Arial" pitchFamily="34" charset="0"/>
                 <a:ea typeface="Arial" pitchFamily="34" charset="-122"/>
                 <a:cs typeface="Arial" pitchFamily="34" charset="-120"/>
               </a:rPr>
-              <a:t>— does anything trust the </a:t>
-            </a:r>
-            <a:pPr algn="l" indent="0" marL="0">
+              <a:t>the allowlist is empty by default </a:t>
+            </a:r>
+            <a:r>
+              <a:rPr lang="en-US" sz="2025" dirty="0">
+                <a:solidFill>
+                  <a:srgbClr val="FFFFFF"/>
+                </a:solidFill>
+                <a:latin typeface="Arial" pitchFamily="34" charset="0"/>
+                <a:ea typeface="Arial" pitchFamily="34" charset="-122"/>
+                <a:cs typeface="Arial" pitchFamily="34" charset="-120"/>
+              </a:rPr>
+              <a:t>(</a:t>
+            </a:r>
+            <a:r>
+              <a:rPr lang="en-US" sz="2025" dirty="0">
+                <a:solidFill>
+                  <a:srgbClr val="FFFFFF"/>
+                </a:solidFill>
+                <a:latin typeface="Courier New" pitchFamily="34" charset="0"/>
+                <a:ea typeface="Courier New" pitchFamily="34" charset="-122"/>
+                <a:cs typeface="Courier New" pitchFamily="34" charset="-120"/>
+              </a:rPr>
+              <a:t>ALLOWED_HASHES = set()</a:t>
+            </a:r>
+            <a:r>
+              <a:rPr lang="en-US" sz="2025" dirty="0">
+                <a:solidFill>
+                  <a:srgbClr val="FFFFFF"/>
+                </a:solidFill>
+                <a:latin typeface="Arial" pitchFamily="34" charset="0"/>
+                <a:ea typeface="Arial" pitchFamily="34" charset="-122"/>
+                <a:cs typeface="Arial" pitchFamily="34" charset="-120"/>
+              </a:rPr>
+              <a:t>) — who populates it, and how do they verify a hash is legitimate?</a:t>
+            </a:r>
+            <a:endParaRPr lang="en-US" sz="2025" dirty="0"/>
+          </a:p>
+        </p:txBody>
+      </p:sp>
+      <p:sp>
+        <p:nvSpPr>
+          <p:cNvPr id="8" name="Text 6"/>
+          <p:cNvSpPr/>
+          <p:nvPr/>
+        </p:nvSpPr>
+        <p:spPr>
+          <a:xfrm>
+            <a:off x="990600" y="5776392"/>
+            <a:ext cx="202406" cy="352425"/>
+          </a:xfrm>
+          <a:prstGeom prst="rect">
+            <a:avLst/>
+          </a:prstGeom>
+          <a:noFill/>
+          <a:ln/>
+        </p:spPr>
+        <p:txBody>
+          <a:bodyPr wrap="square" lIns="25400" tIns="25400" rIns="25400" bIns="25400" rtlCol="0" anchor="t">
+            <a:normAutofit/>
+          </a:bodyPr>
+          <a:lstStyle/>
+          <a:p>
+            <a:pPr marL="0" indent="0" algn="l">
+              <a:lnSpc>
+                <a:spcPct val="132000"/>
+              </a:lnSpc>
+              <a:buNone/>
+            </a:pPr>
+            <a:r>
+              <a:rPr lang="en-US" sz="1650" dirty="0">
+                <a:solidFill>
+                  <a:srgbClr val="FD7EF5"/>
+                </a:solidFill>
+                <a:latin typeface="Courier New" pitchFamily="34" charset="0"/>
+                <a:ea typeface="Courier New" pitchFamily="34" charset="-122"/>
+                <a:cs typeface="Courier New" pitchFamily="34" charset="-120"/>
+              </a:rPr>
+              <a:t>▸</a:t>
+            </a:r>
+            <a:endParaRPr lang="en-US" sz="1650" dirty="0"/>
+          </a:p>
+        </p:txBody>
+      </p:sp>
+      <p:sp>
+        <p:nvSpPr>
+          <p:cNvPr id="9" name="Text 7"/>
+          <p:cNvSpPr/>
+          <p:nvPr/>
+        </p:nvSpPr>
+        <p:spPr>
+          <a:xfrm>
+            <a:off x="1307306" y="5776392"/>
+            <a:ext cx="7059789" cy="402878"/>
+          </a:xfrm>
+          <a:prstGeom prst="rect">
+            <a:avLst/>
+          </a:prstGeom>
+          <a:noFill/>
+          <a:ln/>
+        </p:spPr>
+        <p:txBody>
+          <a:bodyPr wrap="square" lIns="25400" tIns="25400" rIns="25400" bIns="25400" rtlCol="0" anchor="t">
+            <a:normAutofit/>
+          </a:bodyPr>
+          <a:lstStyle/>
+          <a:p>
+            <a:pPr marL="0" indent="0" algn="l">
               <a:lnSpc>
                 <a:spcPct val="121935"/>
               </a:lnSpc>
               <a:buNone/>
             </a:pPr>
             <a:r>
-              <a:rPr lang="en-US" sz="2025" i="1" dirty="0">
-                <a:solidFill>
-                  <a:srgbClr val="FFFFFF"/>
+              <a:rPr lang="en-US" sz="2025" b="1" dirty="0">
+                <a:solidFill>
+                  <a:srgbClr val="FD7EF5"/>
                 </a:solidFill>
                 <a:latin typeface="Arial" pitchFamily="34" charset="0"/>
                 <a:ea typeface="Arial" pitchFamily="34" charset="-122"/>
                 <a:cs typeface="Arial" pitchFamily="34" charset="-120"/>
               </a:rPr>
-              <a:t>extension </a:t>
-            </a:r>
-            <a:pPr algn="l" indent="0" marL="0">
+              <a:t>TOCTOU </a:t>
+            </a:r>
+            <a:r>
+              <a:rPr lang="en-US" sz="2025" dirty="0">
+                <a:solidFill>
+                  <a:srgbClr val="FFFFFF"/>
+                </a:solidFill>
+                <a:latin typeface="Arial" pitchFamily="34" charset="0"/>
+                <a:ea typeface="Arial" pitchFamily="34" charset="-122"/>
+                <a:cs typeface="Arial" pitchFamily="34" charset="-120"/>
+              </a:rPr>
+              <a:t>— hash checked, then the file re-read from disk</a:t>
+            </a:r>
+            <a:endParaRPr lang="en-US" sz="2025" dirty="0"/>
+          </a:p>
+        </p:txBody>
+      </p:sp>
+      <p:sp>
+        <p:nvSpPr>
+          <p:cNvPr id="10" name="Text 8"/>
+          <p:cNvSpPr/>
+          <p:nvPr/>
+        </p:nvSpPr>
+        <p:spPr>
+          <a:xfrm>
+            <a:off x="990600" y="6388819"/>
+            <a:ext cx="202406" cy="352425"/>
+          </a:xfrm>
+          <a:prstGeom prst="rect">
+            <a:avLst/>
+          </a:prstGeom>
+          <a:noFill/>
+          <a:ln/>
+        </p:spPr>
+        <p:txBody>
+          <a:bodyPr wrap="square" lIns="25400" tIns="25400" rIns="25400" bIns="25400" rtlCol="0" anchor="t">
+            <a:normAutofit/>
+          </a:bodyPr>
+          <a:lstStyle/>
+          <a:p>
+            <a:pPr marL="0" indent="0" algn="l">
+              <a:lnSpc>
+                <a:spcPct val="132000"/>
+              </a:lnSpc>
+              <a:buNone/>
+            </a:pPr>
+            <a:r>
+              <a:rPr lang="en-US" sz="1650" dirty="0">
+                <a:solidFill>
+                  <a:srgbClr val="FD7EF5"/>
+                </a:solidFill>
+                <a:latin typeface="Courier New" pitchFamily="34" charset="0"/>
+                <a:ea typeface="Courier New" pitchFamily="34" charset="-122"/>
+                <a:cs typeface="Courier New" pitchFamily="34" charset="-120"/>
+              </a:rPr>
+              <a:t>▸</a:t>
+            </a:r>
+            <a:endParaRPr lang="en-US" sz="1650" dirty="0"/>
+          </a:p>
+        </p:txBody>
+      </p:sp>
+      <p:sp>
+        <p:nvSpPr>
+          <p:cNvPr id="11" name="Text 9"/>
+          <p:cNvSpPr/>
+          <p:nvPr/>
+        </p:nvSpPr>
+        <p:spPr>
+          <a:xfrm>
+            <a:off x="1307306" y="6388819"/>
+            <a:ext cx="14756986" cy="407640"/>
+          </a:xfrm>
+          <a:prstGeom prst="rect">
+            <a:avLst/>
+          </a:prstGeom>
+          <a:noFill/>
+          <a:ln/>
+        </p:spPr>
+        <p:txBody>
+          <a:bodyPr wrap="square" lIns="25400" tIns="25400" rIns="25400" bIns="25400" rtlCol="0" anchor="t">
+            <a:normAutofit/>
+          </a:bodyPr>
+          <a:lstStyle/>
+          <a:p>
+            <a:pPr marL="0" indent="0" algn="l">
               <a:lnSpc>
                 <a:spcPct val="121935"/>
               </a:lnSpc>
               <a:buNone/>
             </a:pPr>
             <a:r>
-              <a:rPr lang="en-US" sz="2025" dirty="0">
-                <a:solidFill>
-                  <a:srgbClr val="FFFFFF"/>
+              <a:rPr lang="en-US" sz="2025" b="1" dirty="0">
+                <a:solidFill>
+                  <a:srgbClr val="FD7EF5"/>
                 </a:solidFill>
                 <a:latin typeface="Arial" pitchFamily="34" charset="0"/>
                 <a:ea typeface="Arial" pitchFamily="34" charset="-122"/>
                 <a:cs typeface="Arial" pitchFamily="34" charset="-120"/>
               </a:rPr>
-              <a:t>rather than the </a:t>
-            </a:r>
-            <a:pPr algn="l" indent="0" marL="0">
-              <a:lnSpc>
-                <a:spcPct val="121935"/>
-              </a:lnSpc>
-              <a:buNone/>
-            </a:pPr>
-            <a:r>
-              <a:rPr lang="en-US" sz="2025" i="1" dirty="0">
+              <a:t>attack a different link </a:t>
+            </a:r>
+            <a:r>
+              <a:rPr lang="en-US" sz="2025" dirty="0">
                 <a:solidFill>
                   <a:srgbClr val="FFFFFF"/>
                 </a:solidFill>
@@ -8205,14 +7726,19 @@
                 <a:ea typeface="Arial" pitchFamily="34" charset="-122"/>
                 <a:cs typeface="Arial" pitchFamily="34" charset="-120"/>
               </a:rPr>
-              <a:t>content</a:t>
-            </a:r>
-            <a:pPr algn="l" indent="0" marL="0">
-              <a:lnSpc>
-                <a:spcPct val="121935"/>
-              </a:lnSpc>
-              <a:buNone/>
-            </a:pPr>
+              <a:t>— the tokenizer, config, </a:t>
+            </a:r>
+            <a:r>
+              <a:rPr lang="en-US" sz="2025" dirty="0">
+                <a:solidFill>
+                  <a:srgbClr val="FFFFFF"/>
+                </a:solidFill>
+                <a:latin typeface="Courier New" pitchFamily="34" charset="0"/>
+                <a:ea typeface="Courier New" pitchFamily="34" charset="-122"/>
+                <a:cs typeface="Courier New" pitchFamily="34" charset="-120"/>
+              </a:rPr>
+              <a:t>trust_remote_code=True</a:t>
+            </a:r>
             <a:r>
               <a:rPr lang="en-US" sz="2025" dirty="0">
                 <a:solidFill>
@@ -8222,389 +7748,6 @@
                 <a:ea typeface="Arial" pitchFamily="34" charset="-122"/>
                 <a:cs typeface="Arial" pitchFamily="34" charset="-120"/>
               </a:rPr>
-              <a:t>?</a:t>
-            </a:r>
-            <a:endParaRPr lang="en-US" sz="2025" dirty="0"/>
-          </a:p>
-        </p:txBody>
-      </p:sp>
-      <p:sp>
-        <p:nvSpPr>
-          <p:cNvPr id="6" name="Text 4"/>
-          <p:cNvSpPr/>
-          <p:nvPr/>
-        </p:nvSpPr>
-        <p:spPr>
-          <a:xfrm>
-            <a:off x="990600" y="5159201"/>
-            <a:ext cx="202406" cy="352425"/>
-          </a:xfrm>
-          <a:prstGeom prst="rect">
-            <a:avLst/>
-          </a:prstGeom>
-          <a:noFill/>
-          <a:ln/>
-        </p:spPr>
-        <p:txBody>
-          <a:bodyPr wrap="square" lIns="25400" tIns="25400" rIns="25400" bIns="25400" rtlCol="0" anchor="t">
-            <a:normAutofit/>
-          </a:bodyPr>
-          <a:lstStyle/>
-          <a:p>
-            <a:pPr algn="l" indent="0" marL="0">
-              <a:lnSpc>
-                <a:spcPct val="132000"/>
-              </a:lnSpc>
-              <a:buNone/>
-            </a:pPr>
-            <a:r>
-              <a:rPr lang="en-US" sz="1650" dirty="0">
-                <a:solidFill>
-                  <a:srgbClr val="FD7EF5"/>
-                </a:solidFill>
-                <a:latin typeface="Courier New" pitchFamily="34" charset="0"/>
-                <a:ea typeface="Courier New" pitchFamily="34" charset="-122"/>
-                <a:cs typeface="Courier New" pitchFamily="34" charset="-120"/>
-              </a:rPr>
-              <a:t>▸</a:t>
-            </a:r>
-            <a:endParaRPr lang="en-US" sz="1650" dirty="0"/>
-          </a:p>
-        </p:txBody>
-      </p:sp>
-      <p:sp>
-        <p:nvSpPr>
-          <p:cNvPr id="7" name="Text 5"/>
-          <p:cNvSpPr/>
-          <p:nvPr/>
-        </p:nvSpPr>
-        <p:spPr>
-          <a:xfrm>
-            <a:off x="1307306" y="5159201"/>
-            <a:ext cx="15840179" cy="407640"/>
-          </a:xfrm>
-          <a:prstGeom prst="rect">
-            <a:avLst/>
-          </a:prstGeom>
-          <a:noFill/>
-          <a:ln/>
-        </p:spPr>
-        <p:txBody>
-          <a:bodyPr wrap="square" lIns="25400" tIns="25400" rIns="25400" bIns="25400" rtlCol="0" anchor="t">
-            <a:normAutofit/>
-          </a:bodyPr>
-          <a:lstStyle/>
-          <a:p>
-            <a:pPr algn="l" indent="0" marL="0">
-              <a:lnSpc>
-                <a:spcPct val="121935"/>
-              </a:lnSpc>
-              <a:buNone/>
-            </a:pPr>
-            <a:r>
-              <a:rPr lang="en-US" sz="2025" b="1" dirty="0">
-                <a:solidFill>
-                  <a:srgbClr val="FD7EF5"/>
-                </a:solidFill>
-                <a:latin typeface="Arial" pitchFamily="34" charset="0"/>
-                <a:ea typeface="Arial" pitchFamily="34" charset="-122"/>
-                <a:cs typeface="Arial" pitchFamily="34" charset="-120"/>
-              </a:rPr>
-              <a:t>the allowlist is empty by default </a:t>
-            </a:r>
-            <a:pPr algn="l" indent="0" marL="0">
-              <a:lnSpc>
-                <a:spcPct val="121935"/>
-              </a:lnSpc>
-              <a:buNone/>
-            </a:pPr>
-            <a:r>
-              <a:rPr lang="en-US" sz="2025" dirty="0">
-                <a:solidFill>
-                  <a:srgbClr val="FFFFFF"/>
-                </a:solidFill>
-                <a:latin typeface="Arial" pitchFamily="34" charset="0"/>
-                <a:ea typeface="Arial" pitchFamily="34" charset="-122"/>
-                <a:cs typeface="Arial" pitchFamily="34" charset="-120"/>
-              </a:rPr>
-              <a:t>(</a:t>
-            </a:r>
-            <a:pPr algn="l" indent="0" marL="0">
-              <a:lnSpc>
-                <a:spcPct val="121935"/>
-              </a:lnSpc>
-              <a:buNone/>
-            </a:pPr>
-            <a:r>
-              <a:rPr lang="en-US" sz="2025" dirty="0">
-                <a:solidFill>
-                  <a:srgbClr val="FFFFFF"/>
-                </a:solidFill>
-                <a:latin typeface="Courier New" pitchFamily="34" charset="0"/>
-                <a:ea typeface="Courier New" pitchFamily="34" charset="-122"/>
-                <a:cs typeface="Courier New" pitchFamily="34" charset="-120"/>
-              </a:rPr>
-              <a:t>ALLOWED_HASHES = set()</a:t>
-            </a:r>
-            <a:pPr algn="l" indent="0" marL="0">
-              <a:lnSpc>
-                <a:spcPct val="121935"/>
-              </a:lnSpc>
-              <a:buNone/>
-            </a:pPr>
-            <a:r>
-              <a:rPr lang="en-US" sz="2025" dirty="0">
-                <a:solidFill>
-                  <a:srgbClr val="FFFFFF"/>
-                </a:solidFill>
-                <a:latin typeface="Arial" pitchFamily="34" charset="0"/>
-                <a:ea typeface="Arial" pitchFamily="34" charset="-122"/>
-                <a:cs typeface="Arial" pitchFamily="34" charset="-120"/>
-              </a:rPr>
-              <a:t>) — who populates it, and how do they verify a hash is legitimate?</a:t>
-            </a:r>
-            <a:endParaRPr lang="en-US" sz="2025" dirty="0"/>
-          </a:p>
-        </p:txBody>
-      </p:sp>
-      <p:sp>
-        <p:nvSpPr>
-          <p:cNvPr id="8" name="Text 6"/>
-          <p:cNvSpPr/>
-          <p:nvPr/>
-        </p:nvSpPr>
-        <p:spPr>
-          <a:xfrm>
-            <a:off x="990600" y="5776392"/>
-            <a:ext cx="202406" cy="352425"/>
-          </a:xfrm>
-          <a:prstGeom prst="rect">
-            <a:avLst/>
-          </a:prstGeom>
-          <a:noFill/>
-          <a:ln/>
-        </p:spPr>
-        <p:txBody>
-          <a:bodyPr wrap="square" lIns="25400" tIns="25400" rIns="25400" bIns="25400" rtlCol="0" anchor="t">
-            <a:normAutofit/>
-          </a:bodyPr>
-          <a:lstStyle/>
-          <a:p>
-            <a:pPr algn="l" indent="0" marL="0">
-              <a:lnSpc>
-                <a:spcPct val="132000"/>
-              </a:lnSpc>
-              <a:buNone/>
-            </a:pPr>
-            <a:r>
-              <a:rPr lang="en-US" sz="1650" dirty="0">
-                <a:solidFill>
-                  <a:srgbClr val="FD7EF5"/>
-                </a:solidFill>
-                <a:latin typeface="Courier New" pitchFamily="34" charset="0"/>
-                <a:ea typeface="Courier New" pitchFamily="34" charset="-122"/>
-                <a:cs typeface="Courier New" pitchFamily="34" charset="-120"/>
-              </a:rPr>
-              <a:t>▸</a:t>
-            </a:r>
-            <a:endParaRPr lang="en-US" sz="1650" dirty="0"/>
-          </a:p>
-        </p:txBody>
-      </p:sp>
-      <p:sp>
-        <p:nvSpPr>
-          <p:cNvPr id="9" name="Text 7"/>
-          <p:cNvSpPr/>
-          <p:nvPr/>
-        </p:nvSpPr>
-        <p:spPr>
-          <a:xfrm>
-            <a:off x="1307306" y="5776392"/>
-            <a:ext cx="7059789" cy="402878"/>
-          </a:xfrm>
-          <a:prstGeom prst="rect">
-            <a:avLst/>
-          </a:prstGeom>
-          <a:noFill/>
-          <a:ln/>
-        </p:spPr>
-        <p:txBody>
-          <a:bodyPr wrap="square" lIns="25400" tIns="25400" rIns="25400" bIns="25400" rtlCol="0" anchor="t">
-            <a:normAutofit/>
-          </a:bodyPr>
-          <a:lstStyle/>
-          <a:p>
-            <a:pPr algn="l" indent="0" marL="0">
-              <a:lnSpc>
-                <a:spcPct val="121935"/>
-              </a:lnSpc>
-              <a:buNone/>
-            </a:pPr>
-            <a:r>
-              <a:rPr lang="en-US" sz="2025" b="1" dirty="0">
-                <a:solidFill>
-                  <a:srgbClr val="FD7EF5"/>
-                </a:solidFill>
-                <a:latin typeface="Arial" pitchFamily="34" charset="0"/>
-                <a:ea typeface="Arial" pitchFamily="34" charset="-122"/>
-                <a:cs typeface="Arial" pitchFamily="34" charset="-120"/>
-              </a:rPr>
-              <a:t>TOCTOU </a:t>
-            </a:r>
-            <a:pPr algn="l" indent="0" marL="0">
-              <a:lnSpc>
-                <a:spcPct val="121935"/>
-              </a:lnSpc>
-              <a:buNone/>
-            </a:pPr>
-            <a:r>
-              <a:rPr lang="en-US" sz="2025" dirty="0">
-                <a:solidFill>
-                  <a:srgbClr val="FFFFFF"/>
-                </a:solidFill>
-                <a:latin typeface="Arial" pitchFamily="34" charset="0"/>
-                <a:ea typeface="Arial" pitchFamily="34" charset="-122"/>
-                <a:cs typeface="Arial" pitchFamily="34" charset="-120"/>
-              </a:rPr>
-              <a:t>— hash checked, then the file re-read from disk</a:t>
-            </a:r>
-            <a:endParaRPr lang="en-US" sz="2025" dirty="0"/>
-          </a:p>
-        </p:txBody>
-      </p:sp>
-      <p:sp>
-        <p:nvSpPr>
-          <p:cNvPr id="10" name="Text 8"/>
-          <p:cNvSpPr/>
-          <p:nvPr/>
-        </p:nvSpPr>
-        <p:spPr>
-          <a:xfrm>
-            <a:off x="990600" y="6388819"/>
-            <a:ext cx="202406" cy="352425"/>
-          </a:xfrm>
-          <a:prstGeom prst="rect">
-            <a:avLst/>
-          </a:prstGeom>
-          <a:noFill/>
-          <a:ln/>
-        </p:spPr>
-        <p:txBody>
-          <a:bodyPr wrap="square" lIns="25400" tIns="25400" rIns="25400" bIns="25400" rtlCol="0" anchor="t">
-            <a:normAutofit/>
-          </a:bodyPr>
-          <a:lstStyle/>
-          <a:p>
-            <a:pPr algn="l" indent="0" marL="0">
-              <a:lnSpc>
-                <a:spcPct val="132000"/>
-              </a:lnSpc>
-              <a:buNone/>
-            </a:pPr>
-            <a:r>
-              <a:rPr lang="en-US" sz="1650" dirty="0">
-                <a:solidFill>
-                  <a:srgbClr val="FD7EF5"/>
-                </a:solidFill>
-                <a:latin typeface="Courier New" pitchFamily="34" charset="0"/>
-                <a:ea typeface="Courier New" pitchFamily="34" charset="-122"/>
-                <a:cs typeface="Courier New" pitchFamily="34" charset="-120"/>
-              </a:rPr>
-              <a:t>▸</a:t>
-            </a:r>
-            <a:endParaRPr lang="en-US" sz="1650" dirty="0"/>
-          </a:p>
-        </p:txBody>
-      </p:sp>
-      <p:sp>
-        <p:nvSpPr>
-          <p:cNvPr id="11" name="Text 9"/>
-          <p:cNvSpPr/>
-          <p:nvPr/>
-        </p:nvSpPr>
-        <p:spPr>
-          <a:xfrm>
-            <a:off x="1307306" y="6388819"/>
-            <a:ext cx="14756986" cy="407640"/>
-          </a:xfrm>
-          <a:prstGeom prst="rect">
-            <a:avLst/>
-          </a:prstGeom>
-          <a:noFill/>
-          <a:ln/>
-        </p:spPr>
-        <p:txBody>
-          <a:bodyPr wrap="square" lIns="25400" tIns="25400" rIns="25400" bIns="25400" rtlCol="0" anchor="t">
-            <a:normAutofit/>
-          </a:bodyPr>
-          <a:lstStyle/>
-          <a:p>
-            <a:pPr algn="l" indent="0" marL="0">
-              <a:lnSpc>
-                <a:spcPct val="121935"/>
-              </a:lnSpc>
-              <a:buNone/>
-            </a:pPr>
-            <a:r>
-              <a:rPr lang="en-US" sz="2025" b="1" dirty="0">
-                <a:solidFill>
-                  <a:srgbClr val="FD7EF5"/>
-                </a:solidFill>
-                <a:latin typeface="Arial" pitchFamily="34" charset="0"/>
-                <a:ea typeface="Arial" pitchFamily="34" charset="-122"/>
-                <a:cs typeface="Arial" pitchFamily="34" charset="-120"/>
-              </a:rPr>
-              <a:t>attack a different link </a:t>
-            </a:r>
-            <a:pPr algn="l" indent="0" marL="0">
-              <a:lnSpc>
-                <a:spcPct val="121935"/>
-              </a:lnSpc>
-              <a:buNone/>
-            </a:pPr>
-            <a:r>
-              <a:rPr lang="en-US" sz="2025" dirty="0">
-                <a:solidFill>
-                  <a:srgbClr val="FFFFFF"/>
-                </a:solidFill>
-                <a:latin typeface="Arial" pitchFamily="34" charset="0"/>
-                <a:ea typeface="Arial" pitchFamily="34" charset="-122"/>
-                <a:cs typeface="Arial" pitchFamily="34" charset="-120"/>
-              </a:rPr>
-              <a:t>— the tokenizer, config, </a:t>
-            </a:r>
-            <a:pPr algn="l" indent="0" marL="0">
-              <a:lnSpc>
-                <a:spcPct val="121935"/>
-              </a:lnSpc>
-              <a:buNone/>
-            </a:pPr>
-            <a:r>
-              <a:rPr lang="en-US" sz="2025" dirty="0">
-                <a:solidFill>
-                  <a:srgbClr val="FFFFFF"/>
-                </a:solidFill>
-                <a:latin typeface="Courier New" pitchFamily="34" charset="0"/>
-                <a:ea typeface="Courier New" pitchFamily="34" charset="-122"/>
-                <a:cs typeface="Courier New" pitchFamily="34" charset="-120"/>
-              </a:rPr>
-              <a:t>trust_remote_code=True</a:t>
-            </a:r>
-            <a:pPr algn="l" indent="0" marL="0">
-              <a:lnSpc>
-                <a:spcPct val="121935"/>
-              </a:lnSpc>
-              <a:buNone/>
-            </a:pPr>
-            <a:r>
-              <a:rPr lang="en-US" sz="2025" dirty="0">
-                <a:solidFill>
-                  <a:srgbClr val="FFFFFF"/>
-                </a:solidFill>
-                <a:latin typeface="Arial" pitchFamily="34" charset="0"/>
-                <a:ea typeface="Arial" pitchFamily="34" charset="-122"/>
-                <a:cs typeface="Arial" pitchFamily="34" charset="-120"/>
-              </a:rPr>
               <a:t>, or a pip dependency instead of the weights</a:t>
             </a:r>
             <a:endParaRPr lang="en-US" sz="2025" dirty="0"/>
@@ -8613,14 +7756,14 @@
       </p:sp>
       <p:pic>
         <p:nvPicPr>
-          <p:cNvPr id="12" name="Image 0" descr="preencoded.png">    </p:cNvPr>
+          <p:cNvPr id="12" name="Image 0" descr="preencoded.png"/>
           <p:cNvPicPr>
             <a:picLocks noChangeAspect="1"/>
           </p:cNvPicPr>
           <p:nvPr/>
         </p:nvPicPr>
         <p:blipFill>
-          <a:blip r:embed="rId1"/>
+          <a:blip r:embed="rId3"/>
           <a:stretch>
             <a:fillRect/>
           </a:stretch>
@@ -8658,11 +7801,11 @@
           </a:bodyPr>
           <a:lstStyle/>
           <a:p>
-            <a:pPr algn="l" indent="0" marL="0">
-              <a:buNone/>
-            </a:pPr>
-            <a:r>
-              <a:rPr lang="en-US" sz="1200" spc="264" kern="0" dirty="0">
+            <a:pPr marL="0" indent="0" algn="l">
+              <a:buNone/>
+            </a:pPr>
+            <a:r>
+              <a:rPr lang="en-US" sz="1200" kern="0" spc="264" dirty="0">
                 <a:solidFill>
                   <a:srgbClr val="969696"/>
                 </a:solidFill>
@@ -8692,6 +7835,7 @@
         <a:solidFill>
           <a:srgbClr val="000000"/>
         </a:solidFill>
+        <a:effectLst/>
       </p:bgPr>
     </p:bg>
     <p:spTree>
@@ -8731,11 +7875,11 @@
           </a:bodyPr>
           <a:lstStyle/>
           <a:p>
-            <a:pPr algn="l" indent="0" marL="0">
-              <a:buNone/>
-            </a:pPr>
-            <a:r>
-              <a:rPr lang="en-US" sz="1500" spc="450" kern="0" dirty="0">
+            <a:pPr marL="0" indent="0" algn="l">
+              <a:buNone/>
+            </a:pPr>
+            <a:r>
+              <a:rPr lang="en-US" sz="1500" kern="0" spc="450" dirty="0">
                 <a:solidFill>
                   <a:srgbClr val="36CDFF"/>
                 </a:solidFill>
@@ -8772,7 +7916,7 @@
           </a:bodyPr>
           <a:lstStyle/>
           <a:p>
-            <a:pPr algn="l" indent="0" marL="0">
+            <a:pPr marL="0" indent="0" algn="l">
               <a:lnSpc>
                 <a:spcPct val="78416"/>
               </a:lnSpc>
@@ -8814,6 +7958,13 @@
           </a:solidFill>
           <a:ln/>
         </p:spPr>
+        <p:txBody>
+          <a:bodyPr/>
+          <a:lstStyle/>
+          <a:p>
+            <a:endParaRPr lang="en-US"/>
+          </a:p>
+        </p:txBody>
       </p:sp>
       <p:sp>
         <p:nvSpPr>
@@ -8838,11 +7989,11 @@
           </a:bodyPr>
           <a:lstStyle/>
           <a:p>
-            <a:pPr algn="l" indent="0" marL="0">
-              <a:buNone/>
-            </a:pPr>
-            <a:r>
-              <a:rPr lang="en-US" sz="1350" spc="135" kern="0" dirty="0">
+            <a:pPr marL="0" indent="0" algn="l">
+              <a:buNone/>
+            </a:pPr>
+            <a:r>
+              <a:rPr lang="en-US" sz="1350" kern="0" spc="135" dirty="0">
                 <a:solidFill>
                   <a:srgbClr val="969696"/>
                 </a:solidFill>
@@ -8879,11 +8030,11 @@
           </a:bodyPr>
           <a:lstStyle/>
           <a:p>
-            <a:pPr algn="l" indent="0" marL="0">
-              <a:buNone/>
-            </a:pPr>
-            <a:r>
-              <a:rPr lang="en-US" sz="1350" spc="135" kern="0" dirty="0">
+            <a:pPr marL="0" indent="0" algn="l">
+              <a:buNone/>
+            </a:pPr>
+            <a:r>
+              <a:rPr lang="en-US" sz="1350" kern="0" spc="135" dirty="0">
                 <a:solidFill>
                   <a:srgbClr val="36CDFF"/>
                 </a:solidFill>
@@ -8918,6 +8069,13 @@
           </a:solidFill>
           <a:ln/>
         </p:spPr>
+        <p:txBody>
+          <a:bodyPr/>
+          <a:lstStyle/>
+          <a:p>
+            <a:endParaRPr lang="en-US"/>
+          </a:p>
+        </p:txBody>
       </p:sp>
       <p:sp>
         <p:nvSpPr>
@@ -8940,6 +8098,13 @@
           </a:solidFill>
           <a:ln/>
         </p:spPr>
+        <p:txBody>
+          <a:bodyPr/>
+          <a:lstStyle/>
+          <a:p>
+            <a:endParaRPr lang="en-US"/>
+          </a:p>
+        </p:txBody>
       </p:sp>
       <p:sp>
         <p:nvSpPr>
@@ -8964,7 +8129,7 @@
           </a:bodyPr>
           <a:lstStyle/>
           <a:p>
-            <a:pPr algn="l" indent="0" marL="0">
+            <a:pPr marL="0" indent="0" algn="l">
               <a:lnSpc>
                 <a:spcPct val="116379"/>
               </a:lnSpc>
@@ -9006,6 +8171,13 @@
           </a:solidFill>
           <a:ln/>
         </p:spPr>
+        <p:txBody>
+          <a:bodyPr/>
+          <a:lstStyle/>
+          <a:p>
+            <a:endParaRPr lang="en-US"/>
+          </a:p>
+        </p:txBody>
       </p:sp>
       <p:sp>
         <p:nvSpPr>
@@ -9028,6 +8200,13 @@
           </a:solidFill>
           <a:ln/>
         </p:spPr>
+        <p:txBody>
+          <a:bodyPr/>
+          <a:lstStyle/>
+          <a:p>
+            <a:endParaRPr lang="en-US"/>
+          </a:p>
+        </p:txBody>
       </p:sp>
       <p:sp>
         <p:nvSpPr>
@@ -9052,7 +8231,7 @@
           </a:bodyPr>
           <a:lstStyle/>
           <a:p>
-            <a:pPr algn="l" indent="0" marL="0">
+            <a:pPr marL="0" indent="0" algn="l">
               <a:lnSpc>
                 <a:spcPct val="116379"/>
               </a:lnSpc>
@@ -9069,12 +8248,6 @@
               </a:rPr>
               <a:t>strong </a:t>
             </a:r>
-            <a:pPr algn="l" indent="0" marL="0">
-              <a:lnSpc>
-                <a:spcPct val="116379"/>
-              </a:lnSpc>
-              <a:buNone/>
-            </a:pPr>
             <a:r>
               <a:rPr lang="en-US" sz="1875" dirty="0">
                 <a:solidFill>
@@ -9114,6 +8287,13 @@
           </a:solidFill>
           <a:ln/>
         </p:spPr>
+        <p:txBody>
+          <a:bodyPr/>
+          <a:lstStyle/>
+          <a:p>
+            <a:endParaRPr lang="en-US"/>
+          </a:p>
+        </p:txBody>
       </p:sp>
       <p:sp>
         <p:nvSpPr>
@@ -9136,6 +8316,13 @@
           </a:solidFill>
           <a:ln/>
         </p:spPr>
+        <p:txBody>
+          <a:bodyPr/>
+          <a:lstStyle/>
+          <a:p>
+            <a:endParaRPr lang="en-US"/>
+          </a:p>
+        </p:txBody>
       </p:sp>
       <p:sp>
         <p:nvSpPr>
@@ -9160,7 +8347,7 @@
           </a:bodyPr>
           <a:lstStyle/>
           <a:p>
-            <a:pPr algn="l" indent="0" marL="0">
+            <a:pPr marL="0" indent="0" algn="l">
               <a:lnSpc>
                 <a:spcPct val="116379"/>
               </a:lnSpc>
@@ -9202,6 +8389,13 @@
           </a:solidFill>
           <a:ln/>
         </p:spPr>
+        <p:txBody>
+          <a:bodyPr/>
+          <a:lstStyle/>
+          <a:p>
+            <a:endParaRPr lang="en-US"/>
+          </a:p>
+        </p:txBody>
       </p:sp>
       <p:sp>
         <p:nvSpPr>
@@ -9224,6 +8418,13 @@
           </a:solidFill>
           <a:ln/>
         </p:spPr>
+        <p:txBody>
+          <a:bodyPr/>
+          <a:lstStyle/>
+          <a:p>
+            <a:endParaRPr lang="en-US"/>
+          </a:p>
+        </p:txBody>
       </p:sp>
       <p:sp>
         <p:nvSpPr>
@@ -9248,7 +8449,7 @@
           </a:bodyPr>
           <a:lstStyle/>
           <a:p>
-            <a:pPr algn="l" indent="0" marL="0">
+            <a:pPr marL="0" indent="0" algn="l">
               <a:lnSpc>
                 <a:spcPct val="116379"/>
               </a:lnSpc>
@@ -9265,12 +8466,6 @@
               </a:rPr>
               <a:t>strong </a:t>
             </a:r>
-            <a:pPr algn="l" indent="0" marL="0">
-              <a:lnSpc>
-                <a:spcPct val="116379"/>
-              </a:lnSpc>
-              <a:buNone/>
-            </a:pPr>
             <a:r>
               <a:rPr lang="en-US" sz="1875" dirty="0">
                 <a:solidFill>
@@ -9310,6 +8505,13 @@
           </a:solidFill>
           <a:ln/>
         </p:spPr>
+        <p:txBody>
+          <a:bodyPr/>
+          <a:lstStyle/>
+          <a:p>
+            <a:endParaRPr lang="en-US"/>
+          </a:p>
+        </p:txBody>
       </p:sp>
       <p:sp>
         <p:nvSpPr>
@@ -9334,7 +8536,7 @@
           </a:bodyPr>
           <a:lstStyle/>
           <a:p>
-            <a:pPr algn="l" indent="0" marL="0">
+            <a:pPr marL="0" indent="0" algn="l">
               <a:lnSpc>
                 <a:spcPct val="116379"/>
               </a:lnSpc>
@@ -9376,6 +8578,13 @@
           </a:solidFill>
           <a:ln/>
         </p:spPr>
+        <p:txBody>
+          <a:bodyPr/>
+          <a:lstStyle/>
+          <a:p>
+            <a:endParaRPr lang="en-US"/>
+          </a:p>
+        </p:txBody>
       </p:sp>
       <p:sp>
         <p:nvSpPr>
@@ -9400,7 +8609,7 @@
           </a:bodyPr>
           <a:lstStyle/>
           <a:p>
-            <a:pPr algn="l" indent="0" marL="0">
+            <a:pPr marL="0" indent="0" algn="l">
               <a:lnSpc>
                 <a:spcPct val="116379"/>
               </a:lnSpc>
@@ -9442,6 +8651,13 @@
           </a:solidFill>
           <a:ln/>
         </p:spPr>
+        <p:txBody>
+          <a:bodyPr/>
+          <a:lstStyle/>
+          <a:p>
+            <a:endParaRPr lang="en-US"/>
+          </a:p>
+        </p:txBody>
       </p:sp>
       <p:sp>
         <p:nvSpPr>
@@ -9464,6 +8680,13 @@
           </a:solidFill>
           <a:ln/>
         </p:spPr>
+        <p:txBody>
+          <a:bodyPr/>
+          <a:lstStyle/>
+          <a:p>
+            <a:endParaRPr lang="en-US"/>
+          </a:p>
+        </p:txBody>
       </p:sp>
       <p:sp>
         <p:nvSpPr>
@@ -9488,7 +8711,7 @@
           </a:bodyPr>
           <a:lstStyle/>
           <a:p>
-            <a:pPr algn="l" indent="0" marL="0">
+            <a:pPr marL="0" indent="0" algn="l">
               <a:lnSpc>
                 <a:spcPct val="116379"/>
               </a:lnSpc>
@@ -9530,6 +8753,13 @@
           </a:solidFill>
           <a:ln/>
         </p:spPr>
+        <p:txBody>
+          <a:bodyPr/>
+          <a:lstStyle/>
+          <a:p>
+            <a:endParaRPr lang="en-US"/>
+          </a:p>
+        </p:txBody>
       </p:sp>
       <p:sp>
         <p:nvSpPr>
@@ -9552,6 +8782,13 @@
           </a:solidFill>
           <a:ln/>
         </p:spPr>
+        <p:txBody>
+          <a:bodyPr/>
+          <a:lstStyle/>
+          <a:p>
+            <a:endParaRPr lang="en-US"/>
+          </a:p>
+        </p:txBody>
       </p:sp>
       <p:sp>
         <p:nvSpPr>
@@ -9576,7 +8813,7 @@
           </a:bodyPr>
           <a:lstStyle/>
           <a:p>
-            <a:pPr algn="l" indent="0" marL="0">
+            <a:pPr marL="0" indent="0" algn="l">
               <a:lnSpc>
                 <a:spcPct val="116379"/>
               </a:lnSpc>
@@ -9593,12 +8830,6 @@
               </a:rPr>
               <a:t>strong </a:t>
             </a:r>
-            <a:pPr algn="l" indent="0" marL="0">
-              <a:lnSpc>
-                <a:spcPct val="116379"/>
-              </a:lnSpc>
-              <a:buNone/>
-            </a:pPr>
             <a:r>
               <a:rPr lang="en-US" sz="1875" dirty="0">
                 <a:solidFill>
@@ -9638,6 +8869,13 @@
           </a:solidFill>
           <a:ln/>
         </p:spPr>
+        <p:txBody>
+          <a:bodyPr/>
+          <a:lstStyle/>
+          <a:p>
+            <a:endParaRPr lang="en-US"/>
+          </a:p>
+        </p:txBody>
       </p:sp>
       <p:sp>
         <p:nvSpPr>
@@ -9662,7 +8900,7 @@
           </a:bodyPr>
           <a:lstStyle/>
           <a:p>
-            <a:pPr algn="l" indent="0" marL="0">
+            <a:pPr marL="0" indent="0" algn="l">
               <a:lnSpc>
                 <a:spcPct val="116379"/>
               </a:lnSpc>
@@ -9704,6 +8942,13 @@
           </a:solidFill>
           <a:ln/>
         </p:spPr>
+        <p:txBody>
+          <a:bodyPr/>
+          <a:lstStyle/>
+          <a:p>
+            <a:endParaRPr lang="en-US"/>
+          </a:p>
+        </p:txBody>
       </p:sp>
       <p:sp>
         <p:nvSpPr>
@@ -9728,7 +8973,7 @@
           </a:bodyPr>
           <a:lstStyle/>
           <a:p>
-            <a:pPr algn="l" indent="0" marL="0">
+            <a:pPr marL="0" indent="0" algn="l">
               <a:lnSpc>
                 <a:spcPct val="116379"/>
               </a:lnSpc>
@@ -9745,12 +8990,6 @@
               </a:rPr>
               <a:t>none </a:t>
             </a:r>
-            <a:pPr algn="l" indent="0" marL="0">
-              <a:lnSpc>
-                <a:spcPct val="116379"/>
-              </a:lnSpc>
-              <a:buNone/>
-            </a:pPr>
             <a:r>
               <a:rPr lang="en-US" sz="1875" dirty="0">
                 <a:solidFill>
@@ -9768,14 +9007,14 @@
       </p:sp>
       <p:pic>
         <p:nvPicPr>
-          <p:cNvPr id="33" name="Image 0" descr="preencoded.png">    </p:cNvPr>
+          <p:cNvPr id="33" name="Image 0" descr="preencoded.png"/>
           <p:cNvPicPr>
             <a:picLocks noChangeAspect="1"/>
           </p:cNvPicPr>
           <p:nvPr/>
         </p:nvPicPr>
         <p:blipFill>
-          <a:blip r:embed="rId1"/>
+          <a:blip r:embed="rId3"/>
           <a:stretch>
             <a:fillRect/>
           </a:stretch>
@@ -9813,11 +9052,11 @@
           </a:bodyPr>
           <a:lstStyle/>
           <a:p>
-            <a:pPr algn="l" indent="0" marL="0">
-              <a:buNone/>
-            </a:pPr>
-            <a:r>
-              <a:rPr lang="en-US" sz="1200" spc="264" kern="0" dirty="0">
+            <a:pPr marL="0" indent="0" algn="l">
+              <a:buNone/>
+            </a:pPr>
+            <a:r>
+              <a:rPr lang="en-US" sz="1200" kern="0" spc="264" dirty="0">
                 <a:solidFill>
                   <a:srgbClr val="969696"/>
                 </a:solidFill>
@@ -9847,6 +9086,7 @@
         <a:solidFill>
           <a:srgbClr val="000000"/>
         </a:solidFill>
+        <a:effectLst/>
       </p:bgPr>
     </p:bg>
     <p:spTree>
@@ -9886,11 +9126,11 @@
           </a:bodyPr>
           <a:lstStyle/>
           <a:p>
-            <a:pPr algn="l" indent="0" marL="0">
-              <a:buNone/>
-            </a:pPr>
-            <a:r>
-              <a:rPr lang="en-US" sz="1500" spc="450" kern="0" dirty="0">
+            <a:pPr marL="0" indent="0" algn="l">
+              <a:buNone/>
+            </a:pPr>
+            <a:r>
+              <a:rPr lang="en-US" sz="1500" kern="0" spc="450" dirty="0">
                 <a:solidFill>
                   <a:srgbClr val="36CDFF"/>
                 </a:solidFill>
@@ -9927,7 +9167,7 @@
           </a:bodyPr>
           <a:lstStyle/>
           <a:p>
-            <a:pPr algn="l" indent="0" marL="0">
+            <a:pPr marL="0" indent="0" algn="l">
               <a:lnSpc>
                 <a:spcPct val="78113"/>
               </a:lnSpc>
@@ -9973,6 +9213,13 @@
             <a:prstDash val="solid"/>
           </a:ln>
         </p:spPr>
+        <p:txBody>
+          <a:bodyPr/>
+          <a:lstStyle/>
+          <a:p>
+            <a:endParaRPr lang="en-US"/>
+          </a:p>
+        </p:txBody>
       </p:sp>
       <p:sp>
         <p:nvSpPr>
@@ -9997,7 +9244,7 @@
           </a:bodyPr>
           <a:lstStyle/>
           <a:p>
-            <a:pPr algn="ctr" indent="0" marL="0">
+            <a:pPr marL="0" indent="0" algn="ctr">
               <a:buNone/>
             </a:pPr>
             <a:r>
@@ -10038,7 +9285,7 @@
           </a:bodyPr>
           <a:lstStyle/>
           <a:p>
-            <a:pPr algn="l" indent="0" marL="0">
+            <a:pPr marL="0" indent="0" algn="l">
               <a:buNone/>
             </a:pPr>
             <a:r>
@@ -10075,6 +9322,13 @@
           </a:solidFill>
           <a:ln/>
         </p:spPr>
+        <p:txBody>
+          <a:bodyPr/>
+          <a:lstStyle/>
+          <a:p>
+            <a:endParaRPr lang="en-US"/>
+          </a:p>
+        </p:txBody>
       </p:sp>
       <p:sp>
         <p:nvSpPr>
@@ -10095,6 +9349,13 @@
           </a:solidFill>
           <a:ln/>
         </p:spPr>
+        <p:txBody>
+          <a:bodyPr/>
+          <a:lstStyle/>
+          <a:p>
+            <a:endParaRPr lang="en-US"/>
+          </a:p>
+        </p:txBody>
       </p:sp>
       <p:sp>
         <p:nvSpPr>
@@ -10115,6 +9376,13 @@
           </a:solidFill>
           <a:ln/>
         </p:spPr>
+        <p:txBody>
+          <a:bodyPr/>
+          <a:lstStyle/>
+          <a:p>
+            <a:endParaRPr lang="en-US"/>
+          </a:p>
+        </p:txBody>
       </p:sp>
       <p:sp>
         <p:nvSpPr>
@@ -10135,6 +9403,13 @@
           </a:solidFill>
           <a:ln/>
         </p:spPr>
+        <p:txBody>
+          <a:bodyPr/>
+          <a:lstStyle/>
+          <a:p>
+            <a:endParaRPr lang="en-US"/>
+          </a:p>
+        </p:txBody>
       </p:sp>
       <p:sp>
         <p:nvSpPr>
@@ -10159,11 +9434,11 @@
           </a:bodyPr>
           <a:lstStyle/>
           <a:p>
-            <a:pPr algn="ctr" indent="0" marL="0">
-              <a:buNone/>
-            </a:pPr>
-            <a:r>
-              <a:rPr lang="en-US" sz="1125" spc="158" kern="0" dirty="0">
+            <a:pPr marL="0" indent="0" algn="ctr">
+              <a:buNone/>
+            </a:pPr>
+            <a:r>
+              <a:rPr lang="en-US" sz="1125" kern="0" spc="158" dirty="0">
                 <a:solidFill>
                   <a:srgbClr val="36CDFF"/>
                 </a:solidFill>
@@ -10200,7 +9475,7 @@
           </a:bodyPr>
           <a:lstStyle/>
           <a:p>
-            <a:pPr algn="ctr" indent="0" marL="0">
+            <a:pPr marL="0" indent="0" algn="ctr">
               <a:lnSpc>
                 <a:spcPct val="78261"/>
               </a:lnSpc>
@@ -10244,7 +9519,7 @@
           </a:bodyPr>
           <a:lstStyle/>
           <a:p>
-            <a:pPr algn="l" indent="0" marL="0">
+            <a:pPr marL="0" indent="0" algn="l">
               <a:buNone/>
             </a:pPr>
             <a:r>
@@ -10287,6 +9562,13 @@
             <a:prstDash val="solid"/>
           </a:ln>
         </p:spPr>
+        <p:txBody>
+          <a:bodyPr/>
+          <a:lstStyle/>
+          <a:p>
+            <a:endParaRPr lang="en-US"/>
+          </a:p>
+        </p:txBody>
       </p:sp>
       <p:sp>
         <p:nvSpPr>
@@ -10311,7 +9593,7 @@
           </a:bodyPr>
           <a:lstStyle/>
           <a:p>
-            <a:pPr algn="ctr" indent="0" marL="0">
+            <a:pPr marL="0" indent="0" algn="ctr">
               <a:buNone/>
             </a:pPr>
             <a:r>
@@ -10352,7 +9634,7 @@
           </a:bodyPr>
           <a:lstStyle/>
           <a:p>
-            <a:pPr algn="l" indent="0" marL="0">
+            <a:pPr marL="0" indent="0" algn="l">
               <a:buNone/>
             </a:pPr>
             <a:r>
@@ -10395,6 +9677,13 @@
             <a:prstDash val="solid"/>
           </a:ln>
         </p:spPr>
+        <p:txBody>
+          <a:bodyPr/>
+          <a:lstStyle/>
+          <a:p>
+            <a:endParaRPr lang="en-US"/>
+          </a:p>
+        </p:txBody>
       </p:sp>
       <p:sp>
         <p:nvSpPr>
@@ -10419,7 +9708,7 @@
           </a:bodyPr>
           <a:lstStyle/>
           <a:p>
-            <a:pPr algn="ctr" indent="0" marL="0">
+            <a:pPr marL="0" indent="0" algn="ctr">
               <a:buNone/>
             </a:pPr>
             <a:r>
@@ -10460,7 +9749,7 @@
           </a:bodyPr>
           <a:lstStyle/>
           <a:p>
-            <a:pPr algn="l" indent="0" marL="0">
+            <a:pPr marL="0" indent="0" algn="l">
               <a:buNone/>
             </a:pPr>
             <a:r>
@@ -10503,6 +9792,13 @@
             <a:prstDash val="solid"/>
           </a:ln>
         </p:spPr>
+        <p:txBody>
+          <a:bodyPr/>
+          <a:lstStyle/>
+          <a:p>
+            <a:endParaRPr lang="en-US"/>
+          </a:p>
+        </p:txBody>
       </p:sp>
       <p:sp>
         <p:nvSpPr>
@@ -10527,7 +9823,7 @@
           </a:bodyPr>
           <a:lstStyle/>
           <a:p>
-            <a:pPr algn="ctr" indent="0" marL="0">
+            <a:pPr marL="0" indent="0" algn="ctr">
               <a:buNone/>
             </a:pPr>
             <a:r>
@@ -10568,7 +9864,7 @@
           </a:bodyPr>
           <a:lstStyle/>
           <a:p>
-            <a:pPr algn="l" indent="0" marL="0">
+            <a:pPr marL="0" indent="0" algn="l">
               <a:buNone/>
             </a:pPr>
             <a:r>
@@ -10611,6 +9907,13 @@
             <a:prstDash val="solid"/>
           </a:ln>
         </p:spPr>
+        <p:txBody>
+          <a:bodyPr/>
+          <a:lstStyle/>
+          <a:p>
+            <a:endParaRPr lang="en-US"/>
+          </a:p>
+        </p:txBody>
       </p:sp>
       <p:sp>
         <p:nvSpPr>
@@ -10635,7 +9938,7 @@
           </a:bodyPr>
           <a:lstStyle/>
           <a:p>
-            <a:pPr algn="ctr" indent="0" marL="0">
+            <a:pPr marL="0" indent="0" algn="ctr">
               <a:buNone/>
             </a:pPr>
             <a:r>
@@ -10676,7 +9979,7 @@
           </a:bodyPr>
           <a:lstStyle/>
           <a:p>
-            <a:pPr algn="l" indent="0" marL="0">
+            <a:pPr marL="0" indent="0" algn="l">
               <a:lnSpc>
                 <a:spcPct val="126410"/>
               </a:lnSpc>
@@ -10693,12 +9996,6 @@
               </a:rPr>
               <a:t>Everything so far attacked </a:t>
             </a:r>
-            <a:pPr algn="l" indent="0" marL="0">
-              <a:lnSpc>
-                <a:spcPct val="126410"/>
-              </a:lnSpc>
-              <a:buNone/>
-            </a:pPr>
             <a:r>
               <a:rPr lang="en-US" sz="2550" b="1" dirty="0">
                 <a:solidFill>
@@ -10710,12 +10007,6 @@
               </a:rPr>
               <a:t>runtime. </a:t>
             </a:r>
-            <a:pPr algn="l" indent="0" marL="0">
-              <a:lnSpc>
-                <a:spcPct val="126410"/>
-              </a:lnSpc>
-              <a:buNone/>
-            </a:pPr>
             <a:r>
               <a:rPr lang="en-US" sz="2550" dirty="0">
                 <a:solidFill>
@@ -10727,12 +10018,6 @@
               </a:rPr>
               <a:t>Half of real AI risk is </a:t>
             </a:r>
-            <a:pPr algn="l" indent="0" marL="0">
-              <a:lnSpc>
-                <a:spcPct val="126410"/>
-              </a:lnSpc>
-              <a:buNone/>
-            </a:pPr>
             <a:r>
               <a:rPr lang="en-US" sz="2550" b="1" dirty="0">
                 <a:solidFill>
@@ -10744,12 +10029,6 @@
               </a:rPr>
               <a:t>upstream</a:t>
             </a:r>
-            <a:pPr algn="l" indent="0" marL="0">
-              <a:lnSpc>
-                <a:spcPct val="126410"/>
-              </a:lnSpc>
-              <a:buNone/>
-            </a:pPr>
             <a:r>
               <a:rPr lang="en-US" sz="2550" dirty="0">
                 <a:solidFill>
@@ -10767,14 +10046,14 @@
       </p:sp>
       <p:pic>
         <p:nvPicPr>
-          <p:cNvPr id="26" name="Image 0" descr="preencoded.png">    </p:cNvPr>
+          <p:cNvPr id="26" name="Image 0" descr="preencoded.png"/>
           <p:cNvPicPr>
             <a:picLocks noChangeAspect="1"/>
           </p:cNvPicPr>
           <p:nvPr/>
         </p:nvPicPr>
         <p:blipFill>
-          <a:blip r:embed="rId1"/>
+          <a:blip r:embed="rId3"/>
           <a:stretch>
             <a:fillRect/>
           </a:stretch>
@@ -10812,11 +10091,11 @@
           </a:bodyPr>
           <a:lstStyle/>
           <a:p>
-            <a:pPr algn="l" indent="0" marL="0">
-              <a:buNone/>
-            </a:pPr>
-            <a:r>
-              <a:rPr lang="en-US" sz="1200" spc="264" kern="0" dirty="0">
+            <a:pPr marL="0" indent="0" algn="l">
+              <a:buNone/>
+            </a:pPr>
+            <a:r>
+              <a:rPr lang="en-US" sz="1200" kern="0" spc="264" dirty="0">
                 <a:solidFill>
                   <a:srgbClr val="969696"/>
                 </a:solidFill>
@@ -10846,6 +10125,7 @@
         <a:solidFill>
           <a:srgbClr val="000000"/>
         </a:solidFill>
+        <a:effectLst/>
       </p:bgPr>
     </p:bg>
     <p:spTree>
@@ -10885,11 +10165,11 @@
           </a:bodyPr>
           <a:lstStyle/>
           <a:p>
-            <a:pPr algn="l" indent="0" marL="0">
-              <a:buNone/>
-            </a:pPr>
-            <a:r>
-              <a:rPr lang="en-US" sz="1650" spc="495" kern="0" dirty="0">
+            <a:pPr marL="0" indent="0" algn="l">
+              <a:buNone/>
+            </a:pPr>
+            <a:r>
+              <a:rPr lang="en-US" sz="1650" kern="0" spc="495" dirty="0">
                 <a:solidFill>
                   <a:srgbClr val="FD7EF5"/>
                 </a:solidFill>
@@ -10926,7 +10206,7 @@
           </a:bodyPr>
           <a:lstStyle/>
           <a:p>
-            <a:pPr algn="l" indent="0" marL="0">
+            <a:pPr marL="0" indent="0" algn="l">
               <a:lnSpc>
                 <a:spcPct val="78261"/>
               </a:lnSpc>
@@ -10943,12 +10223,6 @@
               </a:rPr>
               <a:t>YOUR MODEL IS A </a:t>
             </a:r>
-            <a:pPr algn="l" indent="0" marL="0">
-              <a:lnSpc>
-                <a:spcPct val="78261"/>
-              </a:lnSpc>
-              <a:buNone/>
-            </a:pPr>
             <a:r>
               <a:rPr lang="en-US" sz="9750" dirty="0">
                 <a:solidFill>
@@ -10987,7 +10261,7 @@
           </a:bodyPr>
           <a:lstStyle/>
           <a:p>
-            <a:pPr algn="l" indent="0" marL="0">
+            <a:pPr marL="0" indent="0" algn="l">
               <a:lnSpc>
                 <a:spcPct val="126087"/>
               </a:lnSpc>
@@ -11010,14 +10284,14 @@
       </p:sp>
       <p:pic>
         <p:nvPicPr>
-          <p:cNvPr id="5" name="Image 0" descr="preencoded.png">    </p:cNvPr>
+          <p:cNvPr id="5" name="Image 0" descr="preencoded.png"/>
           <p:cNvPicPr>
             <a:picLocks noChangeAspect="1"/>
           </p:cNvPicPr>
           <p:nvPr/>
         </p:nvPicPr>
         <p:blipFill>
-          <a:blip r:embed="rId1"/>
+          <a:blip r:embed="rId3"/>
           <a:stretch>
             <a:fillRect/>
           </a:stretch>
@@ -11055,11 +10329,11 @@
           </a:bodyPr>
           <a:lstStyle/>
           <a:p>
-            <a:pPr algn="l" indent="0" marL="0">
-              <a:buNone/>
-            </a:pPr>
-            <a:r>
-              <a:rPr lang="en-US" sz="1200" spc="264" kern="0" dirty="0">
+            <a:pPr marL="0" indent="0" algn="l">
+              <a:buNone/>
+            </a:pPr>
+            <a:r>
+              <a:rPr lang="en-US" sz="1200" kern="0" spc="264" dirty="0">
                 <a:solidFill>
                   <a:srgbClr val="969696"/>
                 </a:solidFill>
@@ -11089,6 +10363,7 @@
         <a:solidFill>
           <a:srgbClr val="000000"/>
         </a:solidFill>
+        <a:effectLst/>
       </p:bgPr>
     </p:bg>
     <p:spTree>
@@ -11128,11 +10403,11 @@
           </a:bodyPr>
           <a:lstStyle/>
           <a:p>
-            <a:pPr algn="l" indent="0" marL="0">
-              <a:buNone/>
-            </a:pPr>
-            <a:r>
-              <a:rPr lang="en-US" sz="1500" spc="450" kern="0" dirty="0">
+            <a:pPr marL="0" indent="0" algn="l">
+              <a:buNone/>
+            </a:pPr>
+            <a:r>
+              <a:rPr lang="en-US" sz="1500" kern="0" spc="450" dirty="0">
                 <a:solidFill>
                   <a:srgbClr val="36CDFF"/>
                 </a:solidFill>
@@ -11169,7 +10444,7 @@
           </a:bodyPr>
           <a:lstStyle/>
           <a:p>
-            <a:pPr algn="l" indent="0" marL="0">
+            <a:pPr marL="0" indent="0" algn="l">
               <a:lnSpc>
                 <a:spcPct val="78190"/>
               </a:lnSpc>
@@ -11213,7 +10488,7 @@
           </a:bodyPr>
           <a:lstStyle/>
           <a:p>
-            <a:pPr algn="l" indent="0" marL="0">
+            <a:pPr marL="0" indent="0" algn="l">
               <a:lnSpc>
                 <a:spcPct val="132000"/>
               </a:lnSpc>
@@ -11257,7 +10532,7 @@
           </a:bodyPr>
           <a:lstStyle/>
           <a:p>
-            <a:pPr algn="l" indent="0" marL="0">
+            <a:pPr marL="0" indent="0" algn="l">
               <a:lnSpc>
                 <a:spcPct val="121935"/>
               </a:lnSpc>
@@ -11274,14 +10549,107 @@
               </a:rPr>
               <a:t>Inventory your model artifacts. </a:t>
             </a:r>
-            <a:pPr algn="l" indent="0" marL="0">
+            <a:r>
+              <a:rPr lang="en-US" sz="2025" b="1" dirty="0">
+                <a:solidFill>
+                  <a:srgbClr val="FFFFFF"/>
+                </a:solidFill>
+                <a:latin typeface="Arial" pitchFamily="34" charset="0"/>
+                <a:ea typeface="Arial" pitchFamily="34" charset="-122"/>
+                <a:cs typeface="Arial" pitchFamily="34" charset="-120"/>
+              </a:rPr>
+              <a:t>Which are pickle-based? </a:t>
+            </a:r>
+            <a:r>
+              <a:rPr lang="en-US" sz="2025" dirty="0">
+                <a:solidFill>
+                  <a:srgbClr val="FFFFFF"/>
+                </a:solidFill>
+                <a:latin typeface="Arial" pitchFamily="34" charset="0"/>
+                <a:ea typeface="Arial" pitchFamily="34" charset="-122"/>
+                <a:cs typeface="Arial" pitchFamily="34" charset="-120"/>
+              </a:rPr>
+              <a:t>(.pt / .pth count.)</a:t>
+            </a:r>
+            <a:endParaRPr lang="en-US" sz="2025" dirty="0"/>
+          </a:p>
+        </p:txBody>
+      </p:sp>
+      <p:sp>
+        <p:nvSpPr>
+          <p:cNvPr id="6" name="Text 4"/>
+          <p:cNvSpPr/>
+          <p:nvPr/>
+        </p:nvSpPr>
+        <p:spPr>
+          <a:xfrm>
+            <a:off x="990600" y="4549155"/>
+            <a:ext cx="202406" cy="352425"/>
+          </a:xfrm>
+          <a:prstGeom prst="rect">
+            <a:avLst/>
+          </a:prstGeom>
+          <a:noFill/>
+          <a:ln/>
+        </p:spPr>
+        <p:txBody>
+          <a:bodyPr wrap="square" lIns="25400" tIns="25400" rIns="25400" bIns="25400" rtlCol="0" anchor="t">
+            <a:normAutofit/>
+          </a:bodyPr>
+          <a:lstStyle/>
+          <a:p>
+            <a:pPr marL="0" indent="0" algn="l">
+              <a:lnSpc>
+                <a:spcPct val="132000"/>
+              </a:lnSpc>
+              <a:buNone/>
+            </a:pPr>
+            <a:r>
+              <a:rPr lang="en-US" sz="1650" dirty="0">
+                <a:solidFill>
+                  <a:srgbClr val="FD7EF5"/>
+                </a:solidFill>
+                <a:latin typeface="Courier New" pitchFamily="34" charset="0"/>
+                <a:ea typeface="Courier New" pitchFamily="34" charset="-122"/>
+                <a:cs typeface="Courier New" pitchFamily="34" charset="-120"/>
+              </a:rPr>
+              <a:t>▸</a:t>
+            </a:r>
+            <a:endParaRPr lang="en-US" sz="1650" dirty="0"/>
+          </a:p>
+        </p:txBody>
+      </p:sp>
+      <p:sp>
+        <p:nvSpPr>
+          <p:cNvPr id="7" name="Text 5"/>
+          <p:cNvSpPr/>
+          <p:nvPr/>
+        </p:nvSpPr>
+        <p:spPr>
+          <a:xfrm>
+            <a:off x="1307306" y="4549155"/>
+            <a:ext cx="7185027" cy="402878"/>
+          </a:xfrm>
+          <a:prstGeom prst="rect">
+            <a:avLst/>
+          </a:prstGeom>
+          <a:noFill/>
+          <a:ln/>
+        </p:spPr>
+        <p:txBody>
+          <a:bodyPr wrap="square" lIns="25400" tIns="25400" rIns="25400" bIns="25400" rtlCol="0" anchor="t">
+            <a:normAutofit/>
+          </a:bodyPr>
+          <a:lstStyle/>
+          <a:p>
+            <a:pPr marL="0" indent="0" algn="l">
               <a:lnSpc>
                 <a:spcPct val="121935"/>
               </a:lnSpc>
               <a:buNone/>
             </a:pPr>
             <a:r>
-              <a:rPr lang="en-US" sz="2025" b="1" dirty="0">
+              <a:rPr lang="en-US" sz="2025" dirty="0">
                 <a:solidFill>
                   <a:srgbClr val="FFFFFF"/>
                 </a:solidFill>
@@ -11289,9 +10657,102 @@
                 <a:ea typeface="Arial" pitchFamily="34" charset="-122"/>
                 <a:cs typeface="Arial" pitchFamily="34" charset="-120"/>
               </a:rPr>
-              <a:t>Which are pickle-based? </a:t>
-            </a:r>
-            <a:pPr algn="l" indent="0" marL="0">
+              <a:t>Migrate to </a:t>
+            </a:r>
+            <a:r>
+              <a:rPr lang="en-US" sz="2025" b="1" dirty="0">
+                <a:solidFill>
+                  <a:srgbClr val="FFFFFF"/>
+                </a:solidFill>
+                <a:latin typeface="Arial" pitchFamily="34" charset="0"/>
+                <a:ea typeface="Arial" pitchFamily="34" charset="-122"/>
+                <a:cs typeface="Arial" pitchFamily="34" charset="-120"/>
+              </a:rPr>
+              <a:t>safetensors </a:t>
+            </a:r>
+            <a:r>
+              <a:rPr lang="en-US" sz="2025" dirty="0">
+                <a:solidFill>
+                  <a:srgbClr val="FFFFFF"/>
+                </a:solidFill>
+                <a:latin typeface="Arial" pitchFamily="34" charset="0"/>
+                <a:ea typeface="Arial" pitchFamily="34" charset="-122"/>
+                <a:cs typeface="Arial" pitchFamily="34" charset="-120"/>
+              </a:rPr>
+              <a:t>wherever the framework supports it</a:t>
+            </a:r>
+            <a:endParaRPr lang="en-US" sz="2025" dirty="0"/>
+          </a:p>
+        </p:txBody>
+      </p:sp>
+      <p:sp>
+        <p:nvSpPr>
+          <p:cNvPr id="8" name="Text 6"/>
+          <p:cNvSpPr/>
+          <p:nvPr/>
+        </p:nvSpPr>
+        <p:spPr>
+          <a:xfrm>
+            <a:off x="990600" y="5161583"/>
+            <a:ext cx="202406" cy="352425"/>
+          </a:xfrm>
+          <a:prstGeom prst="rect">
+            <a:avLst/>
+          </a:prstGeom>
+          <a:noFill/>
+          <a:ln/>
+        </p:spPr>
+        <p:txBody>
+          <a:bodyPr wrap="square" lIns="25400" tIns="25400" rIns="25400" bIns="25400" rtlCol="0" anchor="t">
+            <a:normAutofit/>
+          </a:bodyPr>
+          <a:lstStyle/>
+          <a:p>
+            <a:pPr marL="0" indent="0" algn="l">
+              <a:lnSpc>
+                <a:spcPct val="132000"/>
+              </a:lnSpc>
+              <a:buNone/>
+            </a:pPr>
+            <a:r>
+              <a:rPr lang="en-US" sz="1650" dirty="0">
+                <a:solidFill>
+                  <a:srgbClr val="FD7EF5"/>
+                </a:solidFill>
+                <a:latin typeface="Courier New" pitchFamily="34" charset="0"/>
+                <a:ea typeface="Courier New" pitchFamily="34" charset="-122"/>
+                <a:cs typeface="Courier New" pitchFamily="34" charset="-120"/>
+              </a:rPr>
+              <a:t>▸</a:t>
+            </a:r>
+            <a:endParaRPr lang="en-US" sz="1650" dirty="0"/>
+          </a:p>
+        </p:txBody>
+      </p:sp>
+      <p:sp>
+        <p:nvSpPr>
+          <p:cNvPr id="9" name="Text 7"/>
+          <p:cNvSpPr/>
+          <p:nvPr/>
+        </p:nvSpPr>
+        <p:spPr>
+          <a:xfrm>
+            <a:off x="1307306" y="5161583"/>
+            <a:ext cx="10137882" cy="407640"/>
+          </a:xfrm>
+          <a:prstGeom prst="rect">
+            <a:avLst/>
+          </a:prstGeom>
+          <a:noFill/>
+          <a:ln/>
+        </p:spPr>
+        <p:txBody>
+          <a:bodyPr wrap="square" lIns="25400" tIns="25400" rIns="25400" bIns="25400" rtlCol="0" anchor="t">
+            <a:normAutofit/>
+          </a:bodyPr>
+          <a:lstStyle/>
+          <a:p>
+            <a:pPr marL="0" indent="0" algn="l">
               <a:lnSpc>
                 <a:spcPct val="121935"/>
               </a:lnSpc>
@@ -11306,7 +10767,18 @@
                 <a:ea typeface="Arial" pitchFamily="34" charset="-122"/>
                 <a:cs typeface="Arial" pitchFamily="34" charset="-120"/>
               </a:rPr>
-              <a:t>(.pt / .pth count.)</a:t>
+              <a:t>Hash-pin weights; verify on load — </a:t>
+            </a:r>
+            <a:r>
+              <a:rPr lang="en-US" sz="2025" dirty="0">
+                <a:solidFill>
+                  <a:srgbClr val="36CDFF"/>
+                </a:solidFill>
+                <a:latin typeface="Courier New" pitchFamily="34" charset="0"/>
+                <a:ea typeface="Courier New" pitchFamily="34" charset="-122"/>
+                <a:cs typeface="Courier New" pitchFamily="34" charset="-120"/>
+              </a:rPr>
+              <a:t>torch.load(..., weights_only=True)</a:t>
             </a:r>
             <a:endParaRPr lang="en-US" sz="2025" dirty="0"/>
           </a:p>
@@ -11314,13 +10786,13 @@
       </p:sp>
       <p:sp>
         <p:nvSpPr>
-          <p:cNvPr id="6" name="Text 4"/>
-          <p:cNvSpPr/>
-          <p:nvPr/>
-        </p:nvSpPr>
-        <p:spPr>
-          <a:xfrm>
-            <a:off x="990600" y="4549155"/>
+          <p:cNvPr id="10" name="Text 8"/>
+          <p:cNvSpPr/>
+          <p:nvPr/>
+        </p:nvSpPr>
+        <p:spPr>
+          <a:xfrm>
+            <a:off x="990600" y="5778773"/>
             <a:ext cx="202406" cy="352425"/>
           </a:xfrm>
           <a:prstGeom prst="rect">
@@ -11335,7 +10807,7 @@
           </a:bodyPr>
           <a:lstStyle/>
           <a:p>
-            <a:pPr algn="l" indent="0" marL="0">
+            <a:pPr marL="0" indent="0" algn="l">
               <a:lnSpc>
                 <a:spcPct val="132000"/>
               </a:lnSpc>
@@ -11358,28 +10830,28 @@
       </p:sp>
       <p:sp>
         <p:nvSpPr>
-          <p:cNvPr id="7" name="Text 5"/>
-          <p:cNvSpPr/>
-          <p:nvPr/>
-        </p:nvSpPr>
-        <p:spPr>
-          <a:xfrm>
-            <a:off x="1307306" y="4549155"/>
-            <a:ext cx="7185027" cy="402878"/>
-          </a:xfrm>
-          <a:prstGeom prst="rect">
-            <a:avLst/>
-          </a:prstGeom>
-          <a:noFill/>
-          <a:ln/>
-        </p:spPr>
-        <p:txBody>
-          <a:bodyPr wrap="square" lIns="25400" tIns="25400" rIns="25400" bIns="25400" rtlCol="0" anchor="t">
-            <a:normAutofit/>
-          </a:bodyPr>
-          <a:lstStyle/>
-          <a:p>
-            <a:pPr algn="l" indent="0" marL="0">
+          <p:cNvPr id="11" name="Text 9"/>
+          <p:cNvSpPr/>
+          <p:nvPr/>
+        </p:nvSpPr>
+        <p:spPr>
+          <a:xfrm>
+            <a:off x="1307306" y="5778773"/>
+            <a:ext cx="9228222" cy="398115"/>
+          </a:xfrm>
+          <a:prstGeom prst="rect">
+            <a:avLst/>
+          </a:prstGeom>
+          <a:noFill/>
+          <a:ln/>
+        </p:spPr>
+        <p:txBody>
+          <a:bodyPr wrap="square" lIns="25400" tIns="25400" rIns="25400" bIns="25400" rtlCol="0" anchor="t">
+            <a:normAutofit/>
+          </a:bodyPr>
+          <a:lstStyle/>
+          <a:p>
+            <a:pPr marL="0" indent="0" algn="l">
               <a:lnSpc>
                 <a:spcPct val="121935"/>
               </a:lnSpc>
@@ -11394,16 +10866,87 @@
                 <a:ea typeface="Arial" pitchFamily="34" charset="-122"/>
                 <a:cs typeface="Arial" pitchFamily="34" charset="-120"/>
               </a:rPr>
-              <a:t>Migrate to </a:t>
-            </a:r>
-            <a:pPr algn="l" indent="0" marL="0">
+              <a:t>Scan artifacts on ingest (picklescan / modelscan) — knowing it is evadable</a:t>
+            </a:r>
+            <a:endParaRPr lang="en-US" sz="2025" dirty="0"/>
+          </a:p>
+        </p:txBody>
+      </p:sp>
+      <p:sp>
+        <p:nvSpPr>
+          <p:cNvPr id="12" name="Text 10"/>
+          <p:cNvSpPr/>
+          <p:nvPr/>
+        </p:nvSpPr>
+        <p:spPr>
+          <a:xfrm>
+            <a:off x="990600" y="6386438"/>
+            <a:ext cx="202406" cy="352425"/>
+          </a:xfrm>
+          <a:prstGeom prst="rect">
+            <a:avLst/>
+          </a:prstGeom>
+          <a:noFill/>
+          <a:ln/>
+        </p:spPr>
+        <p:txBody>
+          <a:bodyPr wrap="square" lIns="25400" tIns="25400" rIns="25400" bIns="25400" rtlCol="0" anchor="t">
+            <a:normAutofit/>
+          </a:bodyPr>
+          <a:lstStyle/>
+          <a:p>
+            <a:pPr marL="0" indent="0" algn="l">
+              <a:lnSpc>
+                <a:spcPct val="132000"/>
+              </a:lnSpc>
+              <a:buNone/>
+            </a:pPr>
+            <a:r>
+              <a:rPr lang="en-US" sz="1650" dirty="0">
+                <a:solidFill>
+                  <a:srgbClr val="FD7EF5"/>
+                </a:solidFill>
+                <a:latin typeface="Courier New" pitchFamily="34" charset="0"/>
+                <a:ea typeface="Courier New" pitchFamily="34" charset="-122"/>
+                <a:cs typeface="Courier New" pitchFamily="34" charset="-120"/>
+              </a:rPr>
+              <a:t>▸</a:t>
+            </a:r>
+            <a:endParaRPr lang="en-US" sz="1650" dirty="0"/>
+          </a:p>
+        </p:txBody>
+      </p:sp>
+      <p:sp>
+        <p:nvSpPr>
+          <p:cNvPr id="13" name="Text 11"/>
+          <p:cNvSpPr/>
+          <p:nvPr/>
+        </p:nvSpPr>
+        <p:spPr>
+          <a:xfrm>
+            <a:off x="1307306" y="6386438"/>
+            <a:ext cx="7252313" cy="407640"/>
+          </a:xfrm>
+          <a:prstGeom prst="rect">
+            <a:avLst/>
+          </a:prstGeom>
+          <a:noFill/>
+          <a:ln/>
+        </p:spPr>
+        <p:txBody>
+          <a:bodyPr wrap="square" lIns="25400" tIns="25400" rIns="25400" bIns="25400" rtlCol="0" anchor="t">
+            <a:normAutofit/>
+          </a:bodyPr>
+          <a:lstStyle/>
+          <a:p>
+            <a:pPr marL="0" indent="0" algn="l">
               <a:lnSpc>
                 <a:spcPct val="121935"/>
               </a:lnSpc>
               <a:buNone/>
             </a:pPr>
             <a:r>
-              <a:rPr lang="en-US" sz="2025" b="1" dirty="0">
+              <a:rPr lang="en-US" sz="2025" dirty="0">
                 <a:solidFill>
                   <a:srgbClr val="FFFFFF"/>
                 </a:solidFill>
@@ -11411,9 +10954,102 @@
                 <a:ea typeface="Arial" pitchFamily="34" charset="-122"/>
                 <a:cs typeface="Arial" pitchFamily="34" charset="-120"/>
               </a:rPr>
-              <a:t>safetensors </a:t>
-            </a:r>
-            <a:pPr algn="l" indent="0" marL="0">
+              <a:t>Grep for </a:t>
+            </a:r>
+            <a:r>
+              <a:rPr lang="en-US" sz="2025" dirty="0">
+                <a:solidFill>
+                  <a:srgbClr val="FD7EF5"/>
+                </a:solidFill>
+                <a:latin typeface="Courier New" pitchFamily="34" charset="0"/>
+                <a:ea typeface="Courier New" pitchFamily="34" charset="-122"/>
+                <a:cs typeface="Courier New" pitchFamily="34" charset="-120"/>
+              </a:rPr>
+              <a:t>trust_remote_code=True </a:t>
+            </a:r>
+            <a:r>
+              <a:rPr lang="en-US" sz="2025" dirty="0">
+                <a:solidFill>
+                  <a:srgbClr val="FFFFFF"/>
+                </a:solidFill>
+                <a:latin typeface="Arial" pitchFamily="34" charset="0"/>
+                <a:ea typeface="Arial" pitchFamily="34" charset="-122"/>
+                <a:cs typeface="Arial" pitchFamily="34" charset="-120"/>
+              </a:rPr>
+              <a:t>and justify every hit</a:t>
+            </a:r>
+            <a:endParaRPr lang="en-US" sz="2025" dirty="0"/>
+          </a:p>
+        </p:txBody>
+      </p:sp>
+      <p:sp>
+        <p:nvSpPr>
+          <p:cNvPr id="14" name="Text 12"/>
+          <p:cNvSpPr/>
+          <p:nvPr/>
+        </p:nvSpPr>
+        <p:spPr>
+          <a:xfrm>
+            <a:off x="990600" y="7003628"/>
+            <a:ext cx="202406" cy="352425"/>
+          </a:xfrm>
+          <a:prstGeom prst="rect">
+            <a:avLst/>
+          </a:prstGeom>
+          <a:noFill/>
+          <a:ln/>
+        </p:spPr>
+        <p:txBody>
+          <a:bodyPr wrap="square" lIns="25400" tIns="25400" rIns="25400" bIns="25400" rtlCol="0" anchor="t">
+            <a:normAutofit/>
+          </a:bodyPr>
+          <a:lstStyle/>
+          <a:p>
+            <a:pPr marL="0" indent="0" algn="l">
+              <a:lnSpc>
+                <a:spcPct val="132000"/>
+              </a:lnSpc>
+              <a:buNone/>
+            </a:pPr>
+            <a:r>
+              <a:rPr lang="en-US" sz="1650" dirty="0">
+                <a:solidFill>
+                  <a:srgbClr val="FD7EF5"/>
+                </a:solidFill>
+                <a:latin typeface="Courier New" pitchFamily="34" charset="0"/>
+                <a:ea typeface="Courier New" pitchFamily="34" charset="-122"/>
+                <a:cs typeface="Courier New" pitchFamily="34" charset="-120"/>
+              </a:rPr>
+              <a:t>▸</a:t>
+            </a:r>
+            <a:endParaRPr lang="en-US" sz="1650" dirty="0"/>
+          </a:p>
+        </p:txBody>
+      </p:sp>
+      <p:sp>
+        <p:nvSpPr>
+          <p:cNvPr id="15" name="Text 13"/>
+          <p:cNvSpPr/>
+          <p:nvPr/>
+        </p:nvSpPr>
+        <p:spPr>
+          <a:xfrm>
+            <a:off x="1307306" y="7003628"/>
+            <a:ext cx="5899405" cy="402878"/>
+          </a:xfrm>
+          <a:prstGeom prst="rect">
+            <a:avLst/>
+          </a:prstGeom>
+          <a:noFill/>
+          <a:ln/>
+        </p:spPr>
+        <p:txBody>
+          <a:bodyPr wrap="square" lIns="25400" tIns="25400" rIns="25400" bIns="25400" rtlCol="0" anchor="t">
+            <a:normAutofit/>
+          </a:bodyPr>
+          <a:lstStyle/>
+          <a:p>
+            <a:pPr marL="0" indent="0" algn="l">
               <a:lnSpc>
                 <a:spcPct val="121935"/>
               </a:lnSpc>
@@ -11428,87 +11064,10 @@
                 <a:ea typeface="Arial" pitchFamily="34" charset="-122"/>
                 <a:cs typeface="Arial" pitchFamily="34" charset="-120"/>
               </a:rPr>
-              <a:t>wherever the framework supports it</a:t>
-            </a:r>
-            <a:endParaRPr lang="en-US" sz="2025" dirty="0"/>
-          </a:p>
-        </p:txBody>
-      </p:sp>
-      <p:sp>
-        <p:nvSpPr>
-          <p:cNvPr id="8" name="Text 6"/>
-          <p:cNvSpPr/>
-          <p:nvPr/>
-        </p:nvSpPr>
-        <p:spPr>
-          <a:xfrm>
-            <a:off x="990600" y="5161583"/>
-            <a:ext cx="202406" cy="352425"/>
-          </a:xfrm>
-          <a:prstGeom prst="rect">
-            <a:avLst/>
-          </a:prstGeom>
-          <a:noFill/>
-          <a:ln/>
-        </p:spPr>
-        <p:txBody>
-          <a:bodyPr wrap="square" lIns="25400" tIns="25400" rIns="25400" bIns="25400" rtlCol="0" anchor="t">
-            <a:normAutofit/>
-          </a:bodyPr>
-          <a:lstStyle/>
-          <a:p>
-            <a:pPr algn="l" indent="0" marL="0">
-              <a:lnSpc>
-                <a:spcPct val="132000"/>
-              </a:lnSpc>
-              <a:buNone/>
-            </a:pPr>
-            <a:r>
-              <a:rPr lang="en-US" sz="1650" dirty="0">
-                <a:solidFill>
-                  <a:srgbClr val="FD7EF5"/>
-                </a:solidFill>
-                <a:latin typeface="Courier New" pitchFamily="34" charset="0"/>
-                <a:ea typeface="Courier New" pitchFamily="34" charset="-122"/>
-                <a:cs typeface="Courier New" pitchFamily="34" charset="-120"/>
-              </a:rPr>
-              <a:t>▸</a:t>
-            </a:r>
-            <a:endParaRPr lang="en-US" sz="1650" dirty="0"/>
-          </a:p>
-        </p:txBody>
-      </p:sp>
-      <p:sp>
-        <p:nvSpPr>
-          <p:cNvPr id="9" name="Text 7"/>
-          <p:cNvSpPr/>
-          <p:nvPr/>
-        </p:nvSpPr>
-        <p:spPr>
-          <a:xfrm>
-            <a:off x="1307306" y="5161583"/>
-            <a:ext cx="10137882" cy="407640"/>
-          </a:xfrm>
-          <a:prstGeom prst="rect">
-            <a:avLst/>
-          </a:prstGeom>
-          <a:noFill/>
-          <a:ln/>
-        </p:spPr>
-        <p:txBody>
-          <a:bodyPr wrap="square" lIns="25400" tIns="25400" rIns="25400" bIns="25400" rtlCol="0" anchor="t">
-            <a:normAutofit/>
-          </a:bodyPr>
-          <a:lstStyle/>
-          <a:p>
-            <a:pPr algn="l" indent="0" marL="0">
-              <a:lnSpc>
-                <a:spcPct val="121935"/>
-              </a:lnSpc>
-              <a:buNone/>
-            </a:pPr>
-            <a:r>
-              <a:rPr lang="en-US" sz="2025" dirty="0">
+              <a:t>Audit your lockfile against a CVE database </a:t>
+            </a:r>
+            <a:r>
+              <a:rPr lang="en-US" sz="2025" b="1" dirty="0">
                 <a:solidFill>
                   <a:srgbClr val="FFFFFF"/>
                 </a:solidFill>
@@ -11516,338 +11075,6 @@
                 <a:ea typeface="Arial" pitchFamily="34" charset="-122"/>
                 <a:cs typeface="Arial" pitchFamily="34" charset="-120"/>
               </a:rPr>
-              <a:t>Hash-pin weights; verify on load — </a:t>
-            </a:r>
-            <a:pPr algn="l" indent="0" marL="0">
-              <a:lnSpc>
-                <a:spcPct val="121935"/>
-              </a:lnSpc>
-              <a:buNone/>
-            </a:pPr>
-            <a:r>
-              <a:rPr lang="en-US" sz="2025" dirty="0">
-                <a:solidFill>
-                  <a:srgbClr val="36CDFF"/>
-                </a:solidFill>
-                <a:latin typeface="Courier New" pitchFamily="34" charset="0"/>
-                <a:ea typeface="Courier New" pitchFamily="34" charset="-122"/>
-                <a:cs typeface="Courier New" pitchFamily="34" charset="-120"/>
-              </a:rPr>
-              <a:t>torch.load(..., weights_only=True)</a:t>
-            </a:r>
-            <a:endParaRPr lang="en-US" sz="2025" dirty="0"/>
-          </a:p>
-        </p:txBody>
-      </p:sp>
-      <p:sp>
-        <p:nvSpPr>
-          <p:cNvPr id="10" name="Text 8"/>
-          <p:cNvSpPr/>
-          <p:nvPr/>
-        </p:nvSpPr>
-        <p:spPr>
-          <a:xfrm>
-            <a:off x="990600" y="5778773"/>
-            <a:ext cx="202406" cy="352425"/>
-          </a:xfrm>
-          <a:prstGeom prst="rect">
-            <a:avLst/>
-          </a:prstGeom>
-          <a:noFill/>
-          <a:ln/>
-        </p:spPr>
-        <p:txBody>
-          <a:bodyPr wrap="square" lIns="25400" tIns="25400" rIns="25400" bIns="25400" rtlCol="0" anchor="t">
-            <a:normAutofit/>
-          </a:bodyPr>
-          <a:lstStyle/>
-          <a:p>
-            <a:pPr algn="l" indent="0" marL="0">
-              <a:lnSpc>
-                <a:spcPct val="132000"/>
-              </a:lnSpc>
-              <a:buNone/>
-            </a:pPr>
-            <a:r>
-              <a:rPr lang="en-US" sz="1650" dirty="0">
-                <a:solidFill>
-                  <a:srgbClr val="FD7EF5"/>
-                </a:solidFill>
-                <a:latin typeface="Courier New" pitchFamily="34" charset="0"/>
-                <a:ea typeface="Courier New" pitchFamily="34" charset="-122"/>
-                <a:cs typeface="Courier New" pitchFamily="34" charset="-120"/>
-              </a:rPr>
-              <a:t>▸</a:t>
-            </a:r>
-            <a:endParaRPr lang="en-US" sz="1650" dirty="0"/>
-          </a:p>
-        </p:txBody>
-      </p:sp>
-      <p:sp>
-        <p:nvSpPr>
-          <p:cNvPr id="11" name="Text 9"/>
-          <p:cNvSpPr/>
-          <p:nvPr/>
-        </p:nvSpPr>
-        <p:spPr>
-          <a:xfrm>
-            <a:off x="1307306" y="5778773"/>
-            <a:ext cx="9228222" cy="398115"/>
-          </a:xfrm>
-          <a:prstGeom prst="rect">
-            <a:avLst/>
-          </a:prstGeom>
-          <a:noFill/>
-          <a:ln/>
-        </p:spPr>
-        <p:txBody>
-          <a:bodyPr wrap="square" lIns="25400" tIns="25400" rIns="25400" bIns="25400" rtlCol="0" anchor="t">
-            <a:normAutofit/>
-          </a:bodyPr>
-          <a:lstStyle/>
-          <a:p>
-            <a:pPr algn="l" indent="0" marL="0">
-              <a:lnSpc>
-                <a:spcPct val="121935"/>
-              </a:lnSpc>
-              <a:buNone/>
-            </a:pPr>
-            <a:r>
-              <a:rPr lang="en-US" sz="2025" dirty="0">
-                <a:solidFill>
-                  <a:srgbClr val="FFFFFF"/>
-                </a:solidFill>
-                <a:latin typeface="Arial" pitchFamily="34" charset="0"/>
-                <a:ea typeface="Arial" pitchFamily="34" charset="-122"/>
-                <a:cs typeface="Arial" pitchFamily="34" charset="-120"/>
-              </a:rPr>
-              <a:t>Scan artifacts on ingest (picklescan / modelscan) — knowing it is evadable</a:t>
-            </a:r>
-            <a:endParaRPr lang="en-US" sz="2025" dirty="0"/>
-          </a:p>
-        </p:txBody>
-      </p:sp>
-      <p:sp>
-        <p:nvSpPr>
-          <p:cNvPr id="12" name="Text 10"/>
-          <p:cNvSpPr/>
-          <p:nvPr/>
-        </p:nvSpPr>
-        <p:spPr>
-          <a:xfrm>
-            <a:off x="990600" y="6386438"/>
-            <a:ext cx="202406" cy="352425"/>
-          </a:xfrm>
-          <a:prstGeom prst="rect">
-            <a:avLst/>
-          </a:prstGeom>
-          <a:noFill/>
-          <a:ln/>
-        </p:spPr>
-        <p:txBody>
-          <a:bodyPr wrap="square" lIns="25400" tIns="25400" rIns="25400" bIns="25400" rtlCol="0" anchor="t">
-            <a:normAutofit/>
-          </a:bodyPr>
-          <a:lstStyle/>
-          <a:p>
-            <a:pPr algn="l" indent="0" marL="0">
-              <a:lnSpc>
-                <a:spcPct val="132000"/>
-              </a:lnSpc>
-              <a:buNone/>
-            </a:pPr>
-            <a:r>
-              <a:rPr lang="en-US" sz="1650" dirty="0">
-                <a:solidFill>
-                  <a:srgbClr val="FD7EF5"/>
-                </a:solidFill>
-                <a:latin typeface="Courier New" pitchFamily="34" charset="0"/>
-                <a:ea typeface="Courier New" pitchFamily="34" charset="-122"/>
-                <a:cs typeface="Courier New" pitchFamily="34" charset="-120"/>
-              </a:rPr>
-              <a:t>▸</a:t>
-            </a:r>
-            <a:endParaRPr lang="en-US" sz="1650" dirty="0"/>
-          </a:p>
-        </p:txBody>
-      </p:sp>
-      <p:sp>
-        <p:nvSpPr>
-          <p:cNvPr id="13" name="Text 11"/>
-          <p:cNvSpPr/>
-          <p:nvPr/>
-        </p:nvSpPr>
-        <p:spPr>
-          <a:xfrm>
-            <a:off x="1307306" y="6386438"/>
-            <a:ext cx="7252313" cy="407640"/>
-          </a:xfrm>
-          <a:prstGeom prst="rect">
-            <a:avLst/>
-          </a:prstGeom>
-          <a:noFill/>
-          <a:ln/>
-        </p:spPr>
-        <p:txBody>
-          <a:bodyPr wrap="square" lIns="25400" tIns="25400" rIns="25400" bIns="25400" rtlCol="0" anchor="t">
-            <a:normAutofit/>
-          </a:bodyPr>
-          <a:lstStyle/>
-          <a:p>
-            <a:pPr algn="l" indent="0" marL="0">
-              <a:lnSpc>
-                <a:spcPct val="121935"/>
-              </a:lnSpc>
-              <a:buNone/>
-            </a:pPr>
-            <a:r>
-              <a:rPr lang="en-US" sz="2025" dirty="0">
-                <a:solidFill>
-                  <a:srgbClr val="FFFFFF"/>
-                </a:solidFill>
-                <a:latin typeface="Arial" pitchFamily="34" charset="0"/>
-                <a:ea typeface="Arial" pitchFamily="34" charset="-122"/>
-                <a:cs typeface="Arial" pitchFamily="34" charset="-120"/>
-              </a:rPr>
-              <a:t>Grep for </a:t>
-            </a:r>
-            <a:pPr algn="l" indent="0" marL="0">
-              <a:lnSpc>
-                <a:spcPct val="121935"/>
-              </a:lnSpc>
-              <a:buNone/>
-            </a:pPr>
-            <a:r>
-              <a:rPr lang="en-US" sz="2025" dirty="0">
-                <a:solidFill>
-                  <a:srgbClr val="FD7EF5"/>
-                </a:solidFill>
-                <a:latin typeface="Courier New" pitchFamily="34" charset="0"/>
-                <a:ea typeface="Courier New" pitchFamily="34" charset="-122"/>
-                <a:cs typeface="Courier New" pitchFamily="34" charset="-120"/>
-              </a:rPr>
-              <a:t>trust_remote_code=True </a:t>
-            </a:r>
-            <a:pPr algn="l" indent="0" marL="0">
-              <a:lnSpc>
-                <a:spcPct val="121935"/>
-              </a:lnSpc>
-              <a:buNone/>
-            </a:pPr>
-            <a:r>
-              <a:rPr lang="en-US" sz="2025" dirty="0">
-                <a:solidFill>
-                  <a:srgbClr val="FFFFFF"/>
-                </a:solidFill>
-                <a:latin typeface="Arial" pitchFamily="34" charset="0"/>
-                <a:ea typeface="Arial" pitchFamily="34" charset="-122"/>
-                <a:cs typeface="Arial" pitchFamily="34" charset="-120"/>
-              </a:rPr>
-              <a:t>and justify every hit</a:t>
-            </a:r>
-            <a:endParaRPr lang="en-US" sz="2025" dirty="0"/>
-          </a:p>
-        </p:txBody>
-      </p:sp>
-      <p:sp>
-        <p:nvSpPr>
-          <p:cNvPr id="14" name="Text 12"/>
-          <p:cNvSpPr/>
-          <p:nvPr/>
-        </p:nvSpPr>
-        <p:spPr>
-          <a:xfrm>
-            <a:off x="990600" y="7003628"/>
-            <a:ext cx="202406" cy="352425"/>
-          </a:xfrm>
-          <a:prstGeom prst="rect">
-            <a:avLst/>
-          </a:prstGeom>
-          <a:noFill/>
-          <a:ln/>
-        </p:spPr>
-        <p:txBody>
-          <a:bodyPr wrap="square" lIns="25400" tIns="25400" rIns="25400" bIns="25400" rtlCol="0" anchor="t">
-            <a:normAutofit/>
-          </a:bodyPr>
-          <a:lstStyle/>
-          <a:p>
-            <a:pPr algn="l" indent="0" marL="0">
-              <a:lnSpc>
-                <a:spcPct val="132000"/>
-              </a:lnSpc>
-              <a:buNone/>
-            </a:pPr>
-            <a:r>
-              <a:rPr lang="en-US" sz="1650" dirty="0">
-                <a:solidFill>
-                  <a:srgbClr val="FD7EF5"/>
-                </a:solidFill>
-                <a:latin typeface="Courier New" pitchFamily="34" charset="0"/>
-                <a:ea typeface="Courier New" pitchFamily="34" charset="-122"/>
-                <a:cs typeface="Courier New" pitchFamily="34" charset="-120"/>
-              </a:rPr>
-              <a:t>▸</a:t>
-            </a:r>
-            <a:endParaRPr lang="en-US" sz="1650" dirty="0"/>
-          </a:p>
-        </p:txBody>
-      </p:sp>
-      <p:sp>
-        <p:nvSpPr>
-          <p:cNvPr id="15" name="Text 13"/>
-          <p:cNvSpPr/>
-          <p:nvPr/>
-        </p:nvSpPr>
-        <p:spPr>
-          <a:xfrm>
-            <a:off x="1307306" y="7003628"/>
-            <a:ext cx="5899405" cy="402878"/>
-          </a:xfrm>
-          <a:prstGeom prst="rect">
-            <a:avLst/>
-          </a:prstGeom>
-          <a:noFill/>
-          <a:ln/>
-        </p:spPr>
-        <p:txBody>
-          <a:bodyPr wrap="square" lIns="25400" tIns="25400" rIns="25400" bIns="25400" rtlCol="0" anchor="t">
-            <a:normAutofit/>
-          </a:bodyPr>
-          <a:lstStyle/>
-          <a:p>
-            <a:pPr algn="l" indent="0" marL="0">
-              <a:lnSpc>
-                <a:spcPct val="121935"/>
-              </a:lnSpc>
-              <a:buNone/>
-            </a:pPr>
-            <a:r>
-              <a:rPr lang="en-US" sz="2025" dirty="0">
-                <a:solidFill>
-                  <a:srgbClr val="FFFFFF"/>
-                </a:solidFill>
-                <a:latin typeface="Arial" pitchFamily="34" charset="0"/>
-                <a:ea typeface="Arial" pitchFamily="34" charset="-122"/>
-                <a:cs typeface="Arial" pitchFamily="34" charset="-120"/>
-              </a:rPr>
-              <a:t>Audit your lockfile against a CVE database </a:t>
-            </a:r>
-            <a:pPr algn="l" indent="0" marL="0">
-              <a:lnSpc>
-                <a:spcPct val="121935"/>
-              </a:lnSpc>
-              <a:buNone/>
-            </a:pPr>
-            <a:r>
-              <a:rPr lang="en-US" sz="2025" b="1" dirty="0">
-                <a:solidFill>
-                  <a:srgbClr val="FFFFFF"/>
-                </a:solidFill>
-                <a:latin typeface="Arial" pitchFamily="34" charset="0"/>
-                <a:ea typeface="Arial" pitchFamily="34" charset="-122"/>
-                <a:cs typeface="Arial" pitchFamily="34" charset="-120"/>
-              </a:rPr>
               <a:t>in CI</a:t>
             </a:r>
             <a:endParaRPr lang="en-US" sz="2025" dirty="0"/>
@@ -11856,14 +11083,14 @@
       </p:sp>
       <p:pic>
         <p:nvPicPr>
-          <p:cNvPr id="16" name="Image 0" descr="preencoded.png">    </p:cNvPr>
+          <p:cNvPr id="16" name="Image 0" descr="preencoded.png"/>
           <p:cNvPicPr>
             <a:picLocks noChangeAspect="1"/>
           </p:cNvPicPr>
           <p:nvPr/>
         </p:nvPicPr>
         <p:blipFill>
-          <a:blip r:embed="rId1"/>
+          <a:blip r:embed="rId3"/>
           <a:stretch>
             <a:fillRect/>
           </a:stretch>
@@ -11901,11 +11128,11 @@
           </a:bodyPr>
           <a:lstStyle/>
           <a:p>
-            <a:pPr algn="l" indent="0" marL="0">
-              <a:buNone/>
-            </a:pPr>
-            <a:r>
-              <a:rPr lang="en-US" sz="1200" spc="264" kern="0" dirty="0">
+            <a:pPr marL="0" indent="0" algn="l">
+              <a:buNone/>
+            </a:pPr>
+            <a:r>
+              <a:rPr lang="en-US" sz="1200" kern="0" spc="264" dirty="0">
                 <a:solidFill>
                   <a:srgbClr val="969696"/>
                 </a:solidFill>
@@ -11935,6 +11162,7 @@
         <a:solidFill>
           <a:srgbClr val="000000"/>
         </a:solidFill>
+        <a:effectLst/>
       </p:bgPr>
     </p:bg>
     <p:spTree>
@@ -11974,11 +11202,11 @@
           </a:bodyPr>
           <a:lstStyle/>
           <a:p>
-            <a:pPr algn="l" indent="0" marL="0">
-              <a:buNone/>
-            </a:pPr>
-            <a:r>
-              <a:rPr lang="en-US" sz="1500" spc="450" kern="0" dirty="0">
+            <a:pPr marL="0" indent="0" algn="l">
+              <a:buNone/>
+            </a:pPr>
+            <a:r>
+              <a:rPr lang="en-US" sz="1500" kern="0" spc="450" dirty="0">
                 <a:solidFill>
                   <a:srgbClr val="36CDFF"/>
                 </a:solidFill>
@@ -12015,7 +11243,7 @@
           </a:bodyPr>
           <a:lstStyle/>
           <a:p>
-            <a:pPr algn="l" indent="0" marL="0">
+            <a:pPr marL="0" indent="0" algn="l">
               <a:lnSpc>
                 <a:spcPct val="78113"/>
               </a:lnSpc>
@@ -12057,6 +11285,13 @@
           </a:solidFill>
           <a:ln/>
         </p:spPr>
+        <p:txBody>
+          <a:bodyPr/>
+          <a:lstStyle/>
+          <a:p>
+            <a:endParaRPr lang="en-US"/>
+          </a:p>
+        </p:txBody>
       </p:sp>
       <p:sp>
         <p:nvSpPr>
@@ -12079,6 +11314,13 @@
           </a:solidFill>
           <a:ln/>
         </p:spPr>
+        <p:txBody>
+          <a:bodyPr/>
+          <a:lstStyle/>
+          <a:p>
+            <a:endParaRPr lang="en-US"/>
+          </a:p>
+        </p:txBody>
       </p:sp>
       <p:sp>
         <p:nvSpPr>
@@ -12099,6 +11341,13 @@
           </a:solidFill>
           <a:ln/>
         </p:spPr>
+        <p:txBody>
+          <a:bodyPr/>
+          <a:lstStyle/>
+          <a:p>
+            <a:endParaRPr lang="en-US"/>
+          </a:p>
+        </p:txBody>
       </p:sp>
       <p:sp>
         <p:nvSpPr>
@@ -12121,6 +11370,13 @@
           </a:solidFill>
           <a:ln/>
         </p:spPr>
+        <p:txBody>
+          <a:bodyPr/>
+          <a:lstStyle/>
+          <a:p>
+            <a:endParaRPr lang="en-US"/>
+          </a:p>
+        </p:txBody>
       </p:sp>
       <p:sp>
         <p:nvSpPr>
@@ -12145,11 +11401,11 @@
           </a:bodyPr>
           <a:lstStyle/>
           <a:p>
-            <a:pPr algn="l" indent="0" marL="0">
-              <a:buNone/>
-            </a:pPr>
-            <a:r>
-              <a:rPr lang="en-US" sz="1200" spc="192" kern="0" dirty="0">
+            <a:pPr marL="0" indent="0" algn="l">
+              <a:buNone/>
+            </a:pPr>
+            <a:r>
+              <a:rPr lang="en-US" sz="1200" kern="0" spc="192" dirty="0">
                 <a:solidFill>
                   <a:srgbClr val="969696"/>
                 </a:solidFill>
@@ -12186,7 +11442,7 @@
           </a:bodyPr>
           <a:lstStyle/>
           <a:p>
-            <a:pPr algn="l" indent="0" marL="0">
+            <a:pPr marL="0" indent="0" algn="l">
               <a:buNone/>
             </a:pPr>
             <a:r>
@@ -12200,9 +11456,6 @@
               </a:rPr>
               <a:t>Basecamp → </a:t>
             </a:r>
-            <a:pPr algn="l" indent="0" marL="0">
-              <a:buNone/>
-            </a:pPr>
             <a:r>
               <a:rPr lang="en-US" sz="2250" b="1" i="1" dirty="0">
                 <a:solidFill>
@@ -12241,11 +11494,11 @@
           </a:bodyPr>
           <a:lstStyle/>
           <a:p>
-            <a:pPr algn="l" indent="0" marL="0">
-              <a:buNone/>
-            </a:pPr>
-            <a:r>
-              <a:rPr lang="en-US" sz="1200" spc="192" kern="0" dirty="0">
+            <a:pPr marL="0" indent="0" algn="l">
+              <a:buNone/>
+            </a:pPr>
+            <a:r>
+              <a:rPr lang="en-US" sz="1200" kern="0" spc="192" dirty="0">
                 <a:solidFill>
                   <a:srgbClr val="FD7EF5"/>
                 </a:solidFill>
@@ -12282,7 +11535,7 @@
           </a:bodyPr>
           <a:lstStyle/>
           <a:p>
-            <a:pPr algn="l" indent="0" marL="0">
+            <a:pPr marL="0" indent="0" algn="l">
               <a:lnSpc>
                 <a:spcPct val="138667"/>
               </a:lnSpc>
@@ -12299,12 +11552,6 @@
               </a:rPr>
               <a:t>ReversingLabs </a:t>
             </a:r>
-            <a:pPr algn="l" indent="0" marL="0">
-              <a:lnSpc>
-                <a:spcPct val="138667"/>
-              </a:lnSpc>
-              <a:buNone/>
-            </a:pPr>
             <a:r>
               <a:rPr lang="en-US" sz="1950" dirty="0">
                 <a:solidFill>
@@ -12316,12 +11563,6 @@
               </a:rPr>
               <a:t>— nullifAI: malicious ML models evading PickleScan (Feb 2025) · </a:t>
             </a:r>
-            <a:pPr algn="l" indent="0" marL="0">
-              <a:lnSpc>
-                <a:spcPct val="138667"/>
-              </a:lnSpc>
-              <a:buNone/>
-            </a:pPr>
             <a:r>
               <a:rPr lang="en-US" sz="1950" b="1" dirty="0">
                 <a:solidFill>
@@ -12333,12 +11574,6 @@
               </a:rPr>
               <a:t>JFrog </a:t>
             </a:r>
-            <a:pPr algn="l" indent="0" marL="0">
-              <a:lnSpc>
-                <a:spcPct val="138667"/>
-              </a:lnSpc>
-              <a:buNone/>
-            </a:pPr>
             <a:r>
               <a:rPr lang="en-US" sz="1950" dirty="0">
                 <a:solidFill>
@@ -12377,11 +11612,11 @@
           </a:bodyPr>
           <a:lstStyle/>
           <a:p>
-            <a:pPr algn="l" indent="0" marL="0">
-              <a:buNone/>
-            </a:pPr>
-            <a:r>
-              <a:rPr lang="en-US" sz="1200" spc="192" kern="0" dirty="0">
+            <a:pPr marL="0" indent="0" algn="l">
+              <a:buNone/>
+            </a:pPr>
+            <a:r>
+              <a:rPr lang="en-US" sz="1200" kern="0" spc="192" dirty="0">
                 <a:solidFill>
                   <a:srgbClr val="969696"/>
                 </a:solidFill>
@@ -12418,7 +11653,7 @@
           </a:bodyPr>
           <a:lstStyle/>
           <a:p>
-            <a:pPr algn="l" indent="0" marL="0">
+            <a:pPr marL="0" indent="0" algn="l">
               <a:lnSpc>
                 <a:spcPct val="139636"/>
               </a:lnSpc>
@@ -12441,14 +11676,14 @@
       </p:sp>
       <p:pic>
         <p:nvPicPr>
-          <p:cNvPr id="14" name="Image 0" descr="preencoded.png">    </p:cNvPr>
+          <p:cNvPr id="14" name="Image 0" descr="preencoded.png"/>
           <p:cNvPicPr>
             <a:picLocks noChangeAspect="1"/>
           </p:cNvPicPr>
           <p:nvPr/>
         </p:nvPicPr>
         <p:blipFill>
-          <a:blip r:embed="rId1"/>
+          <a:blip r:embed="rId3"/>
           <a:stretch>
             <a:fillRect/>
           </a:stretch>
@@ -12486,11 +11721,11 @@
           </a:bodyPr>
           <a:lstStyle/>
           <a:p>
-            <a:pPr algn="l" indent="0" marL="0">
-              <a:buNone/>
-            </a:pPr>
-            <a:r>
-              <a:rPr lang="en-US" sz="1200" spc="264" kern="0" dirty="0">
+            <a:pPr marL="0" indent="0" algn="l">
+              <a:buNone/>
+            </a:pPr>
+            <a:r>
+              <a:rPr lang="en-US" sz="1200" kern="0" spc="264" dirty="0">
                 <a:solidFill>
                   <a:srgbClr val="969696"/>
                 </a:solidFill>
@@ -12520,6 +11755,7 @@
         <a:solidFill>
           <a:srgbClr val="000000"/>
         </a:solidFill>
+        <a:effectLst/>
       </p:bgPr>
     </p:bg>
     <p:spTree>
@@ -12559,11 +11795,11 @@
           </a:bodyPr>
           <a:lstStyle/>
           <a:p>
-            <a:pPr algn="l" indent="0" marL="0">
-              <a:buNone/>
-            </a:pPr>
-            <a:r>
-              <a:rPr lang="en-US" sz="1650" spc="495" kern="0" dirty="0">
+            <a:pPr marL="0" indent="0" algn="l">
+              <a:buNone/>
+            </a:pPr>
+            <a:r>
+              <a:rPr lang="en-US" sz="1650" kern="0" spc="495" dirty="0">
                 <a:solidFill>
                   <a:srgbClr val="36CDFF"/>
                 </a:solidFill>
@@ -12600,7 +11836,7 @@
           </a:bodyPr>
           <a:lstStyle/>
           <a:p>
-            <a:pPr algn="l" indent="0" marL="0">
+            <a:pPr marL="0" indent="0" algn="l">
               <a:lnSpc>
                 <a:spcPct val="69565"/>
               </a:lnSpc>
@@ -12617,12 +11853,6 @@
               </a:rPr>
               <a:t>M4</a:t>
             </a:r>
-            <a:pPr algn="l" indent="0" marL="0">
-              <a:lnSpc>
-                <a:spcPct val="69565"/>
-              </a:lnSpc>
-              <a:buNone/>
-            </a:pPr>
             <a:r>
               <a:rPr lang="en-US" sz="22500" b="1" dirty="0">
                 <a:solidFill>
@@ -12661,7 +11891,7 @@
           </a:bodyPr>
           <a:lstStyle/>
           <a:p>
-            <a:pPr algn="l" indent="0" marL="0">
+            <a:pPr marL="0" indent="0" algn="l">
               <a:lnSpc>
                 <a:spcPct val="126410"/>
               </a:lnSpc>
@@ -12684,14 +11914,14 @@
       </p:sp>
       <p:pic>
         <p:nvPicPr>
-          <p:cNvPr id="5" name="Image 0" descr="preencoded.png">    </p:cNvPr>
+          <p:cNvPr id="5" name="Image 0" descr="preencoded.png"/>
           <p:cNvPicPr>
             <a:picLocks noChangeAspect="1"/>
           </p:cNvPicPr>
           <p:nvPr/>
         </p:nvPicPr>
         <p:blipFill>
-          <a:blip r:embed="rId1"/>
+          <a:blip r:embed="rId3"/>
           <a:stretch>
             <a:fillRect/>
           </a:stretch>
@@ -12729,11 +11959,11 @@
           </a:bodyPr>
           <a:lstStyle/>
           <a:p>
-            <a:pPr algn="l" indent="0" marL="0">
-              <a:buNone/>
-            </a:pPr>
-            <a:r>
-              <a:rPr lang="en-US" sz="1200" spc="264" kern="0" dirty="0">
+            <a:pPr marL="0" indent="0" algn="l">
+              <a:buNone/>
+            </a:pPr>
+            <a:r>
+              <a:rPr lang="en-US" sz="1200" kern="0" spc="264" dirty="0">
                 <a:solidFill>
                   <a:srgbClr val="969696"/>
                 </a:solidFill>
@@ -12763,6 +11993,7 @@
         <a:solidFill>
           <a:srgbClr val="000000"/>
         </a:solidFill>
+        <a:effectLst/>
       </p:bgPr>
     </p:bg>
     <p:spTree>
@@ -12802,11 +12033,11 @@
           </a:bodyPr>
           <a:lstStyle/>
           <a:p>
-            <a:pPr algn="l" indent="0" marL="0">
-              <a:buNone/>
-            </a:pPr>
-            <a:r>
-              <a:rPr lang="en-US" sz="1650" spc="495" kern="0" dirty="0">
+            <a:pPr marL="0" indent="0" algn="l">
+              <a:buNone/>
+            </a:pPr>
+            <a:r>
+              <a:rPr lang="en-US" sz="1650" kern="0" spc="495" dirty="0">
                 <a:solidFill>
                   <a:srgbClr val="FD7EF5"/>
                 </a:solidFill>
@@ -12843,7 +12074,7 @@
           </a:bodyPr>
           <a:lstStyle/>
           <a:p>
-            <a:pPr algn="l" indent="0" marL="0">
+            <a:pPr marL="0" indent="0" algn="l">
               <a:lnSpc>
                 <a:spcPct val="78261"/>
               </a:lnSpc>
@@ -12860,12 +12091,6 @@
               </a:rPr>
               <a:t>DOWNLOADING A MODEL IS </a:t>
             </a:r>
-            <a:pPr algn="l" indent="0" marL="0">
-              <a:lnSpc>
-                <a:spcPct val="78261"/>
-              </a:lnSpc>
-              <a:buNone/>
-            </a:pPr>
             <a:r>
               <a:rPr lang="en-US" sz="8250" dirty="0">
                 <a:solidFill>
@@ -12904,37 +12129,26 @@
           </a:bodyPr>
           <a:lstStyle/>
           <a:p>
-            <a:pPr algn="l" indent="0" marL="0">
+            <a:pPr marL="0" indent="0" algn="l">
               <a:lnSpc>
                 <a:spcPct val="126087"/>
               </a:lnSpc>
               <a:buNone/>
             </a:pPr>
-            <a:r>
-              <a:rPr lang="en-US" sz="2250" dirty="0">
-                <a:solidFill>
-                  <a:srgbClr val="C8C8C8"/>
-                </a:solidFill>
-                <a:latin typeface="Arial" pitchFamily="34" charset="0"/>
-                <a:ea typeface="Arial" pitchFamily="34" charset="-122"/>
-                <a:cs typeface="Arial" pitchFamily="34" charset="-120"/>
-              </a:rPr>
-              <a:t>Say that to an ML team and watch them disagree. Then show them a pickle.</a:t>
-            </a:r>
             <a:endParaRPr lang="en-US" sz="2250" dirty="0"/>
           </a:p>
         </p:txBody>
       </p:sp>
       <p:pic>
         <p:nvPicPr>
-          <p:cNvPr id="5" name="Image 0" descr="preencoded.png">    </p:cNvPr>
+          <p:cNvPr id="5" name="Image 0" descr="preencoded.png"/>
           <p:cNvPicPr>
             <a:picLocks noChangeAspect="1"/>
           </p:cNvPicPr>
           <p:nvPr/>
         </p:nvPicPr>
         <p:blipFill>
-          <a:blip r:embed="rId1"/>
+          <a:blip r:embed="rId3"/>
           <a:stretch>
             <a:fillRect/>
           </a:stretch>
@@ -12972,11 +12186,11 @@
           </a:bodyPr>
           <a:lstStyle/>
           <a:p>
-            <a:pPr algn="l" indent="0" marL="0">
-              <a:buNone/>
-            </a:pPr>
-            <a:r>
-              <a:rPr lang="en-US" sz="1200" spc="264" kern="0" dirty="0">
+            <a:pPr marL="0" indent="0" algn="l">
+              <a:buNone/>
+            </a:pPr>
+            <a:r>
+              <a:rPr lang="en-US" sz="1200" kern="0" spc="264" dirty="0">
                 <a:solidFill>
                   <a:srgbClr val="969696"/>
                 </a:solidFill>
@@ -13006,6 +12220,7 @@
         <a:solidFill>
           <a:srgbClr val="000000"/>
         </a:solidFill>
+        <a:effectLst/>
       </p:bgPr>
     </p:bg>
     <p:spTree>
@@ -13045,11 +12260,11 @@
           </a:bodyPr>
           <a:lstStyle/>
           <a:p>
-            <a:pPr algn="l" indent="0" marL="0">
-              <a:buNone/>
-            </a:pPr>
-            <a:r>
-              <a:rPr lang="en-US" sz="1500" spc="450" kern="0" dirty="0">
+            <a:pPr marL="0" indent="0" algn="l">
+              <a:buNone/>
+            </a:pPr>
+            <a:r>
+              <a:rPr lang="en-US" sz="1500" kern="0" spc="450" dirty="0">
                 <a:solidFill>
                   <a:srgbClr val="36CDFF"/>
                 </a:solidFill>
@@ -13086,7 +12301,7 @@
           </a:bodyPr>
           <a:lstStyle/>
           <a:p>
-            <a:pPr algn="l" indent="0" marL="0">
+            <a:pPr marL="0" indent="0" algn="l">
               <a:lnSpc>
                 <a:spcPct val="78675"/>
               </a:lnSpc>
@@ -13128,6 +12343,13 @@
           </a:solidFill>
           <a:ln/>
         </p:spPr>
+        <p:txBody>
+          <a:bodyPr/>
+          <a:lstStyle/>
+          <a:p>
+            <a:endParaRPr lang="en-US"/>
+          </a:p>
+        </p:txBody>
       </p:sp>
       <p:sp>
         <p:nvSpPr>
@@ -13152,11 +12374,11 @@
           </a:bodyPr>
           <a:lstStyle/>
           <a:p>
-            <a:pPr algn="l" indent="0" marL="0">
-              <a:buNone/>
-            </a:pPr>
-            <a:r>
-              <a:rPr lang="en-US" sz="1350" spc="135" kern="0" dirty="0">
+            <a:pPr marL="0" indent="0" algn="l">
+              <a:buNone/>
+            </a:pPr>
+            <a:r>
+              <a:rPr lang="en-US" sz="1350" kern="0" spc="135" dirty="0">
                 <a:solidFill>
                   <a:srgbClr val="FD7EF5"/>
                 </a:solidFill>
@@ -13193,11 +12415,11 @@
           </a:bodyPr>
           <a:lstStyle/>
           <a:p>
-            <a:pPr algn="l" indent="0" marL="0">
-              <a:buNone/>
-            </a:pPr>
-            <a:r>
-              <a:rPr lang="en-US" sz="1350" spc="135" kern="0" dirty="0">
+            <a:pPr marL="0" indent="0" algn="l">
+              <a:buNone/>
+            </a:pPr>
+            <a:r>
+              <a:rPr lang="en-US" sz="1350" kern="0" spc="135" dirty="0">
                 <a:solidFill>
                   <a:srgbClr val="969696"/>
                 </a:solidFill>
@@ -13232,6 +12454,13 @@
           </a:solidFill>
           <a:ln/>
         </p:spPr>
+        <p:txBody>
+          <a:bodyPr/>
+          <a:lstStyle/>
+          <a:p>
+            <a:endParaRPr lang="en-US"/>
+          </a:p>
+        </p:txBody>
       </p:sp>
       <p:sp>
         <p:nvSpPr>
@@ -13256,7 +12485,7 @@
           </a:bodyPr>
           <a:lstStyle/>
           <a:p>
-            <a:pPr algn="l" indent="0" marL="0">
+            <a:pPr marL="0" indent="0" algn="l">
               <a:lnSpc>
                 <a:spcPct val="116379"/>
               </a:lnSpc>
@@ -13273,12 +12502,6 @@
               </a:rPr>
               <a:t>JFrog </a:t>
             </a:r>
-            <a:pPr algn="l" indent="0" marL="0">
-              <a:lnSpc>
-                <a:spcPct val="116379"/>
-              </a:lnSpc>
-              <a:buNone/>
-            </a:pPr>
             <a:r>
               <a:rPr lang="en-US" sz="1875" b="1" dirty="0">
                 <a:solidFill>
@@ -13315,6 +12538,13 @@
           </a:solidFill>
           <a:ln/>
         </p:spPr>
+        <p:txBody>
+          <a:bodyPr/>
+          <a:lstStyle/>
+          <a:p>
+            <a:endParaRPr lang="en-US"/>
+          </a:p>
+        </p:txBody>
       </p:sp>
       <p:sp>
         <p:nvSpPr>
@@ -13339,7 +12569,7 @@
           </a:bodyPr>
           <a:lstStyle/>
           <a:p>
-            <a:pPr algn="l" indent="0" marL="0">
+            <a:pPr marL="0" indent="0" algn="l">
               <a:lnSpc>
                 <a:spcPct val="116379"/>
               </a:lnSpc>
@@ -13356,12 +12586,6 @@
               </a:rPr>
               <a:t>100+ </a:t>
             </a:r>
-            <a:pPr algn="l" indent="0" marL="0">
-              <a:lnSpc>
-                <a:spcPct val="116379"/>
-              </a:lnSpc>
-              <a:buNone/>
-            </a:pPr>
             <a:r>
               <a:rPr lang="en-US" sz="1875" dirty="0">
                 <a:solidFill>
@@ -13398,6 +12622,13 @@
           </a:solidFill>
           <a:ln/>
         </p:spPr>
+        <p:txBody>
+          <a:bodyPr/>
+          <a:lstStyle/>
+          <a:p>
+            <a:endParaRPr lang="en-US"/>
+          </a:p>
+        </p:txBody>
       </p:sp>
       <p:sp>
         <p:nvSpPr>
@@ -13422,7 +12653,7 @@
           </a:bodyPr>
           <a:lstStyle/>
           <a:p>
-            <a:pPr algn="l" indent="0" marL="0">
+            <a:pPr marL="0" indent="0" algn="l">
               <a:lnSpc>
                 <a:spcPct val="116379"/>
               </a:lnSpc>
@@ -13439,12 +12670,6 @@
               </a:rPr>
               <a:t>nullifAI </a:t>
             </a:r>
-            <a:pPr algn="l" indent="0" marL="0">
-              <a:lnSpc>
-                <a:spcPct val="116379"/>
-              </a:lnSpc>
-              <a:buNone/>
-            </a:pPr>
             <a:r>
               <a:rPr lang="en-US" sz="1875" b="1" dirty="0">
                 <a:solidFill>
@@ -13481,6 +12706,13 @@
           </a:solidFill>
           <a:ln/>
         </p:spPr>
+        <p:txBody>
+          <a:bodyPr/>
+          <a:lstStyle/>
+          <a:p>
+            <a:endParaRPr lang="en-US"/>
+          </a:p>
+        </p:txBody>
       </p:sp>
       <p:sp>
         <p:nvSpPr>
@@ -13505,7 +12737,7 @@
           </a:bodyPr>
           <a:lstStyle/>
           <a:p>
-            <a:pPr algn="l" indent="0" marL="0">
+            <a:pPr marL="0" indent="0" algn="l">
               <a:lnSpc>
                 <a:spcPct val="116379"/>
               </a:lnSpc>
@@ -13522,12 +12754,6 @@
               </a:rPr>
               <a:t>Malicious pickles that </a:t>
             </a:r>
-            <a:pPr algn="l" indent="0" marL="0">
-              <a:lnSpc>
-                <a:spcPct val="116379"/>
-              </a:lnSpc>
-              <a:buNone/>
-            </a:pPr>
             <a:r>
               <a:rPr lang="en-US" sz="1875" b="1" dirty="0">
                 <a:solidFill>
@@ -13539,12 +12765,6 @@
               </a:rPr>
               <a:t>evade Hugging Face’s PickleScan </a:t>
             </a:r>
-            <a:pPr algn="l" indent="0" marL="0">
-              <a:lnSpc>
-                <a:spcPct val="116379"/>
-              </a:lnSpc>
-              <a:buNone/>
-            </a:pPr>
             <a:r>
               <a:rPr lang="en-US" sz="1875" dirty="0">
                 <a:solidFill>
@@ -13581,6 +12801,13 @@
           </a:solidFill>
           <a:ln/>
         </p:spPr>
+        <p:txBody>
+          <a:bodyPr/>
+          <a:lstStyle/>
+          <a:p>
+            <a:endParaRPr lang="en-US"/>
+          </a:p>
+        </p:txBody>
       </p:sp>
       <p:sp>
         <p:nvSpPr>
@@ -13605,7 +12832,7 @@
           </a:bodyPr>
           <a:lstStyle/>
           <a:p>
-            <a:pPr algn="l" indent="0" marL="0">
+            <a:pPr marL="0" indent="0" algn="l">
               <a:lnSpc>
                 <a:spcPct val="116379"/>
               </a:lnSpc>
@@ -13622,12 +12849,6 @@
               </a:rPr>
               <a:t>postmark-mcp </a:t>
             </a:r>
-            <a:pPr algn="l" indent="0" marL="0">
-              <a:lnSpc>
-                <a:spcPct val="116379"/>
-              </a:lnSpc>
-              <a:buNone/>
-            </a:pPr>
             <a:r>
               <a:rPr lang="en-US" sz="1875" b="1" dirty="0">
                 <a:solidFill>
@@ -13664,6 +12885,13 @@
           </a:solidFill>
           <a:ln/>
         </p:spPr>
+        <p:txBody>
+          <a:bodyPr/>
+          <a:lstStyle/>
+          <a:p>
+            <a:endParaRPr lang="en-US"/>
+          </a:p>
+        </p:txBody>
       </p:sp>
       <p:sp>
         <p:nvSpPr>
@@ -13688,7 +12916,7 @@
           </a:bodyPr>
           <a:lstStyle/>
           <a:p>
-            <a:pPr algn="l" indent="0" marL="0">
+            <a:pPr marL="0" indent="0" algn="l">
               <a:lnSpc>
                 <a:spcPct val="116379"/>
               </a:lnSpc>
@@ -13711,14 +12939,14 @@
       </p:sp>
       <p:pic>
         <p:nvPicPr>
-          <p:cNvPr id="19" name="Image 0" descr="preencoded.png">    </p:cNvPr>
+          <p:cNvPr id="19" name="Image 0" descr="preencoded.png"/>
           <p:cNvPicPr>
             <a:picLocks noChangeAspect="1"/>
           </p:cNvPicPr>
           <p:nvPr/>
         </p:nvPicPr>
         <p:blipFill>
-          <a:blip r:embed="rId1"/>
+          <a:blip r:embed="rId3"/>
           <a:stretch>
             <a:fillRect/>
           </a:stretch>
@@ -13756,11 +12984,11 @@
           </a:bodyPr>
           <a:lstStyle/>
           <a:p>
-            <a:pPr algn="l" indent="0" marL="0">
-              <a:buNone/>
-            </a:pPr>
-            <a:r>
-              <a:rPr lang="en-US" sz="1200" spc="264" kern="0" dirty="0">
+            <a:pPr marL="0" indent="0" algn="l">
+              <a:buNone/>
+            </a:pPr>
+            <a:r>
+              <a:rPr lang="en-US" sz="1200" kern="0" spc="264" dirty="0">
                 <a:solidFill>
                   <a:srgbClr val="969696"/>
                 </a:solidFill>
@@ -13790,6 +13018,7 @@
         <a:solidFill>
           <a:srgbClr val="000000"/>
         </a:solidFill>
+        <a:effectLst/>
       </p:bgPr>
     </p:bg>
     <p:spTree>
@@ -13829,11 +13058,11 @@
           </a:bodyPr>
           <a:lstStyle/>
           <a:p>
-            <a:pPr algn="l" indent="0" marL="0">
-              <a:buNone/>
-            </a:pPr>
-            <a:r>
-              <a:rPr lang="en-US" sz="1500" spc="450" kern="0" dirty="0">
+            <a:pPr marL="0" indent="0" algn="l">
+              <a:buNone/>
+            </a:pPr>
+            <a:r>
+              <a:rPr lang="en-US" sz="1500" kern="0" spc="450" dirty="0">
                 <a:solidFill>
                   <a:srgbClr val="36CDFF"/>
                 </a:solidFill>
@@ -13870,7 +13099,7 @@
           </a:bodyPr>
           <a:lstStyle/>
           <a:p>
-            <a:pPr algn="l" indent="0" marL="0">
+            <a:pPr marL="0" indent="0" algn="l">
               <a:lnSpc>
                 <a:spcPct val="78416"/>
               </a:lnSpc>
@@ -13914,7 +13143,7 @@
           </a:bodyPr>
           <a:lstStyle/>
           <a:p>
-            <a:pPr algn="l" indent="0" marL="0">
+            <a:pPr marL="0" indent="0" algn="l">
               <a:lnSpc>
                 <a:spcPct val="125522"/>
               </a:lnSpc>
@@ -13956,6 +13185,13 @@
           </a:solidFill>
           <a:ln/>
         </p:spPr>
+        <p:txBody>
+          <a:bodyPr/>
+          <a:lstStyle/>
+          <a:p>
+            <a:endParaRPr lang="en-US"/>
+          </a:p>
+        </p:txBody>
       </p:sp>
       <p:sp>
         <p:nvSpPr>
@@ -13980,11 +13216,11 @@
           </a:bodyPr>
           <a:lstStyle/>
           <a:p>
-            <a:pPr algn="l" indent="0" marL="0">
-              <a:buNone/>
-            </a:pPr>
-            <a:r>
-              <a:rPr lang="en-US" sz="1350" spc="135" kern="0" dirty="0">
+            <a:pPr marL="0" indent="0" algn="l">
+              <a:buNone/>
+            </a:pPr>
+            <a:r>
+              <a:rPr lang="en-US" sz="1350" kern="0" spc="135" dirty="0">
                 <a:solidFill>
                   <a:srgbClr val="36CDFF"/>
                 </a:solidFill>
@@ -14021,11 +13257,11 @@
           </a:bodyPr>
           <a:lstStyle/>
           <a:p>
-            <a:pPr algn="l" indent="0" marL="0">
-              <a:buNone/>
-            </a:pPr>
-            <a:r>
-              <a:rPr lang="en-US" sz="1350" spc="135" kern="0" dirty="0">
+            <a:pPr marL="0" indent="0" algn="l">
+              <a:buNone/>
+            </a:pPr>
+            <a:r>
+              <a:rPr lang="en-US" sz="1350" kern="0" spc="135" dirty="0">
                 <a:solidFill>
                   <a:srgbClr val="969696"/>
                 </a:solidFill>
@@ -14060,6 +13296,13 @@
           </a:solidFill>
           <a:ln/>
         </p:spPr>
+        <p:txBody>
+          <a:bodyPr/>
+          <a:lstStyle/>
+          <a:p>
+            <a:endParaRPr lang="en-US"/>
+          </a:p>
+        </p:txBody>
       </p:sp>
       <p:sp>
         <p:nvSpPr>
@@ -14084,7 +13327,7 @@
           </a:bodyPr>
           <a:lstStyle/>
           <a:p>
-            <a:pPr algn="l" indent="0" marL="0">
+            <a:pPr marL="0" indent="0" algn="l">
               <a:lnSpc>
                 <a:spcPct val="116379"/>
               </a:lnSpc>
@@ -14126,6 +13369,13 @@
           </a:solidFill>
           <a:ln/>
         </p:spPr>
+        <p:txBody>
+          <a:bodyPr/>
+          <a:lstStyle/>
+          <a:p>
+            <a:endParaRPr lang="en-US"/>
+          </a:p>
+        </p:txBody>
       </p:sp>
       <p:sp>
         <p:nvSpPr>
@@ -14150,7 +13400,7 @@
           </a:bodyPr>
           <a:lstStyle/>
           <a:p>
-            <a:pPr algn="l" indent="0" marL="0">
+            <a:pPr marL="0" indent="0" algn="l">
               <a:lnSpc>
                 <a:spcPct val="116379"/>
               </a:lnSpc>
@@ -14192,6 +13442,13 @@
           </a:solidFill>
           <a:ln/>
         </p:spPr>
+        <p:txBody>
+          <a:bodyPr/>
+          <a:lstStyle/>
+          <a:p>
+            <a:endParaRPr lang="en-US"/>
+          </a:p>
+        </p:txBody>
       </p:sp>
       <p:sp>
         <p:nvSpPr>
@@ -14216,7 +13473,7 @@
           </a:bodyPr>
           <a:lstStyle/>
           <a:p>
-            <a:pPr algn="l" indent="0" marL="0">
+            <a:pPr marL="0" indent="0" algn="l">
               <a:lnSpc>
                 <a:spcPct val="116379"/>
               </a:lnSpc>
@@ -14258,6 +13515,13 @@
           </a:solidFill>
           <a:ln/>
         </p:spPr>
+        <p:txBody>
+          <a:bodyPr/>
+          <a:lstStyle/>
+          <a:p>
+            <a:endParaRPr lang="en-US"/>
+          </a:p>
+        </p:txBody>
       </p:sp>
       <p:sp>
         <p:nvSpPr>
@@ -14282,7 +13546,7 @@
           </a:bodyPr>
           <a:lstStyle/>
           <a:p>
-            <a:pPr algn="l" indent="0" marL="0">
+            <a:pPr marL="0" indent="0" algn="l">
               <a:lnSpc>
                 <a:spcPct val="116379"/>
               </a:lnSpc>
@@ -14324,6 +13588,13 @@
           </a:solidFill>
           <a:ln/>
         </p:spPr>
+        <p:txBody>
+          <a:bodyPr/>
+          <a:lstStyle/>
+          <a:p>
+            <a:endParaRPr lang="en-US"/>
+          </a:p>
+        </p:txBody>
       </p:sp>
       <p:sp>
         <p:nvSpPr>
@@ -14348,7 +13619,7 @@
           </a:bodyPr>
           <a:lstStyle/>
           <a:p>
-            <a:pPr algn="l" indent="0" marL="0">
+            <a:pPr marL="0" indent="0" algn="l">
               <a:lnSpc>
                 <a:spcPct val="116379"/>
               </a:lnSpc>
@@ -14390,6 +13661,13 @@
           </a:solidFill>
           <a:ln/>
         </p:spPr>
+        <p:txBody>
+          <a:bodyPr/>
+          <a:lstStyle/>
+          <a:p>
+            <a:endParaRPr lang="en-US"/>
+          </a:p>
+        </p:txBody>
       </p:sp>
       <p:sp>
         <p:nvSpPr>
@@ -14414,7 +13692,7 @@
           </a:bodyPr>
           <a:lstStyle/>
           <a:p>
-            <a:pPr algn="l" indent="0" marL="0">
+            <a:pPr marL="0" indent="0" algn="l">
               <a:lnSpc>
                 <a:spcPct val="116379"/>
               </a:lnSpc>
@@ -14458,7 +13736,7 @@
           </a:bodyPr>
           <a:lstStyle/>
           <a:p>
-            <a:pPr algn="l" indent="0" marL="0">
+            <a:pPr marL="0" indent="0" algn="l">
               <a:buNone/>
             </a:pPr>
             <a:r>
@@ -14478,14 +13756,14 @@
       </p:sp>
       <p:pic>
         <p:nvPicPr>
-          <p:cNvPr id="21" name="Image 0" descr="preencoded.png">    </p:cNvPr>
+          <p:cNvPr id="21" name="Image 0" descr="preencoded.png"/>
           <p:cNvPicPr>
             <a:picLocks noChangeAspect="1"/>
           </p:cNvPicPr>
           <p:nvPr/>
         </p:nvPicPr>
         <p:blipFill>
-          <a:blip r:embed="rId1"/>
+          <a:blip r:embed="rId3"/>
           <a:stretch>
             <a:fillRect/>
           </a:stretch>
@@ -14523,11 +13801,11 @@
           </a:bodyPr>
           <a:lstStyle/>
           <a:p>
-            <a:pPr algn="l" indent="0" marL="0">
-              <a:buNone/>
-            </a:pPr>
-            <a:r>
-              <a:rPr lang="en-US" sz="1200" spc="264" kern="0" dirty="0">
+            <a:pPr marL="0" indent="0" algn="l">
+              <a:buNone/>
+            </a:pPr>
+            <a:r>
+              <a:rPr lang="en-US" sz="1200" kern="0" spc="264" dirty="0">
                 <a:solidFill>
                   <a:srgbClr val="969696"/>
                 </a:solidFill>
@@ -14557,6 +13835,7 @@
         <a:solidFill>
           <a:srgbClr val="000000"/>
         </a:solidFill>
+        <a:effectLst/>
       </p:bgPr>
     </p:bg>
     <p:spTree>
@@ -14596,11 +13875,11 @@
           </a:bodyPr>
           <a:lstStyle/>
           <a:p>
-            <a:pPr algn="l" indent="0" marL="0">
-              <a:buNone/>
-            </a:pPr>
-            <a:r>
-              <a:rPr lang="en-US" sz="1500" spc="450" kern="0" dirty="0">
+            <a:pPr marL="0" indent="0" algn="l">
+              <a:buNone/>
+            </a:pPr>
+            <a:r>
+              <a:rPr lang="en-US" sz="1500" kern="0" spc="450" dirty="0">
                 <a:solidFill>
                   <a:srgbClr val="36CDFF"/>
                 </a:solidFill>
@@ -14637,7 +13916,7 @@
           </a:bodyPr>
           <a:lstStyle/>
           <a:p>
-            <a:pPr algn="l" indent="0" marL="0">
+            <a:pPr marL="0" indent="0" algn="l">
               <a:lnSpc>
                 <a:spcPct val="78113"/>
               </a:lnSpc>
@@ -14681,7 +13960,7 @@
           </a:bodyPr>
           <a:lstStyle/>
           <a:p>
-            <a:pPr algn="l" indent="0" marL="0">
+            <a:pPr marL="0" indent="0" algn="l">
               <a:lnSpc>
                 <a:spcPct val="125522"/>
               </a:lnSpc>
@@ -14698,12 +13977,6 @@
               </a:rPr>
               <a:t>Python’s built-in object serialization. Unpickling </a:t>
             </a:r>
-            <a:pPr algn="l" indent="0" marL="0">
-              <a:lnSpc>
-                <a:spcPct val="125522"/>
-              </a:lnSpc>
-              <a:buNone/>
-            </a:pPr>
             <a:r>
               <a:rPr lang="en-US" sz="2175" b="1" dirty="0">
                 <a:solidFill>
@@ -14715,12 +13988,6 @@
               </a:rPr>
               <a:t>executes </a:t>
             </a:r>
-            <a:pPr algn="l" indent="0" marL="0">
-              <a:lnSpc>
-                <a:spcPct val="125522"/>
-              </a:lnSpc>
-              <a:buNone/>
-            </a:pPr>
             <a:r>
               <a:rPr lang="en-US" sz="2175" dirty="0">
                 <a:solidFill>
@@ -14764,6 +14031,13 @@
             <a:prstDash val="solid"/>
           </a:ln>
         </p:spPr>
+        <p:txBody>
+          <a:bodyPr/>
+          <a:lstStyle/>
+          <a:p>
+            <a:endParaRPr lang="en-US"/>
+          </a:p>
+        </p:txBody>
       </p:sp>
       <p:sp>
         <p:nvSpPr>
@@ -14786,6 +14060,13 @@
           </a:solidFill>
           <a:ln/>
         </p:spPr>
+        <p:txBody>
+          <a:bodyPr/>
+          <a:lstStyle/>
+          <a:p>
+            <a:endParaRPr lang="en-US"/>
+          </a:p>
+        </p:txBody>
       </p:sp>
       <p:sp>
         <p:nvSpPr>
@@ -14806,6 +14087,13 @@
           </a:solidFill>
           <a:ln/>
         </p:spPr>
+        <p:txBody>
+          <a:bodyPr/>
+          <a:lstStyle/>
+          <a:p>
+            <a:endParaRPr lang="en-US"/>
+          </a:p>
+        </p:txBody>
       </p:sp>
       <p:sp>
         <p:nvSpPr>
@@ -14826,6 +14114,13 @@
           </a:solidFill>
           <a:ln/>
         </p:spPr>
+        <p:txBody>
+          <a:bodyPr/>
+          <a:lstStyle/>
+          <a:p>
+            <a:endParaRPr lang="en-US"/>
+          </a:p>
+        </p:txBody>
       </p:sp>
       <p:sp>
         <p:nvSpPr>
@@ -14846,6 +14141,13 @@
           </a:solidFill>
           <a:ln/>
         </p:spPr>
+        <p:txBody>
+          <a:bodyPr/>
+          <a:lstStyle/>
+          <a:p>
+            <a:endParaRPr lang="en-US"/>
+          </a:p>
+        </p:txBody>
       </p:sp>
       <p:sp>
         <p:nvSpPr>
@@ -14870,7 +14172,7 @@
           </a:bodyPr>
           <a:lstStyle/>
           <a:p>
-            <a:pPr algn="l" indent="0" marL="0">
+            <a:pPr marL="0" indent="0" algn="l">
               <a:buNone/>
             </a:pPr>
             <a:r>
@@ -14911,12 +14213,6 @@
           </a:bodyPr>
           <a:lstStyle/>
           <a:p>
-            <a:pPr algn="l" indent="0" marL="0">
-              <a:lnSpc>
-                <a:spcPct val="144375"/>
-              </a:lnSpc>
-              <a:buNone/>
-            </a:pPr>
             <a:r>
               <a:rPr lang="en-US" sz="1575" dirty="0">
                 <a:solidFill>
@@ -14928,15 +14224,8 @@
               </a:rPr>
               <a:t>class _Poisoned:</a:t>
             </a:r>
-            <a:endParaRPr lang="en-US" sz="1575" dirty="0"/>
-          </a:p>
-          <a:p>
-            <a:pPr algn="l" indent="0" marL="0">
-              <a:lnSpc>
-                <a:spcPct val="144375"/>
-              </a:lnSpc>
-              <a:buNone/>
-            </a:pPr>
+          </a:p>
+          <a:p>
             <a:r>
               <a:rPr lang="en-US" sz="1575" dirty="0">
                 <a:solidFill>
@@ -14946,34 +14235,33 @@
                 <a:ea typeface="Courier New" pitchFamily="34" charset="-122"/>
                 <a:cs typeface="Courier New" pitchFamily="34" charset="-120"/>
               </a:rPr>
-              <a:t>    def  </a:t>
-            </a:r>
-            <a:endParaRPr lang="en-US" sz="1575" dirty="0"/>
-          </a:p>
-          <a:p>
-            <a:pPr algn="l" indent="0" marL="0">
-              <a:lnSpc>
-                <a:spcPct val="144375"/>
-              </a:lnSpc>
-              <a:buNone/>
-            </a:pPr>
+              <a:t>    def __reduce__(self):</a:t>
+            </a:r>
+          </a:p>
+          <a:p>
             <a:r>
               <a:rPr lang="en-US" sz="1575" dirty="0">
                 <a:solidFill>
-                  <a:srgbClr val="FD7EF5"/>
+                  <a:srgbClr val="C8C8C8"/>
                 </a:solidFill>
                 <a:latin typeface="Courier New" pitchFamily="34" charset="0"/>
                 <a:ea typeface="Courier New" pitchFamily="34" charset="-122"/>
                 <a:cs typeface="Courier New" pitchFamily="34" charset="-120"/>
               </a:rPr>
-              <a:t>__reduce__ </a:t>
-            </a:r>
-            <a:pPr algn="l" indent="0" marL="0">
-              <a:lnSpc>
-                <a:spcPct val="144375"/>
-              </a:lnSpc>
-              <a:buNone/>
-            </a:pPr>
+              <a:t>        return (os.system, ("echo eiger-m4-rce",))</a:t>
+            </a:r>
+          </a:p>
+          <a:p>
+            <a:endParaRPr lang="en-US" sz="1575" dirty="0">
+              <a:solidFill>
+                <a:srgbClr val="C8C8C8"/>
+              </a:solidFill>
+              <a:latin typeface="Courier New" pitchFamily="34" charset="0"/>
+              <a:ea typeface="Courier New" pitchFamily="34" charset="-122"/>
+              <a:cs typeface="Courier New" pitchFamily="34" charset="-120"/>
+            </a:endParaRPr>
+          </a:p>
+          <a:p>
             <a:r>
               <a:rPr lang="en-US" sz="1575" dirty="0">
                 <a:solidFill>
@@ -14983,108 +14271,21 @@
                 <a:ea typeface="Courier New" pitchFamily="34" charset="-122"/>
                 <a:cs typeface="Courier New" pitchFamily="34" charset="-120"/>
               </a:rPr>
-              <a:t>(self):</a:t>
-            </a:r>
-            <a:endParaRPr lang="en-US" sz="1575" dirty="0"/>
-          </a:p>
-          <a:p>
-            <a:pPr algn="l" indent="0" marL="0">
-              <a:lnSpc>
-                <a:spcPct val="144375"/>
-              </a:lnSpc>
-              <a:buNone/>
-            </a:pPr>
-            <a:r>
-              <a:rPr lang="en-US" sz="1575" dirty="0">
-                <a:solidFill>
-                  <a:srgbClr val="C8C8C8"/>
-                </a:solidFill>
-                <a:latin typeface="Courier New" pitchFamily="34" charset="0"/>
-                <a:ea typeface="Courier New" pitchFamily="34" charset="-122"/>
-                <a:cs typeface="Courier New" pitchFamily="34" charset="-120"/>
-              </a:rPr>
-              <a:t>        return ( </a:t>
-            </a:r>
-            <a:endParaRPr lang="en-US" sz="1575" dirty="0"/>
-          </a:p>
-          <a:p>
-            <a:pPr algn="l" indent="0" marL="0">
-              <a:lnSpc>
-                <a:spcPct val="144375"/>
-              </a:lnSpc>
-              <a:buNone/>
-            </a:pPr>
-            <a:r>
-              <a:rPr lang="en-US" sz="1575" dirty="0">
-                <a:solidFill>
-                  <a:srgbClr val="FD7EF5"/>
-                </a:solidFill>
-                <a:latin typeface="Courier New" pitchFamily="34" charset="0"/>
-                <a:ea typeface="Courier New" pitchFamily="34" charset="-122"/>
-                <a:cs typeface="Courier New" pitchFamily="34" charset="-120"/>
-              </a:rPr>
-              <a:t>os.system </a:t>
-            </a:r>
-            <a:pPr algn="l" indent="0" marL="0">
-              <a:lnSpc>
-                <a:spcPct val="144375"/>
-              </a:lnSpc>
-              <a:buNone/>
-            </a:pPr>
-            <a:r>
-              <a:rPr lang="en-US" sz="1575" dirty="0">
-                <a:solidFill>
-                  <a:srgbClr val="C8C8C8"/>
-                </a:solidFill>
-                <a:latin typeface="Courier New" pitchFamily="34" charset="0"/>
-                <a:ea typeface="Courier New" pitchFamily="34" charset="-122"/>
-                <a:cs typeface="Courier New" pitchFamily="34" charset="-120"/>
-              </a:rPr>
-              <a:t>, ("echo eiger-m4-rce",))</a:t>
-            </a:r>
-            <a:endParaRPr lang="en-US" sz="1575" dirty="0"/>
-          </a:p>
-          <a:p>
-            <a:pPr algn="l" indent="0" marL="0">
-              <a:lnSpc>
-                <a:spcPct val="144375"/>
-              </a:lnSpc>
-              <a:buNone/>
-            </a:pPr>
-            <a:endParaRPr lang="en-US" sz="1575" dirty="0"/>
-          </a:p>
-          <a:p>
-            <a:pPr algn="l" indent="0" marL="0">
-              <a:lnSpc>
-                <a:spcPct val="144375"/>
-              </a:lnSpc>
-              <a:buNone/>
-            </a:pPr>
-            <a:r>
-              <a:rPr lang="en-US" sz="1575" dirty="0">
-                <a:solidFill>
-                  <a:srgbClr val="C8C8C8"/>
-                </a:solidFill>
-                <a:latin typeface="Courier New" pitchFamily="34" charset="0"/>
-                <a:ea typeface="Courier New" pitchFamily="34" charset="-122"/>
-                <a:cs typeface="Courier New" pitchFamily="34" charset="-120"/>
-              </a:rPr>
-              <a:t>out.write_bytes(pickle.dumps(_Poisoned(), protocol=4))   # -&gt; community_model.pkl</a:t>
-            </a:r>
-            <a:endParaRPr lang="en-US" sz="1575" dirty="0"/>
+              <a:t>out.write_bytes(pickle.dumps(_Poisoned(), protocol=4))   # → community_model.pkl</a:t>
+            </a:r>
           </a:p>
         </p:txBody>
       </p:sp>
       <p:pic>
         <p:nvPicPr>
-          <p:cNvPr id="12" name="Image 0" descr="preencoded.png">    </p:cNvPr>
+          <p:cNvPr id="12" name="Image 0" descr="preencoded.png"/>
           <p:cNvPicPr>
             <a:picLocks noChangeAspect="1"/>
           </p:cNvPicPr>
           <p:nvPr/>
         </p:nvPicPr>
         <p:blipFill>
-          <a:blip r:embed="rId1"/>
+          <a:blip r:embed="rId3"/>
           <a:stretch>
             <a:fillRect/>
           </a:stretch>
@@ -15122,11 +14323,11 @@
           </a:bodyPr>
           <a:lstStyle/>
           <a:p>
-            <a:pPr algn="l" indent="0" marL="0">
-              <a:buNone/>
-            </a:pPr>
-            <a:r>
-              <a:rPr lang="en-US" sz="1200" spc="264" kern="0" dirty="0">
+            <a:pPr marL="0" indent="0" algn="l">
+              <a:buNone/>
+            </a:pPr>
+            <a:r>
+              <a:rPr lang="en-US" sz="1200" kern="0" spc="264" dirty="0">
                 <a:solidFill>
                   <a:srgbClr val="969696"/>
                 </a:solidFill>
@@ -15156,6 +14357,7 @@
         <a:solidFill>
           <a:srgbClr val="000000"/>
         </a:solidFill>
+        <a:effectLst/>
       </p:bgPr>
     </p:bg>
     <p:spTree>
@@ -15195,11 +14397,11 @@
           </a:bodyPr>
           <a:lstStyle/>
           <a:p>
-            <a:pPr algn="l" indent="0" marL="0">
-              <a:buNone/>
-            </a:pPr>
-            <a:r>
-              <a:rPr lang="en-US" sz="1500" spc="450" kern="0" dirty="0">
+            <a:pPr marL="0" indent="0" algn="l">
+              <a:buNone/>
+            </a:pPr>
+            <a:r>
+              <a:rPr lang="en-US" sz="1500" kern="0" spc="450" dirty="0">
                 <a:solidFill>
                   <a:srgbClr val="36CDFF"/>
                 </a:solidFill>
@@ -15236,7 +14438,7 @@
           </a:bodyPr>
           <a:lstStyle/>
           <a:p>
-            <a:pPr algn="l" indent="0" marL="0">
+            <a:pPr marL="0" indent="0" algn="l">
               <a:lnSpc>
                 <a:spcPct val="78416"/>
               </a:lnSpc>
@@ -15285,6 +14487,13 @@
             <a:prstDash val="solid"/>
           </a:ln>
         </p:spPr>
+        <p:txBody>
+          <a:bodyPr/>
+          <a:lstStyle/>
+          <a:p>
+            <a:endParaRPr lang="en-US"/>
+          </a:p>
+        </p:txBody>
       </p:sp>
       <p:sp>
         <p:nvSpPr>
@@ -15307,6 +14516,13 @@
           </a:solidFill>
           <a:ln/>
         </p:spPr>
+        <p:txBody>
+          <a:bodyPr/>
+          <a:lstStyle/>
+          <a:p>
+            <a:endParaRPr lang="en-US"/>
+          </a:p>
+        </p:txBody>
       </p:sp>
       <p:sp>
         <p:nvSpPr>
@@ -15327,6 +14543,13 @@
           </a:solidFill>
           <a:ln/>
         </p:spPr>
+        <p:txBody>
+          <a:bodyPr/>
+          <a:lstStyle/>
+          <a:p>
+            <a:endParaRPr lang="en-US"/>
+          </a:p>
+        </p:txBody>
       </p:sp>
       <p:sp>
         <p:nvSpPr>
@@ -15347,6 +14570,13 @@
           </a:solidFill>
           <a:ln/>
         </p:spPr>
+        <p:txBody>
+          <a:bodyPr/>
+          <a:lstStyle/>
+          <a:p>
+            <a:endParaRPr lang="en-US"/>
+          </a:p>
+        </p:txBody>
       </p:sp>
       <p:sp>
         <p:nvSpPr>
@@ -15367,6 +14597,13 @@
           </a:solidFill>
           <a:ln/>
         </p:spPr>
+        <p:txBody>
+          <a:bodyPr/>
+          <a:lstStyle/>
+          <a:p>
+            <a:endParaRPr lang="en-US"/>
+          </a:p>
+        </p:txBody>
       </p:sp>
       <p:sp>
         <p:nvSpPr>
@@ -15391,7 +14628,7 @@
           </a:bodyPr>
           <a:lstStyle/>
           <a:p>
-            <a:pPr algn="l" indent="0" marL="0">
+            <a:pPr marL="0" indent="0" algn="l">
               <a:buNone/>
             </a:pPr>
             <a:r>
@@ -15432,7 +14669,7 @@
           </a:bodyPr>
           <a:lstStyle/>
           <a:p>
-            <a:pPr algn="l" indent="0" marL="0">
+            <a:pPr marL="0" indent="0" algn="l">
               <a:lnSpc>
                 <a:spcPct val="145424"/>
               </a:lnSpc>
@@ -15449,12 +14686,6 @@
               </a:rPr>
               <a:t>pickle.load(f)      # -&gt; </a:t>
             </a:r>
-            <a:pPr algn="l" indent="0" marL="0">
-              <a:lnSpc>
-                <a:spcPct val="145424"/>
-              </a:lnSpc>
-              <a:buNone/>
-            </a:pPr>
             <a:r>
               <a:rPr lang="en-US" sz="1950" dirty="0">
                 <a:solidFill>
@@ -15493,7 +14724,7 @@
           </a:bodyPr>
           <a:lstStyle/>
           <a:p>
-            <a:pPr algn="l" indent="0" marL="0">
+            <a:pPr marL="0" indent="0" algn="l">
               <a:lnSpc>
                 <a:spcPct val="125522"/>
               </a:lnSpc>
@@ -15510,12 +14741,6 @@
               </a:rPr>
               <a:t>No inference. No prompt. No model ever executed. </a:t>
             </a:r>
-            <a:pPr algn="l" indent="0" marL="0">
-              <a:lnSpc>
-                <a:spcPct val="125522"/>
-              </a:lnSpc>
-              <a:buNone/>
-            </a:pPr>
             <a:r>
               <a:rPr lang="en-US" sz="2175" b="1" dirty="0">
                 <a:solidFill>
@@ -15527,12 +14752,6 @@
               </a:rPr>
               <a:t>The file loaded — that was enough. </a:t>
             </a:r>
-            <a:pPr algn="l" indent="0" marL="0">
-              <a:lnSpc>
-                <a:spcPct val="125522"/>
-              </a:lnSpc>
-              <a:buNone/>
-            </a:pPr>
             <a:r>
               <a:rPr lang="en-US" sz="2175" dirty="0">
                 <a:solidFill>
@@ -15550,14 +14769,14 @@
       </p:sp>
       <p:pic>
         <p:nvPicPr>
-          <p:cNvPr id="12" name="Image 0" descr="preencoded.png">    </p:cNvPr>
+          <p:cNvPr id="12" name="Image 0" descr="preencoded.png"/>
           <p:cNvPicPr>
             <a:picLocks noChangeAspect="1"/>
           </p:cNvPicPr>
           <p:nvPr/>
         </p:nvPicPr>
         <p:blipFill>
-          <a:blip r:embed="rId1"/>
+          <a:blip r:embed="rId3"/>
           <a:stretch>
             <a:fillRect/>
           </a:stretch>
@@ -15595,11 +14814,11 @@
           </a:bodyPr>
           <a:lstStyle/>
           <a:p>
-            <a:pPr algn="l" indent="0" marL="0">
-              <a:buNone/>
-            </a:pPr>
-            <a:r>
-              <a:rPr lang="en-US" sz="1200" spc="264" kern="0" dirty="0">
+            <a:pPr marL="0" indent="0" algn="l">
+              <a:buNone/>
+            </a:pPr>
+            <a:r>
+              <a:rPr lang="en-US" sz="1200" kern="0" spc="264" dirty="0">
                 <a:solidFill>
                   <a:srgbClr val="969696"/>
                 </a:solidFill>
@@ -15629,6 +14848,7 @@
         <a:solidFill>
           <a:srgbClr val="000000"/>
         </a:solidFill>
+        <a:effectLst/>
       </p:bgPr>
     </p:bg>
     <p:spTree>
@@ -15668,11 +14888,11 @@
           </a:bodyPr>
           <a:lstStyle/>
           <a:p>
-            <a:pPr algn="l" indent="0" marL="0">
-              <a:buNone/>
-            </a:pPr>
-            <a:r>
-              <a:rPr lang="en-US" sz="1500" spc="450" kern="0" dirty="0">
+            <a:pPr marL="0" indent="0" algn="l">
+              <a:buNone/>
+            </a:pPr>
+            <a:r>
+              <a:rPr lang="en-US" sz="1500" kern="0" spc="450" dirty="0">
                 <a:solidFill>
                   <a:srgbClr val="36CDFF"/>
                 </a:solidFill>
@@ -15680,7 +14900,7 @@
                 <a:ea typeface="Courier New" pitchFamily="34" charset="-122"/>
                 <a:cs typeface="Courier New" pitchFamily="34" charset="-120"/>
               </a:rPr>
-              <a:t>THE MOST USEFUL TABLE IN M4</a:t>
+              <a:t>THE TABLE TO KEEP</a:t>
             </a:r>
             <a:endParaRPr lang="en-US" sz="1500" dirty="0"/>
           </a:p>
@@ -15709,7 +14929,7 @@
           </a:bodyPr>
           <a:lstStyle/>
           <a:p>
-            <a:pPr algn="l" indent="0" marL="0">
+            <a:pPr marL="0" indent="0" algn="l">
               <a:lnSpc>
                 <a:spcPct val="78416"/>
               </a:lnSpc>
@@ -15751,6 +14971,13 @@
           </a:solidFill>
           <a:ln/>
         </p:spPr>
+        <p:txBody>
+          <a:bodyPr/>
+          <a:lstStyle/>
+          <a:p>
+            <a:endParaRPr lang="en-US"/>
+          </a:p>
+        </p:txBody>
       </p:sp>
       <p:sp>
         <p:nvSpPr>
@@ -15775,11 +15002,11 @@
           </a:bodyPr>
           <a:lstStyle/>
           <a:p>
-            <a:pPr algn="l" indent="0" marL="0">
-              <a:buNone/>
-            </a:pPr>
-            <a:r>
-              <a:rPr lang="en-US" sz="1350" spc="135" kern="0" dirty="0">
+            <a:pPr marL="0" indent="0" algn="l">
+              <a:buNone/>
+            </a:pPr>
+            <a:r>
+              <a:rPr lang="en-US" sz="1350" kern="0" spc="135" dirty="0">
                 <a:solidFill>
                   <a:srgbClr val="969696"/>
                 </a:solidFill>
@@ -15816,11 +15043,11 @@
           </a:bodyPr>
           <a:lstStyle/>
           <a:p>
-            <a:pPr algn="l" indent="0" marL="0">
-              <a:buNone/>
-            </a:pPr>
-            <a:r>
-              <a:rPr lang="en-US" sz="1350" spc="135" kern="0" dirty="0">
+            <a:pPr marL="0" indent="0" algn="l">
+              <a:buNone/>
+            </a:pPr>
+            <a:r>
+              <a:rPr lang="en-US" sz="1350" kern="0" spc="135" dirty="0">
                 <a:solidFill>
                   <a:srgbClr val="FD7EF5"/>
                 </a:solidFill>
@@ -15855,6 +15082,13 @@
           </a:solidFill>
           <a:ln/>
         </p:spPr>
+        <p:txBody>
+          <a:bodyPr/>
+          <a:lstStyle/>
+          <a:p>
+            <a:endParaRPr lang="en-US"/>
+          </a:p>
+        </p:txBody>
       </p:sp>
       <p:sp>
         <p:nvSpPr>
@@ -15879,7 +15113,7 @@
           </a:bodyPr>
           <a:lstStyle/>
           <a:p>
-            <a:pPr algn="l" indent="0" marL="0">
+            <a:pPr marL="0" indent="0" algn="l">
               <a:lnSpc>
                 <a:spcPct val="117581"/>
               </a:lnSpc>
@@ -15896,12 +15130,6 @@
               </a:rPr>
               <a:t>.pkl</a:t>
             </a:r>
-            <a:pPr algn="l" indent="0" marL="0">
-              <a:lnSpc>
-                <a:spcPct val="117581"/>
-              </a:lnSpc>
-              <a:buNone/>
-            </a:pPr>
             <a:r>
               <a:rPr lang="en-US" sz="2025" b="1" dirty="0">
                 <a:solidFill>
@@ -15913,12 +15141,6 @@
               </a:rPr>
               <a:t>, </a:t>
             </a:r>
-            <a:pPr algn="l" indent="0" marL="0">
-              <a:lnSpc>
-                <a:spcPct val="117581"/>
-              </a:lnSpc>
-              <a:buNone/>
-            </a:pPr>
             <a:r>
               <a:rPr lang="en-US" sz="2025" b="1" dirty="0">
                 <a:solidFill>
@@ -15955,6 +15177,13 @@
           </a:solidFill>
           <a:ln/>
         </p:spPr>
+        <p:txBody>
+          <a:bodyPr/>
+          <a:lstStyle/>
+          <a:p>
+            <a:endParaRPr lang="en-US"/>
+          </a:p>
+        </p:txBody>
       </p:sp>
       <p:sp>
         <p:nvSpPr>
@@ -15979,7 +15208,7 @@
           </a:bodyPr>
           <a:lstStyle/>
           <a:p>
-            <a:pPr algn="l" indent="0" marL="0">
+            <a:pPr marL="0" indent="0" algn="l">
               <a:lnSpc>
                 <a:spcPct val="117581"/>
               </a:lnSpc>
@@ -16021,6 +15250,13 @@
           </a:solidFill>
           <a:ln/>
         </p:spPr>
+        <p:txBody>
+          <a:bodyPr/>
+          <a:lstStyle/>
+          <a:p>
+            <a:endParaRPr lang="en-US"/>
+          </a:p>
+        </p:txBody>
       </p:sp>
       <p:sp>
         <p:nvSpPr>
@@ -16043,6 +15279,13 @@
           </a:solidFill>
           <a:ln/>
         </p:spPr>
+        <p:txBody>
+          <a:bodyPr/>
+          <a:lstStyle/>
+          <a:p>
+            <a:endParaRPr lang="en-US"/>
+          </a:p>
+        </p:txBody>
       </p:sp>
       <p:sp>
         <p:nvSpPr>
@@ -16067,7 +15310,7 @@
           </a:bodyPr>
           <a:lstStyle/>
           <a:p>
-            <a:pPr algn="l" indent="0" marL="0">
+            <a:pPr marL="0" indent="0" algn="l">
               <a:lnSpc>
                 <a:spcPct val="117581"/>
               </a:lnSpc>
@@ -16084,12 +15327,6 @@
               </a:rPr>
               <a:t>.pt</a:t>
             </a:r>
-            <a:pPr algn="l" indent="0" marL="0">
-              <a:lnSpc>
-                <a:spcPct val="117581"/>
-              </a:lnSpc>
-              <a:buNone/>
-            </a:pPr>
             <a:r>
               <a:rPr lang="en-US" sz="2025" b="1" dirty="0">
                 <a:solidFill>
@@ -16104,12 +15341,6 @@
               </a:rPr>
               <a:t>, </a:t>
             </a:r>
-            <a:pPr algn="l" indent="0" marL="0">
-              <a:lnSpc>
-                <a:spcPct val="117581"/>
-              </a:lnSpc>
-              <a:buNone/>
-            </a:pPr>
             <a:r>
               <a:rPr lang="en-US" sz="2025" b="1" dirty="0">
                 <a:solidFill>
@@ -16121,12 +15352,6 @@
               </a:rPr>
               <a:t>.pth </a:t>
             </a:r>
-            <a:pPr algn="l" indent="0" marL="0">
-              <a:lnSpc>
-                <a:spcPct val="117581"/>
-              </a:lnSpc>
-              <a:buNone/>
-            </a:pPr>
             <a:r>
               <a:rPr lang="en-US" sz="2025" b="1" dirty="0">
                 <a:solidFill>
@@ -16166,6 +15391,13 @@
           </a:solidFill>
           <a:ln/>
         </p:spPr>
+        <p:txBody>
+          <a:bodyPr/>
+          <a:lstStyle/>
+          <a:p>
+            <a:endParaRPr lang="en-US"/>
+          </a:p>
+        </p:txBody>
       </p:sp>
       <p:sp>
         <p:nvSpPr>
@@ -16188,6 +15420,13 @@
           </a:solidFill>
           <a:ln/>
         </p:spPr>
+        <p:txBody>
+          <a:bodyPr/>
+          <a:lstStyle/>
+          <a:p>
+            <a:endParaRPr lang="en-US"/>
+          </a:p>
+        </p:txBody>
       </p:sp>
       <p:sp>
         <p:nvSpPr>
@@ -16212,7 +15451,7 @@
           </a:bodyPr>
           <a:lstStyle/>
           <a:p>
-            <a:pPr algn="l" indent="0" marL="0">
+            <a:pPr marL="0" indent="0" algn="l">
               <a:lnSpc>
                 <a:spcPct val="117581"/>
               </a:lnSpc>
@@ -16229,12 +15468,6 @@
               </a:rPr>
               <a:t>yes </a:t>
             </a:r>
-            <a:pPr algn="l" indent="0" marL="0">
-              <a:lnSpc>
-                <a:spcPct val="117581"/>
-              </a:lnSpc>
-              <a:buNone/>
-            </a:pPr>
             <a:r>
               <a:rPr lang="en-US" sz="2025" dirty="0">
                 <a:solidFill>
@@ -16274,6 +15507,13 @@
           </a:solidFill>
           <a:ln/>
         </p:spPr>
+        <p:txBody>
+          <a:bodyPr/>
+          <a:lstStyle/>
+          <a:p>
+            <a:endParaRPr lang="en-US"/>
+          </a:p>
+        </p:txBody>
       </p:sp>
       <p:sp>
         <p:nvSpPr>
@@ -16298,7 +15538,7 @@
           </a:bodyPr>
           <a:lstStyle/>
           <a:p>
-            <a:pPr algn="l" indent="0" marL="0">
+            <a:pPr marL="0" indent="0" algn="l">
               <a:lnSpc>
                 <a:spcPct val="117581"/>
               </a:lnSpc>
@@ -16315,12 +15555,6 @@
               </a:rPr>
               <a:t>joblib </a:t>
             </a:r>
-            <a:pPr algn="l" indent="0" marL="0">
-              <a:lnSpc>
-                <a:spcPct val="117581"/>
-              </a:lnSpc>
-              <a:buNone/>
-            </a:pPr>
             <a:r>
               <a:rPr lang="en-US" sz="2025" b="1" dirty="0">
                 <a:solidFill>
@@ -16357,6 +15591,13 @@
           </a:solidFill>
           <a:ln/>
         </p:spPr>
+        <p:txBody>
+          <a:bodyPr/>
+          <a:lstStyle/>
+          <a:p>
+            <a:endParaRPr lang="en-US"/>
+          </a:p>
+        </p:txBody>
       </p:sp>
       <p:sp>
         <p:nvSpPr>
@@ -16381,7 +15622,7 @@
           </a:bodyPr>
           <a:lstStyle/>
           <a:p>
-            <a:pPr algn="l" indent="0" marL="0">
+            <a:pPr marL="0" indent="0" algn="l">
               <a:lnSpc>
                 <a:spcPct val="117581"/>
               </a:lnSpc>
@@ -16423,6 +15664,13 @@
           </a:solidFill>
           <a:ln/>
         </p:spPr>
+        <p:txBody>
+          <a:bodyPr/>
+          <a:lstStyle/>
+          <a:p>
+            <a:endParaRPr lang="en-US"/>
+          </a:p>
+        </p:txBody>
       </p:sp>
       <p:sp>
         <p:nvSpPr>
@@ -16447,7 +15695,7 @@
           </a:bodyPr>
           <a:lstStyle/>
           <a:p>
-            <a:pPr algn="l" indent="0" marL="0">
+            <a:pPr marL="0" indent="0" algn="l">
               <a:lnSpc>
                 <a:spcPct val="117581"/>
               </a:lnSpc>
@@ -16464,12 +15712,6 @@
               </a:rPr>
               <a:t>.npy </a:t>
             </a:r>
-            <a:pPr algn="l" indent="0" marL="0">
-              <a:lnSpc>
-                <a:spcPct val="117581"/>
-              </a:lnSpc>
-              <a:buNone/>
-            </a:pPr>
             <a:r>
               <a:rPr lang="en-US" sz="2025" b="1" dirty="0">
                 <a:solidFill>
@@ -16481,12 +15723,6 @@
               </a:rPr>
               <a:t>with </a:t>
             </a:r>
-            <a:pPr algn="l" indent="0" marL="0">
-              <a:lnSpc>
-                <a:spcPct val="117581"/>
-              </a:lnSpc>
-              <a:buNone/>
-            </a:pPr>
             <a:r>
               <a:rPr lang="en-US" sz="2025" b="1" dirty="0">
                 <a:solidFill>
@@ -16523,6 +15759,13 @@
           </a:solidFill>
           <a:ln/>
         </p:spPr>
+        <p:txBody>
+          <a:bodyPr/>
+          <a:lstStyle/>
+          <a:p>
+            <a:endParaRPr lang="en-US"/>
+          </a:p>
+        </p:txBody>
       </p:sp>
       <p:sp>
         <p:nvSpPr>
@@ -16547,7 +15790,7 @@
           </a:bodyPr>
           <a:lstStyle/>
           <a:p>
-            <a:pPr algn="l" indent="0" marL="0">
+            <a:pPr marL="0" indent="0" algn="l">
               <a:lnSpc>
                 <a:spcPct val="117581"/>
               </a:lnSpc>
@@ -16589,6 +15832,13 @@
           </a:solidFill>
           <a:ln/>
         </p:spPr>
+        <p:txBody>
+          <a:bodyPr/>
+          <a:lstStyle/>
+          <a:p>
+            <a:endParaRPr lang="en-US"/>
+          </a:p>
+        </p:txBody>
       </p:sp>
       <p:sp>
         <p:nvSpPr>
@@ -16611,6 +15861,13 @@
           </a:solidFill>
           <a:ln/>
         </p:spPr>
+        <p:txBody>
+          <a:bodyPr/>
+          <a:lstStyle/>
+          <a:p>
+            <a:endParaRPr lang="en-US"/>
+          </a:p>
+        </p:txBody>
       </p:sp>
       <p:sp>
         <p:nvSpPr>
@@ -16635,7 +15892,7 @@
           </a:bodyPr>
           <a:lstStyle/>
           <a:p>
-            <a:pPr algn="l" indent="0" marL="0">
+            <a:pPr marL="0" indent="0" algn="l">
               <a:lnSpc>
                 <a:spcPct val="117581"/>
               </a:lnSpc>
@@ -16677,6 +15934,13 @@
           </a:solidFill>
           <a:ln/>
         </p:spPr>
+        <p:txBody>
+          <a:bodyPr/>
+          <a:lstStyle/>
+          <a:p>
+            <a:endParaRPr lang="en-US"/>
+          </a:p>
+        </p:txBody>
       </p:sp>
       <p:sp>
         <p:nvSpPr>
@@ -16699,6 +15963,13 @@
           </a:solidFill>
           <a:ln/>
         </p:spPr>
+        <p:txBody>
+          <a:bodyPr/>
+          <a:lstStyle/>
+          <a:p>
+            <a:endParaRPr lang="en-US"/>
+          </a:p>
+        </p:txBody>
       </p:sp>
       <p:sp>
         <p:nvSpPr>
@@ -16723,7 +15994,7 @@
           </a:bodyPr>
           <a:lstStyle/>
           <a:p>
-            <a:pPr algn="l" indent="0" marL="0">
+            <a:pPr marL="0" indent="0" algn="l">
               <a:lnSpc>
                 <a:spcPct val="117581"/>
               </a:lnSpc>
@@ -16740,12 +16011,6 @@
               </a:rPr>
               <a:t>no </a:t>
             </a:r>
-            <a:pPr algn="l" indent="0" marL="0">
-              <a:lnSpc>
-                <a:spcPct val="117581"/>
-              </a:lnSpc>
-              <a:buNone/>
-            </a:pPr>
             <a:r>
               <a:rPr lang="en-US" sz="2025" dirty="0">
                 <a:solidFill>
@@ -16766,14 +16031,14 @@
       </p:sp>
       <p:pic>
         <p:nvPicPr>
-          <p:cNvPr id="31" name="Image 0" descr="preencoded.png">    </p:cNvPr>
+          <p:cNvPr id="31" name="Image 0" descr="preencoded.png"/>
           <p:cNvPicPr>
             <a:picLocks noChangeAspect="1"/>
           </p:cNvPicPr>
           <p:nvPr/>
         </p:nvPicPr>
         <p:blipFill>
-          <a:blip r:embed="rId1"/>
+          <a:blip r:embed="rId3"/>
           <a:stretch>
             <a:fillRect/>
           </a:stretch>
@@ -16811,11 +16076,11 @@
           </a:bodyPr>
           <a:lstStyle/>
           <a:p>
-            <a:pPr algn="l" indent="0" marL="0">
-              <a:buNone/>
-            </a:pPr>
-            <a:r>
-              <a:rPr lang="en-US" sz="1200" spc="264" kern="0" dirty="0">
+            <a:pPr marL="0" indent="0" algn="l">
+              <a:buNone/>
+            </a:pPr>
+            <a:r>
+              <a:rPr lang="en-US" sz="1200" kern="0" spc="264" dirty="0">
                 <a:solidFill>
                   <a:srgbClr val="969696"/>
                 </a:solidFill>
@@ -16845,6 +16110,7 @@
         <a:solidFill>
           <a:srgbClr val="000000"/>
         </a:solidFill>
+        <a:effectLst/>
       </p:bgPr>
     </p:bg>
     <p:spTree>
@@ -16884,11 +16150,11 @@
           </a:bodyPr>
           <a:lstStyle/>
           <a:p>
-            <a:pPr algn="l" indent="0" marL="0">
-              <a:buNone/>
-            </a:pPr>
-            <a:r>
-              <a:rPr lang="en-US" sz="1500" spc="450" kern="0" dirty="0">
+            <a:pPr marL="0" indent="0" algn="l">
+              <a:buNone/>
+            </a:pPr>
+            <a:r>
+              <a:rPr lang="en-US" sz="1500" kern="0" spc="450" dirty="0">
                 <a:solidFill>
                   <a:srgbClr val="36CDFF"/>
                 </a:solidFill>
@@ -16925,7 +16191,7 @@
           </a:bodyPr>
           <a:lstStyle/>
           <a:p>
-            <a:pPr algn="l" indent="0" marL="0">
+            <a:pPr marL="0" indent="0" algn="l">
               <a:lnSpc>
                 <a:spcPct val="78261"/>
               </a:lnSpc>
@@ -16974,6 +16240,13 @@
             <a:prstDash val="solid"/>
           </a:ln>
         </p:spPr>
+        <p:txBody>
+          <a:bodyPr/>
+          <a:lstStyle/>
+          <a:p>
+            <a:endParaRPr lang="en-US"/>
+          </a:p>
+        </p:txBody>
       </p:sp>
       <p:sp>
         <p:nvSpPr>
@@ -16996,6 +16269,13 @@
           </a:solidFill>
           <a:ln/>
         </p:spPr>
+        <p:txBody>
+          <a:bodyPr/>
+          <a:lstStyle/>
+          <a:p>
+            <a:endParaRPr lang="en-US"/>
+          </a:p>
+        </p:txBody>
       </p:sp>
       <p:sp>
         <p:nvSpPr>
@@ -17016,6 +16296,13 @@
           </a:solidFill>
           <a:ln/>
         </p:spPr>
+        <p:txBody>
+          <a:bodyPr/>
+          <a:lstStyle/>
+          <a:p>
+            <a:endParaRPr lang="en-US"/>
+          </a:p>
+        </p:txBody>
       </p:sp>
       <p:sp>
         <p:nvSpPr>
@@ -17036,6 +16323,13 @@
           </a:solidFill>
           <a:ln/>
         </p:spPr>
+        <p:txBody>
+          <a:bodyPr/>
+          <a:lstStyle/>
+          <a:p>
+            <a:endParaRPr lang="en-US"/>
+          </a:p>
+        </p:txBody>
       </p:sp>
       <p:sp>
         <p:nvSpPr>
@@ -17056,6 +16350,13 @@
           </a:solidFill>
           <a:ln/>
         </p:spPr>
+        <p:txBody>
+          <a:bodyPr/>
+          <a:lstStyle/>
+          <a:p>
+            <a:endParaRPr lang="en-US"/>
+          </a:p>
+        </p:txBody>
       </p:sp>
       <p:sp>
         <p:nvSpPr>
@@ -17080,7 +16381,7 @@
           </a:bodyPr>
           <a:lstStyle/>
           <a:p>
-            <a:pPr algn="l" indent="0" marL="0">
+            <a:pPr marL="0" indent="0" algn="l">
               <a:buNone/>
             </a:pPr>
             <a:r>
@@ -17121,12 +16422,6 @@
           </a:bodyPr>
           <a:lstStyle/>
           <a:p>
-            <a:pPr algn="l" indent="0" marL="0">
-              <a:lnSpc>
-                <a:spcPct val="145814"/>
-              </a:lnSpc>
-              <a:buNone/>
-            </a:pPr>
             <a:r>
               <a:rPr lang="en-US" sz="1425" dirty="0">
                 <a:solidFill>
@@ -17138,15 +16433,8 @@
               </a:rPr>
               <a:t>def load_artifact(path, settings):</a:t>
             </a:r>
-            <a:endParaRPr lang="en-US" sz="1425" dirty="0"/>
-          </a:p>
-          <a:p>
-            <a:pPr algn="l" indent="0" marL="0">
-              <a:lnSpc>
-                <a:spcPct val="145814"/>
-              </a:lnSpc>
-              <a:buNone/>
-            </a:pPr>
+          </a:p>
+          <a:p>
             <a:r>
               <a:rPr lang="en-US" sz="1425" dirty="0">
                 <a:solidFill>
@@ -17158,15 +16446,6 @@
               </a:rPr>
               <a:t>    if settings.sec_artifact_verification:                  </a:t>
             </a:r>
-            <a:endParaRPr lang="en-US" sz="1425" dirty="0"/>
-          </a:p>
-          <a:p>
-            <a:pPr algn="l" indent="0" marL="0">
-              <a:lnSpc>
-                <a:spcPct val="145814"/>
-              </a:lnSpc>
-              <a:buNone/>
-            </a:pPr>
             <a:r>
               <a:rPr lang="en-US" sz="1425" dirty="0">
                 <a:solidFill>
@@ -17176,14 +16455,10 @@
                 <a:ea typeface="Courier New" pitchFamily="34" charset="-122"/>
                 <a:cs typeface="Courier New" pitchFamily="34" charset="-120"/>
               </a:rPr>
-              <a:t># SECURE </a:t>
-            </a:r>
-            <a:pPr algn="l" indent="0" marL="0">
-              <a:lnSpc>
-                <a:spcPct val="145814"/>
-              </a:lnSpc>
-              <a:buNone/>
-            </a:pPr>
+              <a:t># SECURE</a:t>
+            </a:r>
+          </a:p>
+          <a:p>
             <a:r>
               <a:rPr lang="en-US" sz="1425" dirty="0">
                 <a:solidFill>
@@ -17195,15 +16470,8 @@
               </a:rPr>
               <a:t>        if Path(path).suffix != ".safetensors":</a:t>
             </a:r>
-            <a:endParaRPr lang="en-US" sz="1425" dirty="0"/>
-          </a:p>
-          <a:p>
-            <a:pPr algn="l" indent="0" marL="0">
-              <a:lnSpc>
-                <a:spcPct val="145814"/>
-              </a:lnSpc>
-              <a:buNone/>
-            </a:pPr>
+          </a:p>
+          <a:p>
             <a:r>
               <a:rPr lang="en-US" sz="1425" dirty="0">
                 <a:solidFill>
@@ -17215,15 +16483,8 @@
               </a:rPr>
               <a:t>            raise ArtifactError("refused: only .safetensors permitted")</a:t>
             </a:r>
-            <a:endParaRPr lang="en-US" sz="1425" dirty="0"/>
-          </a:p>
-          <a:p>
-            <a:pPr algn="l" indent="0" marL="0">
-              <a:lnSpc>
-                <a:spcPct val="145814"/>
-              </a:lnSpc>
-              <a:buNone/>
-            </a:pPr>
+          </a:p>
+          <a:p>
             <a:r>
               <a:rPr lang="en-US" sz="1425" dirty="0">
                 <a:solidFill>
@@ -17235,15 +16496,8 @@
               </a:rPr>
               <a:t>        if sha256_file(path) not in ALLOWED_HASHES:</a:t>
             </a:r>
-            <a:endParaRPr lang="en-US" sz="1425" dirty="0"/>
-          </a:p>
-          <a:p>
-            <a:pPr algn="l" indent="0" marL="0">
-              <a:lnSpc>
-                <a:spcPct val="145814"/>
-              </a:lnSpc>
-              <a:buNone/>
-            </a:pPr>
+          </a:p>
+          <a:p>
             <a:r>
               <a:rPr lang="en-US" sz="1425" dirty="0">
                 <a:solidFill>
@@ -17255,15 +16509,8 @@
               </a:rPr>
               <a:t>            raise ArtifactError("refused: not in pinned allowlist")</a:t>
             </a:r>
-            <a:endParaRPr lang="en-US" sz="1425" dirty="0"/>
-          </a:p>
-          <a:p>
-            <a:pPr algn="l" indent="0" marL="0">
-              <a:lnSpc>
-                <a:spcPct val="145814"/>
-              </a:lnSpc>
-              <a:buNone/>
-            </a:pPr>
+          </a:p>
+          <a:p>
             <a:r>
               <a:rPr lang="en-US" sz="1425" dirty="0">
                 <a:solidFill>
@@ -17273,17 +16520,8 @@
                 <a:ea typeface="Courier New" pitchFamily="34" charset="-122"/>
                 <a:cs typeface="Courier New" pitchFamily="34" charset="-120"/>
               </a:rPr>
-              <a:t>        return Path(path).read_bytes()                       </a:t>
-            </a:r>
-            <a:endParaRPr lang="en-US" sz="1425" dirty="0"/>
-          </a:p>
-          <a:p>
-            <a:pPr algn="l" indent="0" marL="0">
-              <a:lnSpc>
-                <a:spcPct val="145814"/>
-              </a:lnSpc>
-              <a:buNone/>
-            </a:pPr>
+              <a:t>        return Path(path).read_bytes()                      </a:t>
+            </a:r>
             <a:r>
               <a:rPr lang="en-US" sz="1425" dirty="0">
                 <a:solidFill>
@@ -17293,14 +16531,10 @@
                 <a:ea typeface="Courier New" pitchFamily="34" charset="-122"/>
                 <a:cs typeface="Courier New" pitchFamily="34" charset="-120"/>
               </a:rPr>
-              <a:t># never unpickles </a:t>
-            </a:r>
-            <a:pPr algn="l" indent="0" marL="0">
-              <a:lnSpc>
-                <a:spcPct val="145814"/>
-              </a:lnSpc>
-              <a:buNone/>
-            </a:pPr>
+              <a:t># never unpickles</a:t>
+            </a:r>
+          </a:p>
+          <a:p>
             <a:r>
               <a:rPr lang="en-US" sz="1425" dirty="0">
                 <a:solidFill>
@@ -17312,29 +16546,19 @@
               </a:rPr>
               <a:t>    with open(path, "rb") as f:                             </a:t>
             </a:r>
-            <a:pPr algn="l" indent="0" marL="0">
-              <a:lnSpc>
-                <a:spcPct val="145814"/>
-              </a:lnSpc>
-              <a:buNone/>
-            </a:pPr>
             <a:r>
               <a:rPr lang="en-US" sz="1425" dirty="0">
                 <a:solidFill>
-                  <a:srgbClr val="FD7EF5"/>
+                  <a:srgbClr val="36CDFF"/>
                 </a:solidFill>
                 <a:latin typeface="Courier New" pitchFamily="34" charset="0"/>
                 <a:ea typeface="Courier New" pitchFamily="34" charset="-122"/>
                 <a:cs typeface="Courier New" pitchFamily="34" charset="-120"/>
               </a:rPr>
-              <a:t># VULNERABLE </a:t>
-            </a:r>
-            <a:pPr algn="l" indent="0" marL="0">
-              <a:lnSpc>
-                <a:spcPct val="145814"/>
-              </a:lnSpc>
-              <a:buNone/>
-            </a:pPr>
+              <a:t># VULNERABLE</a:t>
+            </a:r>
+          </a:p>
+          <a:p>
             <a:r>
               <a:rPr lang="en-US" sz="1425" dirty="0">
                 <a:solidFill>
@@ -17346,24 +16570,17 @@
               </a:rPr>
               <a:t>        return pickle.load(f)                               </a:t>
             </a:r>
-            <a:pPr algn="l" indent="0" marL="0">
-              <a:lnSpc>
-                <a:spcPct val="145814"/>
-              </a:lnSpc>
-              <a:buNone/>
-            </a:pPr>
             <a:r>
               <a:rPr lang="en-US" sz="1425" dirty="0">
                 <a:solidFill>
-                  <a:srgbClr val="FD7EF5"/>
+                  <a:srgbClr val="36CDFF"/>
                 </a:solidFill>
                 <a:latin typeface="Courier New" pitchFamily="34" charset="0"/>
                 <a:ea typeface="Courier New" pitchFamily="34" charset="-122"/>
                 <a:cs typeface="Courier New" pitchFamily="34" charset="-120"/>
               </a:rPr>
-              <a:t># -&gt; RCE</a:t>
-            </a:r>
-            <a:endParaRPr lang="en-US" sz="1425" dirty="0"/>
+              <a:t># → RCE</a:t>
+            </a:r>
           </a:p>
         </p:txBody>
       </p:sp>
@@ -17390,7 +16607,7 @@
           </a:bodyPr>
           <a:lstStyle/>
           <a:p>
-            <a:pPr algn="l" indent="0" marL="0">
+            <a:pPr marL="0" indent="0" algn="l">
               <a:lnSpc>
                 <a:spcPct val="125522"/>
               </a:lnSpc>
@@ -17407,12 +16624,6 @@
               </a:rPr>
               <a:t>Format allowlist first, then hash pinning. The secure branch never calls pickle at all — not a safer unpickle, </a:t>
             </a:r>
-            <a:pPr algn="l" indent="0" marL="0">
-              <a:lnSpc>
-                <a:spcPct val="125522"/>
-              </a:lnSpc>
-              <a:buNone/>
-            </a:pPr>
             <a:r>
               <a:rPr lang="en-US" sz="2175" b="1" dirty="0">
                 <a:solidFill>
@@ -17430,14 +16641,14 @@
       </p:sp>
       <p:pic>
         <p:nvPicPr>
-          <p:cNvPr id="12" name="Image 0" descr="preencoded.png">    </p:cNvPr>
+          <p:cNvPr id="12" name="Image 0" descr="preencoded.png"/>
           <p:cNvPicPr>
             <a:picLocks noChangeAspect="1"/>
           </p:cNvPicPr>
           <p:nvPr/>
         </p:nvPicPr>
         <p:blipFill>
-          <a:blip r:embed="rId1"/>
+          <a:blip r:embed="rId3"/>
           <a:stretch>
             <a:fillRect/>
           </a:stretch>
@@ -17475,11 +16686,11 @@
           </a:bodyPr>
           <a:lstStyle/>
           <a:p>
-            <a:pPr algn="l" indent="0" marL="0">
-              <a:buNone/>
-            </a:pPr>
-            <a:r>
-              <a:rPr lang="en-US" sz="1200" spc="264" kern="0" dirty="0">
+            <a:pPr marL="0" indent="0" algn="l">
+              <a:buNone/>
+            </a:pPr>
+            <a:r>
+              <a:rPr lang="en-US" sz="1200" kern="0" spc="264" dirty="0">
                 <a:solidFill>
                   <a:srgbClr val="969696"/>
                 </a:solidFill>
@@ -17794,4 +17005,319 @@
     </a:ext>
   </a:extLst>
 </a:theme>
+</file>
+
+<file path=ppt/theme/theme2.xml><?xml version="1.0" encoding="utf-8"?>
+<a:theme xmlns:a="http://schemas.openxmlformats.org/drawingml/2006/main" name="Office Theme">
+  <a:themeElements>
+    <a:clrScheme name="Office">
+      <a:dk1>
+        <a:sysClr val="windowText" lastClr="000000"/>
+      </a:dk1>
+      <a:lt1>
+        <a:sysClr val="window" lastClr="FFFFFF"/>
+      </a:lt1>
+      <a:dk2>
+        <a:srgbClr val="0E2841"/>
+      </a:dk2>
+      <a:lt2>
+        <a:srgbClr val="E8E8E8"/>
+      </a:lt2>
+      <a:accent1>
+        <a:srgbClr val="156082"/>
+      </a:accent1>
+      <a:accent2>
+        <a:srgbClr val="E97132"/>
+      </a:accent2>
+      <a:accent3>
+        <a:srgbClr val="196B24"/>
+      </a:accent3>
+      <a:accent4>
+        <a:srgbClr val="0F9ED5"/>
+      </a:accent4>
+      <a:accent5>
+        <a:srgbClr val="A02B93"/>
+      </a:accent5>
+      <a:accent6>
+        <a:srgbClr val="4EA72E"/>
+      </a:accent6>
+      <a:hlink>
+        <a:srgbClr val="467886"/>
+      </a:hlink>
+      <a:folHlink>
+        <a:srgbClr val="96607D"/>
+      </a:folHlink>
+    </a:clrScheme>
+    <a:fontScheme name="Office">
+      <a:majorFont>
+        <a:latin typeface="Aptos Display" panose="02110004020202020204"/>
+        <a:ea typeface=""/>
+        <a:cs typeface=""/>
+        <a:font script="Jpan" typeface="游ゴシック Light"/>
+        <a:font script="Hang" typeface="맑은 고딕"/>
+        <a:font script="Hans" typeface="等线 Light"/>
+        <a:font script="Hant" typeface="新細明體"/>
+        <a:font script="Arab" typeface="Times New Roman"/>
+        <a:font script="Hebr" typeface="Times New Roman"/>
+        <a:font script="Thai" typeface="Angsana New"/>
+        <a:font script="Ethi" typeface="Nyala"/>
+        <a:font script="Beng" typeface="Vrinda"/>
+        <a:font script="Gujr" typeface="Shruti"/>
+        <a:font script="Khmr" typeface="MoolBoran"/>
+        <a:font script="Knda" typeface="Tunga"/>
+        <a:font script="Guru" typeface="Raavi"/>
+        <a:font script="Cans" typeface="Euphemia"/>
+        <a:font script="Cher" typeface="Plantagenet Cherokee"/>
+        <a:font script="Yiii" typeface="Microsoft Yi Baiti"/>
+        <a:font script="Tibt" typeface="Microsoft Himalaya"/>
+        <a:font script="Thaa" typeface="MV Boli"/>
+        <a:font script="Deva" typeface="Mangal"/>
+        <a:font script="Telu" typeface="Gautami"/>
+        <a:font script="Taml" typeface="Latha"/>
+        <a:font script="Syrc" typeface="Estrangelo Edessa"/>
+        <a:font script="Orya" typeface="Kalinga"/>
+        <a:font script="Mlym" typeface="Kartika"/>
+        <a:font script="Laoo" typeface="DokChampa"/>
+        <a:font script="Sinh" typeface="Iskoola Pota"/>
+        <a:font script="Mong" typeface="Mongolian Baiti"/>
+        <a:font script="Viet" typeface="Times New Roman"/>
+        <a:font script="Uigh" typeface="Microsoft Uighur"/>
+        <a:font script="Geor" typeface="Sylfaen"/>
+        <a:font script="Armn" typeface="Arial"/>
+        <a:font script="Bugi" typeface="Leelawadee UI"/>
+        <a:font script="Bopo" typeface="Microsoft JhengHei"/>
+        <a:font script="Java" typeface="Javanese Text"/>
+        <a:font script="Lisu" typeface="Segoe UI"/>
+        <a:font script="Mymr" typeface="Myanmar Text"/>
+        <a:font script="Nkoo" typeface="Ebrima"/>
+        <a:font script="Olck" typeface="Nirmala UI"/>
+        <a:font script="Osma" typeface="Ebrima"/>
+        <a:font script="Phag" typeface="Phagspa"/>
+        <a:font script="Syrn" typeface="Estrangelo Edessa"/>
+        <a:font script="Syrj" typeface="Estrangelo Edessa"/>
+        <a:font script="Syre" typeface="Estrangelo Edessa"/>
+        <a:font script="Sora" typeface="Nirmala UI"/>
+        <a:font script="Tale" typeface="Microsoft Tai Le"/>
+        <a:font script="Talu" typeface="Microsoft New Tai Lue"/>
+        <a:font script="Tfng" typeface="Ebrima"/>
+      </a:majorFont>
+      <a:minorFont>
+        <a:latin typeface="Aptos" panose="02110004020202020204"/>
+        <a:ea typeface=""/>
+        <a:cs typeface=""/>
+        <a:font script="Jpan" typeface="游ゴシック"/>
+        <a:font script="Hang" typeface="맑은 고딕"/>
+        <a:font script="Hans" typeface="等线"/>
+        <a:font script="Hant" typeface="新細明體"/>
+        <a:font script="Arab" typeface="Arial"/>
+        <a:font script="Hebr" typeface="Arial"/>
+        <a:font script="Thai" typeface="Cordia New"/>
+        <a:font script="Ethi" typeface="Nyala"/>
+        <a:font script="Beng" typeface="Vrinda"/>
+        <a:font script="Gujr" typeface="Shruti"/>
+        <a:font script="Khmr" typeface="DaunPenh"/>
+        <a:font script="Knda" typeface="Tunga"/>
+        <a:font script="Guru" typeface="Raavi"/>
+        <a:font script="Cans" typeface="Euphemia"/>
+        <a:font script="Cher" typeface="Plantagenet Cherokee"/>
+        <a:font script="Yiii" typeface="Microsoft Yi Baiti"/>
+        <a:font script="Tibt" typeface="Microsoft Himalaya"/>
+        <a:font script="Thaa" typeface="MV Boli"/>
+        <a:font script="Deva" typeface="Mangal"/>
+        <a:font script="Telu" typeface="Gautami"/>
+        <a:font script="Taml" typeface="Latha"/>
+        <a:font script="Syrc" typeface="Estrangelo Edessa"/>
+        <a:font script="Orya" typeface="Kalinga"/>
+        <a:font script="Mlym" typeface="Kartika"/>
+        <a:font script="Laoo" typeface="DokChampa"/>
+        <a:font script="Sinh" typeface="Iskoola Pota"/>
+        <a:font script="Mong" typeface="Mongolian Baiti"/>
+        <a:font script="Viet" typeface="Arial"/>
+        <a:font script="Uigh" typeface="Microsoft Uighur"/>
+        <a:font script="Geor" typeface="Sylfaen"/>
+        <a:font script="Armn" typeface="Arial"/>
+        <a:font script="Bugi" typeface="Leelawadee UI"/>
+        <a:font script="Bopo" typeface="Microsoft JhengHei"/>
+        <a:font script="Java" typeface="Javanese Text"/>
+        <a:font script="Lisu" typeface="Segoe UI"/>
+        <a:font script="Mymr" typeface="Myanmar Text"/>
+        <a:font script="Nkoo" typeface="Ebrima"/>
+        <a:font script="Olck" typeface="Nirmala UI"/>
+        <a:font script="Osma" typeface="Ebrima"/>
+        <a:font script="Phag" typeface="Phagspa"/>
+        <a:font script="Syrn" typeface="Estrangelo Edessa"/>
+        <a:font script="Syrj" typeface="Estrangelo Edessa"/>
+        <a:font script="Syre" typeface="Estrangelo Edessa"/>
+        <a:font script="Sora" typeface="Nirmala UI"/>
+        <a:font script="Tale" typeface="Microsoft Tai Le"/>
+        <a:font script="Talu" typeface="Microsoft New Tai Lue"/>
+        <a:font script="Tfng" typeface="Ebrima"/>
+      </a:minorFont>
+    </a:fontScheme>
+    <a:fmtScheme name="Office">
+      <a:fillStyleLst>
+        <a:solidFill>
+          <a:schemeClr val="phClr"/>
+        </a:solidFill>
+        <a:gradFill rotWithShape="1">
+          <a:gsLst>
+            <a:gs pos="0">
+              <a:schemeClr val="phClr">
+                <a:lumMod val="110000"/>
+                <a:satMod val="105000"/>
+                <a:tint val="67000"/>
+              </a:schemeClr>
+            </a:gs>
+            <a:gs pos="50000">
+              <a:schemeClr val="phClr">
+                <a:lumMod val="105000"/>
+                <a:satMod val="103000"/>
+                <a:tint val="73000"/>
+              </a:schemeClr>
+            </a:gs>
+            <a:gs pos="100000">
+              <a:schemeClr val="phClr">
+                <a:lumMod val="105000"/>
+                <a:satMod val="109000"/>
+                <a:tint val="81000"/>
+              </a:schemeClr>
+            </a:gs>
+          </a:gsLst>
+          <a:lin ang="5400000" scaled="0"/>
+        </a:gradFill>
+        <a:gradFill rotWithShape="1">
+          <a:gsLst>
+            <a:gs pos="0">
+              <a:schemeClr val="phClr">
+                <a:satMod val="103000"/>
+                <a:lumMod val="102000"/>
+                <a:tint val="94000"/>
+              </a:schemeClr>
+            </a:gs>
+            <a:gs pos="50000">
+              <a:schemeClr val="phClr">
+                <a:satMod val="110000"/>
+                <a:lumMod val="100000"/>
+                <a:shade val="100000"/>
+              </a:schemeClr>
+            </a:gs>
+            <a:gs pos="100000">
+              <a:schemeClr val="phClr">
+                <a:lumMod val="99000"/>
+                <a:satMod val="120000"/>
+                <a:shade val="78000"/>
+              </a:schemeClr>
+            </a:gs>
+          </a:gsLst>
+          <a:lin ang="5400000" scaled="0"/>
+        </a:gradFill>
+      </a:fillStyleLst>
+      <a:lnStyleLst>
+        <a:ln w="12700" cap="flat" cmpd="sng" algn="ctr">
+          <a:solidFill>
+            <a:schemeClr val="phClr"/>
+          </a:solidFill>
+          <a:prstDash val="solid"/>
+          <a:miter lim="800000"/>
+        </a:ln>
+        <a:ln w="19050" cap="flat" cmpd="sng" algn="ctr">
+          <a:solidFill>
+            <a:schemeClr val="phClr"/>
+          </a:solidFill>
+          <a:prstDash val="solid"/>
+          <a:miter lim="800000"/>
+        </a:ln>
+        <a:ln w="25400" cap="flat" cmpd="sng" algn="ctr">
+          <a:solidFill>
+            <a:schemeClr val="phClr"/>
+          </a:solidFill>
+          <a:prstDash val="solid"/>
+          <a:miter lim="800000"/>
+        </a:ln>
+      </a:lnStyleLst>
+      <a:effectStyleLst>
+        <a:effectStyle>
+          <a:effectLst/>
+        </a:effectStyle>
+        <a:effectStyle>
+          <a:effectLst/>
+        </a:effectStyle>
+        <a:effectStyle>
+          <a:effectLst>
+            <a:outerShdw blurRad="57150" dist="19050" dir="5400000" algn="ctr" rotWithShape="0">
+              <a:srgbClr val="000000">
+                <a:alpha val="63000"/>
+              </a:srgbClr>
+            </a:outerShdw>
+          </a:effectLst>
+        </a:effectStyle>
+      </a:effectStyleLst>
+      <a:bgFillStyleLst>
+        <a:solidFill>
+          <a:schemeClr val="phClr"/>
+        </a:solidFill>
+        <a:solidFill>
+          <a:schemeClr val="phClr">
+            <a:tint val="95000"/>
+            <a:satMod val="170000"/>
+          </a:schemeClr>
+        </a:solidFill>
+        <a:gradFill rotWithShape="1">
+          <a:gsLst>
+            <a:gs pos="0">
+              <a:schemeClr val="phClr">
+                <a:tint val="93000"/>
+                <a:satMod val="150000"/>
+                <a:shade val="98000"/>
+                <a:lumMod val="102000"/>
+              </a:schemeClr>
+            </a:gs>
+            <a:gs pos="50000">
+              <a:schemeClr val="phClr">
+                <a:tint val="98000"/>
+                <a:satMod val="130000"/>
+                <a:shade val="90000"/>
+                <a:lumMod val="103000"/>
+              </a:schemeClr>
+            </a:gs>
+            <a:gs pos="100000">
+              <a:schemeClr val="phClr">
+                <a:shade val="63000"/>
+                <a:satMod val="120000"/>
+              </a:schemeClr>
+            </a:gs>
+          </a:gsLst>
+          <a:lin ang="5400000" scaled="0"/>
+        </a:gradFill>
+      </a:bgFillStyleLst>
+    </a:fmtScheme>
+  </a:themeElements>
+  <a:objectDefaults>
+    <a:lnDef>
+      <a:spPr/>
+      <a:bodyPr/>
+      <a:lstStyle/>
+      <a:style>
+        <a:lnRef idx="2">
+          <a:schemeClr val="accent1"/>
+        </a:lnRef>
+        <a:fillRef idx="0">
+          <a:schemeClr val="accent1"/>
+        </a:fillRef>
+        <a:effectRef idx="1">
+          <a:schemeClr val="accent1"/>
+        </a:effectRef>
+        <a:fontRef idx="minor">
+          <a:schemeClr val="tx1"/>
+        </a:fontRef>
+      </a:style>
+    </a:lnDef>
+  </a:objectDefaults>
+  <a:extraClrSchemeLst/>
+  <a:extLst>
+    <a:ext uri="{05A4C25C-085E-4340-85A3-A5531E510DB2}">
+      <thm15:themeFamily xmlns:thm15="http://schemas.microsoft.com/office/thememl/2012/main" name="Office Theme" id="{2E142A2C-CD16-42D6-873A-C26D2A0506FA}" vid="{1BDDFF52-6CD6-40A5-AB3C-68EB2F1E4D0A}"/>
+    </a:ext>
+  </a:extLst>
+</a:theme>
 </file>